--- a/docs/plots/carbo/jx_carbo_adjcif_grade2.pptx
+++ b/docs/plots/carbo/jx_carbo_adjcif_grade2.pptx
@@ -2271,7 +2271,7 @@
           </p:nvSpPr>
           <p:spPr>
             <a:xfrm>
-              <a:off x="910695" y="5091583"/>
+              <a:off x="910695" y="5080939"/>
               <a:ext cx="7706515" cy="0"/>
             </a:xfrm>
             <a:custGeom>
@@ -2314,7 +2314,7 @@
           </p:nvSpPr>
           <p:spPr>
             <a:xfrm>
-              <a:off x="910695" y="4113907"/>
+              <a:off x="910695" y="4081974"/>
               <a:ext cx="7706515" cy="0"/>
             </a:xfrm>
             <a:custGeom>
@@ -2357,7 +2357,7 @@
           </p:nvSpPr>
           <p:spPr>
             <a:xfrm>
-              <a:off x="910695" y="3136230"/>
+              <a:off x="910695" y="3083009"/>
               <a:ext cx="7706515" cy="0"/>
             </a:xfrm>
             <a:custGeom>
@@ -2615,7 +2615,7 @@
           </p:nvSpPr>
           <p:spPr>
             <a:xfrm>
-              <a:off x="910695" y="4602745"/>
+              <a:off x="910695" y="4581457"/>
               <a:ext cx="7706515" cy="0"/>
             </a:xfrm>
             <a:custGeom>
@@ -2658,7 +2658,7 @@
           </p:nvSpPr>
           <p:spPr>
             <a:xfrm>
-              <a:off x="910695" y="3625069"/>
+              <a:off x="910695" y="3582492"/>
               <a:ext cx="7706515" cy="0"/>
             </a:xfrm>
             <a:custGeom>
@@ -2701,7 +2701,7 @@
           </p:nvSpPr>
           <p:spPr>
             <a:xfrm>
-              <a:off x="910695" y="2647392"/>
+              <a:off x="910695" y="2583527"/>
               <a:ext cx="7706515" cy="0"/>
             </a:xfrm>
             <a:custGeom>
@@ -2916,180 +2916,180 @@
           </p:nvSpPr>
           <p:spPr>
             <a:xfrm>
-              <a:off x="1260991" y="4185587"/>
-              <a:ext cx="7005923" cy="1368363"/>
+              <a:off x="1260991" y="4122576"/>
+              <a:ext cx="7005923" cy="1430222"/>
             </a:xfrm>
             <a:custGeom>
               <a:avLst/>
               <a:pathLst>
-                <a:path w="7005923" h="1368363">
+                <a:path w="7005923" h="1430222">
                   <a:moveTo>
-                    <a:pt x="0" y="1368363"/>
+                    <a:pt x="0" y="1430222"/>
                   </a:moveTo>
                   <a:lnTo>
-                    <a:pt x="166807" y="1368363"/>
-                  </a:lnTo>
-                  <a:lnTo>
-                    <a:pt x="166807" y="1341848"/>
-                  </a:lnTo>
-                  <a:lnTo>
-                    <a:pt x="250211" y="1341848"/>
-                  </a:lnTo>
-                  <a:lnTo>
-                    <a:pt x="250211" y="1182325"/>
-                  </a:lnTo>
-                  <a:lnTo>
-                    <a:pt x="333615" y="1182325"/>
-                  </a:lnTo>
-                  <a:lnTo>
-                    <a:pt x="333615" y="1154700"/>
-                  </a:lnTo>
-                  <a:lnTo>
-                    <a:pt x="417019" y="1154700"/>
-                  </a:lnTo>
-                  <a:lnTo>
-                    <a:pt x="417019" y="1127116"/>
-                  </a:lnTo>
-                  <a:lnTo>
-                    <a:pt x="583826" y="1127116"/>
-                  </a:lnTo>
-                  <a:lnTo>
-                    <a:pt x="583826" y="990215"/>
-                  </a:lnTo>
-                  <a:lnTo>
-                    <a:pt x="667230" y="990215"/>
-                  </a:lnTo>
-                  <a:lnTo>
-                    <a:pt x="667230" y="961991"/>
-                  </a:lnTo>
-                  <a:lnTo>
-                    <a:pt x="750634" y="961991"/>
-                  </a:lnTo>
-                  <a:lnTo>
-                    <a:pt x="750634" y="904713"/>
-                  </a:lnTo>
-                  <a:lnTo>
-                    <a:pt x="1084250" y="904713"/>
-                  </a:lnTo>
-                  <a:lnTo>
-                    <a:pt x="1084250" y="875642"/>
-                  </a:lnTo>
-                  <a:lnTo>
-                    <a:pt x="1167653" y="875642"/>
-                  </a:lnTo>
-                  <a:lnTo>
-                    <a:pt x="1167653" y="846542"/>
-                  </a:lnTo>
-                  <a:lnTo>
-                    <a:pt x="1417865" y="846542"/>
-                  </a:lnTo>
-                  <a:lnTo>
-                    <a:pt x="1417865" y="817472"/>
-                  </a:lnTo>
-                  <a:lnTo>
-                    <a:pt x="1501269" y="817472"/>
-                  </a:lnTo>
-                  <a:lnTo>
-                    <a:pt x="1501269" y="788236"/>
-                  </a:lnTo>
-                  <a:lnTo>
-                    <a:pt x="2001692" y="788236"/>
-                  </a:lnTo>
-                  <a:lnTo>
-                    <a:pt x="2001692" y="758738"/>
-                  </a:lnTo>
-                  <a:lnTo>
-                    <a:pt x="2168500" y="758738"/>
-                  </a:lnTo>
-                  <a:lnTo>
-                    <a:pt x="2168500" y="699881"/>
-                  </a:lnTo>
-                  <a:lnTo>
-                    <a:pt x="2502115" y="699881"/>
-                  </a:lnTo>
-                  <a:lnTo>
-                    <a:pt x="2502115" y="670029"/>
-                  </a:lnTo>
-                  <a:lnTo>
-                    <a:pt x="2585519" y="670029"/>
-                  </a:lnTo>
-                  <a:lnTo>
-                    <a:pt x="2585519" y="639765"/>
-                  </a:lnTo>
-                  <a:lnTo>
-                    <a:pt x="3085942" y="639765"/>
-                  </a:lnTo>
-                  <a:lnTo>
-                    <a:pt x="3085942" y="578968"/>
-                  </a:lnTo>
-                  <a:lnTo>
-                    <a:pt x="3169346" y="578968"/>
-                  </a:lnTo>
-                  <a:lnTo>
-                    <a:pt x="3169346" y="488148"/>
-                  </a:lnTo>
-                  <a:lnTo>
-                    <a:pt x="3336154" y="488148"/>
-                  </a:lnTo>
-                  <a:lnTo>
-                    <a:pt x="3336154" y="457100"/>
-                  </a:lnTo>
-                  <a:lnTo>
-                    <a:pt x="3419557" y="457100"/>
-                  </a:lnTo>
-                  <a:lnTo>
-                    <a:pt x="3419557" y="426060"/>
-                  </a:lnTo>
-                  <a:lnTo>
-                    <a:pt x="4253596" y="426060"/>
-                  </a:lnTo>
-                  <a:lnTo>
-                    <a:pt x="4253596" y="395059"/>
-                  </a:lnTo>
-                  <a:lnTo>
-                    <a:pt x="4587211" y="395059"/>
-                  </a:lnTo>
-                  <a:lnTo>
-                    <a:pt x="4587211" y="363760"/>
-                  </a:lnTo>
-                  <a:lnTo>
-                    <a:pt x="4670615" y="363760"/>
-                  </a:lnTo>
-                  <a:lnTo>
-                    <a:pt x="4670615" y="332435"/>
-                  </a:lnTo>
-                  <a:lnTo>
-                    <a:pt x="4920827" y="332435"/>
-                  </a:lnTo>
-                  <a:lnTo>
-                    <a:pt x="4920827" y="237876"/>
-                  </a:lnTo>
-                  <a:lnTo>
-                    <a:pt x="5004231" y="237876"/>
-                  </a:lnTo>
-                  <a:lnTo>
-                    <a:pt x="5004231" y="204880"/>
-                  </a:lnTo>
-                  <a:lnTo>
-                    <a:pt x="5671461" y="204880"/>
-                  </a:lnTo>
-                  <a:lnTo>
-                    <a:pt x="5671461" y="171594"/>
-                  </a:lnTo>
-                  <a:lnTo>
-                    <a:pt x="6338692" y="171594"/>
-                  </a:lnTo>
-                  <a:lnTo>
-                    <a:pt x="6338692" y="137725"/>
-                  </a:lnTo>
-                  <a:lnTo>
-                    <a:pt x="6672308" y="137725"/>
-                  </a:lnTo>
-                  <a:lnTo>
-                    <a:pt x="6672308" y="34858"/>
-                  </a:lnTo>
-                  <a:lnTo>
-                    <a:pt x="7005923" y="34858"/>
+                    <a:pt x="166807" y="1430222"/>
+                  </a:lnTo>
+                  <a:lnTo>
+                    <a:pt x="166807" y="1402578"/>
+                  </a:lnTo>
+                  <a:lnTo>
+                    <a:pt x="250211" y="1402578"/>
+                  </a:lnTo>
+                  <a:lnTo>
+                    <a:pt x="250211" y="1236992"/>
+                  </a:lnTo>
+                  <a:lnTo>
+                    <a:pt x="333615" y="1236992"/>
+                  </a:lnTo>
+                  <a:lnTo>
+                    <a:pt x="333615" y="1208453"/>
+                  </a:lnTo>
+                  <a:lnTo>
+                    <a:pt x="417019" y="1208453"/>
+                  </a:lnTo>
+                  <a:lnTo>
+                    <a:pt x="417019" y="1179943"/>
+                  </a:lnTo>
+                  <a:lnTo>
+                    <a:pt x="583826" y="1179943"/>
+                  </a:lnTo>
+                  <a:lnTo>
+                    <a:pt x="583826" y="1037673"/>
+                  </a:lnTo>
+                  <a:lnTo>
+                    <a:pt x="667230" y="1037673"/>
+                  </a:lnTo>
+                  <a:lnTo>
+                    <a:pt x="667230" y="1008296"/>
+                  </a:lnTo>
+                  <a:lnTo>
+                    <a:pt x="750634" y="1008296"/>
+                  </a:lnTo>
+                  <a:lnTo>
+                    <a:pt x="750634" y="948698"/>
+                  </a:lnTo>
+                  <a:lnTo>
+                    <a:pt x="1084250" y="948698"/>
+                  </a:lnTo>
+                  <a:lnTo>
+                    <a:pt x="1084250" y="918101"/>
+                  </a:lnTo>
+                  <a:lnTo>
+                    <a:pt x="1167653" y="918101"/>
+                  </a:lnTo>
+                  <a:lnTo>
+                    <a:pt x="1167653" y="887561"/>
+                  </a:lnTo>
+                  <a:lnTo>
+                    <a:pt x="1417865" y="887561"/>
+                  </a:lnTo>
+                  <a:lnTo>
+                    <a:pt x="1417865" y="857073"/>
+                  </a:lnTo>
+                  <a:lnTo>
+                    <a:pt x="1501269" y="857073"/>
+                  </a:lnTo>
+                  <a:lnTo>
+                    <a:pt x="1501269" y="826408"/>
+                  </a:lnTo>
+                  <a:lnTo>
+                    <a:pt x="2001692" y="826408"/>
+                  </a:lnTo>
+                  <a:lnTo>
+                    <a:pt x="2001692" y="795464"/>
+                  </a:lnTo>
+                  <a:lnTo>
+                    <a:pt x="2168500" y="795464"/>
+                  </a:lnTo>
+                  <a:lnTo>
+                    <a:pt x="2168500" y="733822"/>
+                  </a:lnTo>
+                  <a:lnTo>
+                    <a:pt x="2502115" y="733822"/>
+                  </a:lnTo>
+                  <a:lnTo>
+                    <a:pt x="2502115" y="702465"/>
+                  </a:lnTo>
+                  <a:lnTo>
+                    <a:pt x="2585519" y="702465"/>
+                  </a:lnTo>
+                  <a:lnTo>
+                    <a:pt x="2585519" y="670769"/>
+                  </a:lnTo>
+                  <a:lnTo>
+                    <a:pt x="3085942" y="670769"/>
+                  </a:lnTo>
+                  <a:lnTo>
+                    <a:pt x="3085942" y="607023"/>
+                  </a:lnTo>
+                  <a:lnTo>
+                    <a:pt x="3169346" y="607023"/>
+                  </a:lnTo>
+                  <a:lnTo>
+                    <a:pt x="3169346" y="511503"/>
+                  </a:lnTo>
+                  <a:lnTo>
+                    <a:pt x="3336154" y="511503"/>
+                  </a:lnTo>
+                  <a:lnTo>
+                    <a:pt x="3336154" y="478972"/>
+                  </a:lnTo>
+                  <a:lnTo>
+                    <a:pt x="3419557" y="478972"/>
+                  </a:lnTo>
+                  <a:lnTo>
+                    <a:pt x="3419557" y="446439"/>
+                  </a:lnTo>
+                  <a:lnTo>
+                    <a:pt x="4253596" y="446439"/>
+                  </a:lnTo>
+                  <a:lnTo>
+                    <a:pt x="4253596" y="413981"/>
+                  </a:lnTo>
+                  <a:lnTo>
+                    <a:pt x="4587211" y="413981"/>
+                  </a:lnTo>
+                  <a:lnTo>
+                    <a:pt x="4587211" y="381005"/>
+                  </a:lnTo>
+                  <a:lnTo>
+                    <a:pt x="4670615" y="381005"/>
+                  </a:lnTo>
+                  <a:lnTo>
+                    <a:pt x="4670615" y="347983"/>
+                  </a:lnTo>
+                  <a:lnTo>
+                    <a:pt x="4920827" y="347983"/>
+                  </a:lnTo>
+                  <a:lnTo>
+                    <a:pt x="4920827" y="248107"/>
+                  </a:lnTo>
+                  <a:lnTo>
+                    <a:pt x="5004231" y="248107"/>
+                  </a:lnTo>
+                  <a:lnTo>
+                    <a:pt x="5004231" y="213347"/>
+                  </a:lnTo>
+                  <a:lnTo>
+                    <a:pt x="5671461" y="213347"/>
+                  </a:lnTo>
+                  <a:lnTo>
+                    <a:pt x="5671461" y="178291"/>
+                  </a:lnTo>
+                  <a:lnTo>
+                    <a:pt x="6338692" y="178291"/>
+                  </a:lnTo>
+                  <a:lnTo>
+                    <a:pt x="6338692" y="142704"/>
+                  </a:lnTo>
+                  <a:lnTo>
+                    <a:pt x="6672308" y="142704"/>
+                  </a:lnTo>
+                  <a:lnTo>
+                    <a:pt x="6672308" y="35957"/>
+                  </a:lnTo>
+                  <a:lnTo>
+                    <a:pt x="7005923" y="35957"/>
                   </a:lnTo>
                   <a:lnTo>
                     <a:pt x="7005923" y="0"/>
@@ -3122,179 +3122,179 @@
           <p:spPr>
             <a:xfrm>
               <a:off x="1260991" y="2861938"/>
-              <a:ext cx="7005923" cy="2654116"/>
+              <a:ext cx="7005923" cy="2655257"/>
             </a:xfrm>
             <a:custGeom>
               <a:avLst/>
               <a:pathLst>
-                <a:path w="7005923" h="2654116">
+                <a:path w="7005923" h="2655257">
                   <a:moveTo>
-                    <a:pt x="0" y="2654116"/>
+                    <a:pt x="0" y="2655257"/>
                   </a:moveTo>
                   <a:lnTo>
-                    <a:pt x="166807" y="2654116"/>
-                  </a:lnTo>
-                  <a:lnTo>
-                    <a:pt x="166807" y="2590168"/>
-                  </a:lnTo>
-                  <a:lnTo>
-                    <a:pt x="250211" y="2590168"/>
-                  </a:lnTo>
-                  <a:lnTo>
-                    <a:pt x="250211" y="2216434"/>
-                  </a:lnTo>
-                  <a:lnTo>
-                    <a:pt x="333615" y="2216434"/>
-                  </a:lnTo>
-                  <a:lnTo>
-                    <a:pt x="333615" y="2153614"/>
-                  </a:lnTo>
-                  <a:lnTo>
-                    <a:pt x="417019" y="2153614"/>
-                  </a:lnTo>
-                  <a:lnTo>
-                    <a:pt x="417019" y="2091439"/>
-                  </a:lnTo>
-                  <a:lnTo>
-                    <a:pt x="583826" y="2091439"/>
-                  </a:lnTo>
-                  <a:lnTo>
-                    <a:pt x="583826" y="1790990"/>
-                  </a:lnTo>
-                  <a:lnTo>
-                    <a:pt x="667230" y="1790990"/>
-                  </a:lnTo>
-                  <a:lnTo>
-                    <a:pt x="667230" y="1730715"/>
-                  </a:lnTo>
-                  <a:lnTo>
-                    <a:pt x="750634" y="1730715"/>
-                  </a:lnTo>
-                  <a:lnTo>
-                    <a:pt x="750634" y="1610129"/>
-                  </a:lnTo>
-                  <a:lnTo>
-                    <a:pt x="1084250" y="1610129"/>
-                  </a:lnTo>
-                  <a:lnTo>
-                    <a:pt x="1084250" y="1549812"/>
-                  </a:lnTo>
-                  <a:lnTo>
-                    <a:pt x="1167653" y="1549812"/>
-                  </a:lnTo>
-                  <a:lnTo>
-                    <a:pt x="1167653" y="1490026"/>
-                  </a:lnTo>
-                  <a:lnTo>
-                    <a:pt x="1417865" y="1490026"/>
-                  </a:lnTo>
-                  <a:lnTo>
-                    <a:pt x="1417865" y="1430893"/>
-                  </a:lnTo>
-                  <a:lnTo>
-                    <a:pt x="1501269" y="1430893"/>
-                  </a:lnTo>
-                  <a:lnTo>
-                    <a:pt x="1501269" y="1372015"/>
-                  </a:lnTo>
-                  <a:lnTo>
-                    <a:pt x="2001692" y="1372015"/>
-                  </a:lnTo>
-                  <a:lnTo>
-                    <a:pt x="2001692" y="1313210"/>
-                  </a:lnTo>
-                  <a:lnTo>
-                    <a:pt x="2168500" y="1313210"/>
-                  </a:lnTo>
-                  <a:lnTo>
-                    <a:pt x="2168500" y="1197668"/>
-                  </a:lnTo>
-                  <a:lnTo>
-                    <a:pt x="2502115" y="1197668"/>
-                  </a:lnTo>
-                  <a:lnTo>
-                    <a:pt x="2502115" y="1139975"/>
-                  </a:lnTo>
-                  <a:lnTo>
-                    <a:pt x="2585519" y="1139975"/>
-                  </a:lnTo>
-                  <a:lnTo>
-                    <a:pt x="2585519" y="1082104"/>
-                  </a:lnTo>
-                  <a:lnTo>
-                    <a:pt x="3085942" y="1082104"/>
-                  </a:lnTo>
-                  <a:lnTo>
-                    <a:pt x="3085942" y="967722"/>
-                  </a:lnTo>
-                  <a:lnTo>
-                    <a:pt x="3169346" y="967722"/>
-                  </a:lnTo>
-                  <a:lnTo>
-                    <a:pt x="3169346" y="801483"/>
-                  </a:lnTo>
-                  <a:lnTo>
-                    <a:pt x="3336154" y="801483"/>
-                  </a:lnTo>
-                  <a:lnTo>
-                    <a:pt x="3336154" y="745913"/>
-                  </a:lnTo>
-                  <a:lnTo>
-                    <a:pt x="3419557" y="745913"/>
-                  </a:lnTo>
-                  <a:lnTo>
-                    <a:pt x="3419557" y="690993"/>
-                  </a:lnTo>
-                  <a:lnTo>
-                    <a:pt x="4253596" y="690993"/>
-                  </a:lnTo>
-                  <a:lnTo>
-                    <a:pt x="4253596" y="636775"/>
-                  </a:lnTo>
-                  <a:lnTo>
-                    <a:pt x="4587211" y="636775"/>
-                  </a:lnTo>
-                  <a:lnTo>
-                    <a:pt x="4587211" y="582674"/>
-                  </a:lnTo>
-                  <a:lnTo>
-                    <a:pt x="4670615" y="582674"/>
-                  </a:lnTo>
-                  <a:lnTo>
-                    <a:pt x="4670615" y="529169"/>
-                  </a:lnTo>
-                  <a:lnTo>
-                    <a:pt x="4920827" y="529169"/>
-                  </a:lnTo>
-                  <a:lnTo>
-                    <a:pt x="4920827" y="371505"/>
-                  </a:lnTo>
-                  <a:lnTo>
-                    <a:pt x="5004231" y="371505"/>
-                  </a:lnTo>
-                  <a:lnTo>
-                    <a:pt x="5004231" y="317841"/>
-                  </a:lnTo>
-                  <a:lnTo>
-                    <a:pt x="5671461" y="317841"/>
-                  </a:lnTo>
-                  <a:lnTo>
-                    <a:pt x="5671461" y="264405"/>
-                  </a:lnTo>
-                  <a:lnTo>
-                    <a:pt x="6338692" y="264405"/>
-                  </a:lnTo>
-                  <a:lnTo>
-                    <a:pt x="6338692" y="210755"/>
-                  </a:lnTo>
-                  <a:lnTo>
-                    <a:pt x="6672308" y="210755"/>
-                  </a:lnTo>
-                  <a:lnTo>
-                    <a:pt x="6672308" y="52227"/>
-                  </a:lnTo>
-                  <a:lnTo>
-                    <a:pt x="7005923" y="52227"/>
+                    <a:pt x="166807" y="2655257"/>
+                  </a:lnTo>
+                  <a:lnTo>
+                    <a:pt x="166807" y="2592458"/>
+                  </a:lnTo>
+                  <a:lnTo>
+                    <a:pt x="250211" y="2592458"/>
+                  </a:lnTo>
+                  <a:lnTo>
+                    <a:pt x="250211" y="2226173"/>
+                  </a:lnTo>
+                  <a:lnTo>
+                    <a:pt x="333615" y="2226173"/>
+                  </a:lnTo>
+                  <a:lnTo>
+                    <a:pt x="333615" y="2164740"/>
+                  </a:lnTo>
+                  <a:lnTo>
+                    <a:pt x="417019" y="2164740"/>
+                  </a:lnTo>
+                  <a:lnTo>
+                    <a:pt x="417019" y="2103865"/>
+                  </a:lnTo>
+                  <a:lnTo>
+                    <a:pt x="583826" y="2103865"/>
+                  </a:lnTo>
+                  <a:lnTo>
+                    <a:pt x="583826" y="1807424"/>
+                  </a:lnTo>
+                  <a:lnTo>
+                    <a:pt x="667230" y="1807424"/>
+                  </a:lnTo>
+                  <a:lnTo>
+                    <a:pt x="667230" y="1747724"/>
+                  </a:lnTo>
+                  <a:lnTo>
+                    <a:pt x="750634" y="1747724"/>
+                  </a:lnTo>
+                  <a:lnTo>
+                    <a:pt x="750634" y="1628189"/>
+                  </a:lnTo>
+                  <a:lnTo>
+                    <a:pt x="1084250" y="1628189"/>
+                  </a:lnTo>
+                  <a:lnTo>
+                    <a:pt x="1084250" y="1567641"/>
+                  </a:lnTo>
+                  <a:lnTo>
+                    <a:pt x="1167653" y="1567641"/>
+                  </a:lnTo>
+                  <a:lnTo>
+                    <a:pt x="1167653" y="1507754"/>
+                  </a:lnTo>
+                  <a:lnTo>
+                    <a:pt x="1417865" y="1507754"/>
+                  </a:lnTo>
+                  <a:lnTo>
+                    <a:pt x="1417865" y="1448517"/>
+                  </a:lnTo>
+                  <a:lnTo>
+                    <a:pt x="1501269" y="1448517"/>
+                  </a:lnTo>
+                  <a:lnTo>
+                    <a:pt x="1501269" y="1389488"/>
+                  </a:lnTo>
+                  <a:lnTo>
+                    <a:pt x="2001692" y="1389488"/>
+                  </a:lnTo>
+                  <a:lnTo>
+                    <a:pt x="2001692" y="1330477"/>
+                  </a:lnTo>
+                  <a:lnTo>
+                    <a:pt x="2168500" y="1330477"/>
+                  </a:lnTo>
+                  <a:lnTo>
+                    <a:pt x="2168500" y="1214587"/>
+                  </a:lnTo>
+                  <a:lnTo>
+                    <a:pt x="2502115" y="1214587"/>
+                  </a:lnTo>
+                  <a:lnTo>
+                    <a:pt x="2502115" y="1156478"/>
+                  </a:lnTo>
+                  <a:lnTo>
+                    <a:pt x="2585519" y="1156478"/>
+                  </a:lnTo>
+                  <a:lnTo>
+                    <a:pt x="2585519" y="1098320"/>
+                  </a:lnTo>
+                  <a:lnTo>
+                    <a:pt x="3085942" y="1098320"/>
+                  </a:lnTo>
+                  <a:lnTo>
+                    <a:pt x="3085942" y="983099"/>
+                  </a:lnTo>
+                  <a:lnTo>
+                    <a:pt x="3169346" y="983099"/>
+                  </a:lnTo>
+                  <a:lnTo>
+                    <a:pt x="3169346" y="814789"/>
+                  </a:lnTo>
+                  <a:lnTo>
+                    <a:pt x="3336154" y="814789"/>
+                  </a:lnTo>
+                  <a:lnTo>
+                    <a:pt x="3336154" y="758649"/>
+                  </a:lnTo>
+                  <a:lnTo>
+                    <a:pt x="3419557" y="758649"/>
+                  </a:lnTo>
+                  <a:lnTo>
+                    <a:pt x="3419557" y="703102"/>
+                  </a:lnTo>
+                  <a:lnTo>
+                    <a:pt x="4253596" y="703102"/>
+                  </a:lnTo>
+                  <a:lnTo>
+                    <a:pt x="4253596" y="648274"/>
+                  </a:lnTo>
+                  <a:lnTo>
+                    <a:pt x="4587211" y="648274"/>
+                  </a:lnTo>
+                  <a:lnTo>
+                    <a:pt x="4587211" y="593177"/>
+                  </a:lnTo>
+                  <a:lnTo>
+                    <a:pt x="4670615" y="593177"/>
+                  </a:lnTo>
+                  <a:lnTo>
+                    <a:pt x="4670615" y="538609"/>
+                  </a:lnTo>
+                  <a:lnTo>
+                    <a:pt x="4920827" y="538609"/>
+                  </a:lnTo>
+                  <a:lnTo>
+                    <a:pt x="4920827" y="377248"/>
+                  </a:lnTo>
+                  <a:lnTo>
+                    <a:pt x="5004231" y="377248"/>
+                  </a:lnTo>
+                  <a:lnTo>
+                    <a:pt x="5004231" y="322378"/>
+                  </a:lnTo>
+                  <a:lnTo>
+                    <a:pt x="5671461" y="322378"/>
+                  </a:lnTo>
+                  <a:lnTo>
+                    <a:pt x="5671461" y="267711"/>
+                  </a:lnTo>
+                  <a:lnTo>
+                    <a:pt x="6338692" y="267711"/>
+                  </a:lnTo>
+                  <a:lnTo>
+                    <a:pt x="6338692" y="212902"/>
+                  </a:lnTo>
+                  <a:lnTo>
+                    <a:pt x="6672308" y="212902"/>
+                  </a:lnTo>
+                  <a:lnTo>
+                    <a:pt x="6672308" y="52612"/>
+                  </a:lnTo>
+                  <a:lnTo>
+                    <a:pt x="7005923" y="52612"/>
                   </a:lnTo>
                   <a:lnTo>
                     <a:pt x="7005923" y="0"/>
@@ -3372,7 +3372,7 @@
           </p:nvSpPr>
           <p:spPr>
             <a:xfrm>
-              <a:off x="692708" y="4562694"/>
+              <a:off x="692708" y="4541406"/>
               <a:ext cx="155356" cy="80101"/>
             </a:xfrm>
             <a:prstGeom prst="rect">
@@ -3418,7 +3418,7 @@
           </p:nvSpPr>
           <p:spPr>
             <a:xfrm>
-              <a:off x="692708" y="3585018"/>
+              <a:off x="692708" y="3542441"/>
               <a:ext cx="155356" cy="80101"/>
             </a:xfrm>
             <a:prstGeom prst="rect">
@@ -3464,7 +3464,7 @@
           </p:nvSpPr>
           <p:spPr>
             <a:xfrm>
-              <a:off x="692708" y="2607341"/>
+              <a:off x="692708" y="2543476"/>
               <a:ext cx="155356" cy="80101"/>
             </a:xfrm>
             <a:prstGeom prst="rect">
@@ -3991,7 +3991,7 @@
                   <a:latin typeface="Helvetica"/>
                   <a:cs typeface="Helvetica"/>
                 </a:rPr>
-                <a:t>Discrep &gt;= +25 vs &lt;+25: subHR = 2.44 (95% CI 1.28-4.65), p = 0.007</a:t>
+                <a:t>Discrep &gt;= +25 vs &lt;+25: subHR = 2.30 (95% CI 1.19-4.45), p = 0.014</a:t>
               </a:r>
             </a:p>
           </p:txBody>

--- a/docs/plots/carbo/jx_carbo_adjcif_grade2.pptx
+++ b/docs/plots/carbo/jx_carbo_adjcif_grade2.pptx
@@ -2271,7 +2271,7 @@
           </p:nvSpPr>
           <p:spPr>
             <a:xfrm>
-              <a:off x="910695" y="5080939"/>
+              <a:off x="910695" y="5074854"/>
               <a:ext cx="7706515" cy="0"/>
             </a:xfrm>
             <a:custGeom>
@@ -2314,7 +2314,7 @@
           </p:nvSpPr>
           <p:spPr>
             <a:xfrm>
-              <a:off x="910695" y="4081974"/>
+              <a:off x="910695" y="4063718"/>
               <a:ext cx="7706515" cy="0"/>
             </a:xfrm>
             <a:custGeom>
@@ -2357,7 +2357,7 @@
           </p:nvSpPr>
           <p:spPr>
             <a:xfrm>
-              <a:off x="910695" y="3083009"/>
+              <a:off x="910695" y="3052582"/>
               <a:ext cx="7706515" cy="0"/>
             </a:xfrm>
             <a:custGeom>
@@ -2615,7 +2615,7 @@
           </p:nvSpPr>
           <p:spPr>
             <a:xfrm>
-              <a:off x="910695" y="4581457"/>
+              <a:off x="910695" y="4569286"/>
               <a:ext cx="7706515" cy="0"/>
             </a:xfrm>
             <a:custGeom>
@@ -2658,7 +2658,7 @@
           </p:nvSpPr>
           <p:spPr>
             <a:xfrm>
-              <a:off x="910695" y="3582492"/>
+              <a:off x="910695" y="3558150"/>
               <a:ext cx="7706515" cy="0"/>
             </a:xfrm>
             <a:custGeom>
@@ -2701,21 +2701,21 @@
           </p:nvSpPr>
           <p:spPr>
             <a:xfrm>
-              <a:off x="910695" y="2583527"/>
-              <a:ext cx="7706515" cy="0"/>
+              <a:off x="927375" y="2583293"/>
+              <a:ext cx="0" cy="3139848"/>
             </a:xfrm>
             <a:custGeom>
               <a:avLst/>
               <a:pathLst>
-                <a:path w="7706515" h="0">
+                <a:path w="0" h="3139848">
                   <a:moveTo>
+                    <a:pt x="0" y="3139848"/>
+                  </a:moveTo>
+                  <a:lnTo>
                     <a:pt x="0" y="0"/>
-                  </a:moveTo>
-                  <a:lnTo>
-                    <a:pt x="7706515" y="0"/>
-                  </a:lnTo>
-                  <a:lnTo>
-                    <a:pt x="7706515" y="0"/>
+                  </a:lnTo>
+                  <a:lnTo>
+                    <a:pt x="0" y="0"/>
                   </a:lnTo>
                 </a:path>
               </a:pathLst>
@@ -2744,7 +2744,7 @@
           </p:nvSpPr>
           <p:spPr>
             <a:xfrm>
-              <a:off x="927375" y="2583293"/>
+              <a:off x="3012472" y="2583293"/>
               <a:ext cx="0" cy="3139848"/>
             </a:xfrm>
             <a:custGeom>
@@ -2787,7 +2787,7 @@
           </p:nvSpPr>
           <p:spPr>
             <a:xfrm>
-              <a:off x="3012472" y="2583293"/>
+              <a:off x="5097568" y="2583293"/>
               <a:ext cx="0" cy="3139848"/>
             </a:xfrm>
             <a:custGeom>
@@ -2830,7 +2830,7 @@
           </p:nvSpPr>
           <p:spPr>
             <a:xfrm>
-              <a:off x="5097568" y="2583293"/>
+              <a:off x="7182664" y="2583293"/>
               <a:ext cx="0" cy="3139848"/>
             </a:xfrm>
             <a:custGeom>
@@ -2873,28 +2873,190 @@
           </p:nvSpPr>
           <p:spPr>
             <a:xfrm>
-              <a:off x="7182664" y="2583293"/>
-              <a:ext cx="0" cy="3139848"/>
+              <a:off x="1260991" y="4095511"/>
+              <a:ext cx="7005923" cy="1456707"/>
             </a:xfrm>
             <a:custGeom>
               <a:avLst/>
               <a:pathLst>
-                <a:path w="0" h="3139848">
+                <a:path w="7005923" h="1456707">
                   <a:moveTo>
-                    <a:pt x="0" y="3139848"/>
+                    <a:pt x="0" y="1456707"/>
                   </a:moveTo>
                   <a:lnTo>
-                    <a:pt x="0" y="0"/>
-                  </a:lnTo>
-                  <a:lnTo>
-                    <a:pt x="0" y="0"/>
+                    <a:pt x="166807" y="1456707"/>
+                  </a:lnTo>
+                  <a:lnTo>
+                    <a:pt x="166807" y="1428475"/>
+                  </a:lnTo>
+                  <a:lnTo>
+                    <a:pt x="250211" y="1428475"/>
+                  </a:lnTo>
+                  <a:lnTo>
+                    <a:pt x="250211" y="1259919"/>
+                  </a:lnTo>
+                  <a:lnTo>
+                    <a:pt x="333615" y="1259919"/>
+                  </a:lnTo>
+                  <a:lnTo>
+                    <a:pt x="333615" y="1230802"/>
+                  </a:lnTo>
+                  <a:lnTo>
+                    <a:pt x="417019" y="1230802"/>
+                  </a:lnTo>
+                  <a:lnTo>
+                    <a:pt x="417019" y="1201678"/>
+                  </a:lnTo>
+                  <a:lnTo>
+                    <a:pt x="583826" y="1201678"/>
+                  </a:lnTo>
+                  <a:lnTo>
+                    <a:pt x="583826" y="1057027"/>
+                  </a:lnTo>
+                  <a:lnTo>
+                    <a:pt x="667230" y="1057027"/>
+                  </a:lnTo>
+                  <a:lnTo>
+                    <a:pt x="667230" y="1027080"/>
+                  </a:lnTo>
+                  <a:lnTo>
+                    <a:pt x="750634" y="1027080"/>
+                  </a:lnTo>
+                  <a:lnTo>
+                    <a:pt x="750634" y="966269"/>
+                  </a:lnTo>
+                  <a:lnTo>
+                    <a:pt x="1084250" y="966269"/>
+                  </a:lnTo>
+                  <a:lnTo>
+                    <a:pt x="1084250" y="935022"/>
+                  </a:lnTo>
+                  <a:lnTo>
+                    <a:pt x="1167653" y="935022"/>
+                  </a:lnTo>
+                  <a:lnTo>
+                    <a:pt x="1167653" y="903887"/>
+                  </a:lnTo>
+                  <a:lnTo>
+                    <a:pt x="1417865" y="903887"/>
+                  </a:lnTo>
+                  <a:lnTo>
+                    <a:pt x="1417865" y="872852"/>
+                  </a:lnTo>
+                  <a:lnTo>
+                    <a:pt x="1501269" y="872852"/>
+                  </a:lnTo>
+                  <a:lnTo>
+                    <a:pt x="1501269" y="841612"/>
+                  </a:lnTo>
+                  <a:lnTo>
+                    <a:pt x="2001692" y="841612"/>
+                  </a:lnTo>
+                  <a:lnTo>
+                    <a:pt x="2001692" y="810057"/>
+                  </a:lnTo>
+                  <a:lnTo>
+                    <a:pt x="2168500" y="810057"/>
+                  </a:lnTo>
+                  <a:lnTo>
+                    <a:pt x="2168500" y="747127"/>
+                  </a:lnTo>
+                  <a:lnTo>
+                    <a:pt x="2502115" y="747127"/>
+                  </a:lnTo>
+                  <a:lnTo>
+                    <a:pt x="2502115" y="715172"/>
+                  </a:lnTo>
+                  <a:lnTo>
+                    <a:pt x="2585519" y="715172"/>
+                  </a:lnTo>
+                  <a:lnTo>
+                    <a:pt x="2585519" y="682913"/>
+                  </a:lnTo>
+                  <a:lnTo>
+                    <a:pt x="3085942" y="682913"/>
+                  </a:lnTo>
+                  <a:lnTo>
+                    <a:pt x="3085942" y="617957"/>
+                  </a:lnTo>
+                  <a:lnTo>
+                    <a:pt x="3169346" y="617957"/>
+                  </a:lnTo>
+                  <a:lnTo>
+                    <a:pt x="3169346" y="520702"/>
+                  </a:lnTo>
+                  <a:lnTo>
+                    <a:pt x="3336154" y="520702"/>
+                  </a:lnTo>
+                  <a:lnTo>
+                    <a:pt x="3336154" y="487609"/>
+                  </a:lnTo>
+                  <a:lnTo>
+                    <a:pt x="3419557" y="487609"/>
+                  </a:lnTo>
+                  <a:lnTo>
+                    <a:pt x="3419557" y="454473"/>
+                  </a:lnTo>
+                  <a:lnTo>
+                    <a:pt x="4253596" y="454473"/>
+                  </a:lnTo>
+                  <a:lnTo>
+                    <a:pt x="4253596" y="421472"/>
+                  </a:lnTo>
+                  <a:lnTo>
+                    <a:pt x="4587211" y="421472"/>
+                  </a:lnTo>
+                  <a:lnTo>
+                    <a:pt x="4587211" y="388046"/>
+                  </a:lnTo>
+                  <a:lnTo>
+                    <a:pt x="4670615" y="388046"/>
+                  </a:lnTo>
+                  <a:lnTo>
+                    <a:pt x="4670615" y="354520"/>
+                  </a:lnTo>
+                  <a:lnTo>
+                    <a:pt x="4920827" y="354520"/>
+                  </a:lnTo>
+                  <a:lnTo>
+                    <a:pt x="4920827" y="253573"/>
+                  </a:lnTo>
+                  <a:lnTo>
+                    <a:pt x="5004231" y="253573"/>
+                  </a:lnTo>
+                  <a:lnTo>
+                    <a:pt x="5004231" y="218267"/>
+                  </a:lnTo>
+                  <a:lnTo>
+                    <a:pt x="5671461" y="218267"/>
+                  </a:lnTo>
+                  <a:lnTo>
+                    <a:pt x="5671461" y="182581"/>
+                  </a:lnTo>
+                  <a:lnTo>
+                    <a:pt x="6338692" y="182581"/>
+                  </a:lnTo>
+                  <a:lnTo>
+                    <a:pt x="6338692" y="146213"/>
+                  </a:lnTo>
+                  <a:lnTo>
+                    <a:pt x="6672308" y="146213"/>
+                  </a:lnTo>
+                  <a:lnTo>
+                    <a:pt x="6672308" y="36881"/>
+                  </a:lnTo>
+                  <a:lnTo>
+                    <a:pt x="7005923" y="36881"/>
+                  </a:lnTo>
+                  <a:lnTo>
+                    <a:pt x="7005923" y="0"/>
                   </a:lnTo>
                 </a:path>
               </a:pathLst>
             </a:custGeom>
-            <a:ln w="13550" cap="flat">
+            <a:ln w="27101" cap="flat">
               <a:solidFill>
-                <a:srgbClr val="EBEBEB">
+                <a:srgbClr val="1F78B4">
                   <a:alpha val="100000"/>
                 </a:srgbClr>
               </a:solidFill>
@@ -2916,385 +3078,180 @@
           </p:nvSpPr>
           <p:spPr>
             <a:xfrm>
-              <a:off x="1260991" y="4122576"/>
-              <a:ext cx="7005923" cy="1430222"/>
+              <a:off x="1260991" y="2861938"/>
+              <a:ext cx="7005923" cy="2655148"/>
             </a:xfrm>
             <a:custGeom>
               <a:avLst/>
               <a:pathLst>
-                <a:path w="7005923" h="1430222">
+                <a:path w="7005923" h="2655148">
                   <a:moveTo>
-                    <a:pt x="0" y="1430222"/>
+                    <a:pt x="0" y="2655148"/>
                   </a:moveTo>
                   <a:lnTo>
-                    <a:pt x="166807" y="1430222"/>
-                  </a:lnTo>
-                  <a:lnTo>
-                    <a:pt x="166807" y="1402578"/>
-                  </a:lnTo>
-                  <a:lnTo>
-                    <a:pt x="250211" y="1402578"/>
-                  </a:lnTo>
-                  <a:lnTo>
-                    <a:pt x="250211" y="1236992"/>
-                  </a:lnTo>
-                  <a:lnTo>
-                    <a:pt x="333615" y="1236992"/>
-                  </a:lnTo>
-                  <a:lnTo>
-                    <a:pt x="333615" y="1208453"/>
-                  </a:lnTo>
-                  <a:lnTo>
-                    <a:pt x="417019" y="1208453"/>
-                  </a:lnTo>
-                  <a:lnTo>
-                    <a:pt x="417019" y="1179943"/>
-                  </a:lnTo>
-                  <a:lnTo>
-                    <a:pt x="583826" y="1179943"/>
-                  </a:lnTo>
-                  <a:lnTo>
-                    <a:pt x="583826" y="1037673"/>
-                  </a:lnTo>
-                  <a:lnTo>
-                    <a:pt x="667230" y="1037673"/>
-                  </a:lnTo>
-                  <a:lnTo>
-                    <a:pt x="667230" y="1008296"/>
-                  </a:lnTo>
-                  <a:lnTo>
-                    <a:pt x="750634" y="1008296"/>
-                  </a:lnTo>
-                  <a:lnTo>
-                    <a:pt x="750634" y="948698"/>
-                  </a:lnTo>
-                  <a:lnTo>
-                    <a:pt x="1084250" y="948698"/>
-                  </a:lnTo>
-                  <a:lnTo>
-                    <a:pt x="1084250" y="918101"/>
-                  </a:lnTo>
-                  <a:lnTo>
-                    <a:pt x="1167653" y="918101"/>
-                  </a:lnTo>
-                  <a:lnTo>
-                    <a:pt x="1167653" y="887561"/>
-                  </a:lnTo>
-                  <a:lnTo>
-                    <a:pt x="1417865" y="887561"/>
-                  </a:lnTo>
-                  <a:lnTo>
-                    <a:pt x="1417865" y="857073"/>
-                  </a:lnTo>
-                  <a:lnTo>
-                    <a:pt x="1501269" y="857073"/>
-                  </a:lnTo>
-                  <a:lnTo>
-                    <a:pt x="1501269" y="826408"/>
-                  </a:lnTo>
-                  <a:lnTo>
-                    <a:pt x="2001692" y="826408"/>
-                  </a:lnTo>
-                  <a:lnTo>
-                    <a:pt x="2001692" y="795464"/>
-                  </a:lnTo>
-                  <a:lnTo>
-                    <a:pt x="2168500" y="795464"/>
-                  </a:lnTo>
-                  <a:lnTo>
-                    <a:pt x="2168500" y="733822"/>
-                  </a:lnTo>
-                  <a:lnTo>
-                    <a:pt x="2502115" y="733822"/>
-                  </a:lnTo>
-                  <a:lnTo>
-                    <a:pt x="2502115" y="702465"/>
-                  </a:lnTo>
-                  <a:lnTo>
-                    <a:pt x="2585519" y="702465"/>
-                  </a:lnTo>
-                  <a:lnTo>
-                    <a:pt x="2585519" y="670769"/>
-                  </a:lnTo>
-                  <a:lnTo>
-                    <a:pt x="3085942" y="670769"/>
-                  </a:lnTo>
-                  <a:lnTo>
-                    <a:pt x="3085942" y="607023"/>
-                  </a:lnTo>
-                  <a:lnTo>
-                    <a:pt x="3169346" y="607023"/>
-                  </a:lnTo>
-                  <a:lnTo>
-                    <a:pt x="3169346" y="511503"/>
-                  </a:lnTo>
-                  <a:lnTo>
-                    <a:pt x="3336154" y="511503"/>
-                  </a:lnTo>
-                  <a:lnTo>
-                    <a:pt x="3336154" y="478972"/>
-                  </a:lnTo>
-                  <a:lnTo>
-                    <a:pt x="3419557" y="478972"/>
-                  </a:lnTo>
-                  <a:lnTo>
-                    <a:pt x="3419557" y="446439"/>
-                  </a:lnTo>
-                  <a:lnTo>
-                    <a:pt x="4253596" y="446439"/>
-                  </a:lnTo>
-                  <a:lnTo>
-                    <a:pt x="4253596" y="413981"/>
-                  </a:lnTo>
-                  <a:lnTo>
-                    <a:pt x="4587211" y="413981"/>
-                  </a:lnTo>
-                  <a:lnTo>
-                    <a:pt x="4587211" y="381005"/>
-                  </a:lnTo>
-                  <a:lnTo>
-                    <a:pt x="4670615" y="381005"/>
-                  </a:lnTo>
-                  <a:lnTo>
-                    <a:pt x="4670615" y="347983"/>
-                  </a:lnTo>
-                  <a:lnTo>
-                    <a:pt x="4920827" y="347983"/>
-                  </a:lnTo>
-                  <a:lnTo>
-                    <a:pt x="4920827" y="248107"/>
-                  </a:lnTo>
-                  <a:lnTo>
-                    <a:pt x="5004231" y="248107"/>
-                  </a:lnTo>
-                  <a:lnTo>
-                    <a:pt x="5004231" y="213347"/>
-                  </a:lnTo>
-                  <a:lnTo>
-                    <a:pt x="5671461" y="213347"/>
-                  </a:lnTo>
-                  <a:lnTo>
-                    <a:pt x="5671461" y="178291"/>
-                  </a:lnTo>
-                  <a:lnTo>
-                    <a:pt x="6338692" y="178291"/>
-                  </a:lnTo>
-                  <a:lnTo>
-                    <a:pt x="6338692" y="142704"/>
-                  </a:lnTo>
-                  <a:lnTo>
-                    <a:pt x="6672308" y="142704"/>
-                  </a:lnTo>
-                  <a:lnTo>
-                    <a:pt x="6672308" y="35957"/>
-                  </a:lnTo>
-                  <a:lnTo>
-                    <a:pt x="7005923" y="35957"/>
-                  </a:lnTo>
-                  <a:lnTo>
-                    <a:pt x="7005923" y="0"/>
-                  </a:lnTo>
-                </a:path>
-              </a:pathLst>
-            </a:custGeom>
-            <a:ln w="27101" cap="flat">
-              <a:solidFill>
-                <a:srgbClr val="1F78B4">
-                  <a:alpha val="100000"/>
-                </a:srgbClr>
-              </a:solidFill>
-              <a:prstDash val="solid"/>
-              <a:round/>
-            </a:ln>
-          </p:spPr>
-          <p:txBody>
-            <a:bodyPr/>
-            <a:lstStyle/>
-            <a:p/>
-          </p:txBody>
-        </p:sp>
-        <p:sp>
-          <p:nvSpPr>
-            <p:cNvPr id="20" name="pl20"/>
-            <p:cNvSpPr/>
-            <p:nvPr/>
-          </p:nvSpPr>
-          <p:spPr>
-            <a:xfrm>
-              <a:off x="1260991" y="2861938"/>
-              <a:ext cx="7005923" cy="2655257"/>
-            </a:xfrm>
-            <a:custGeom>
-              <a:avLst/>
-              <a:pathLst>
-                <a:path w="7005923" h="2655257">
-                  <a:moveTo>
-                    <a:pt x="0" y="2655257"/>
-                  </a:moveTo>
-                  <a:lnTo>
-                    <a:pt x="166807" y="2655257"/>
-                  </a:lnTo>
-                  <a:lnTo>
-                    <a:pt x="166807" y="2592458"/>
-                  </a:lnTo>
-                  <a:lnTo>
-                    <a:pt x="250211" y="2592458"/>
-                  </a:lnTo>
-                  <a:lnTo>
-                    <a:pt x="250211" y="2226173"/>
-                  </a:lnTo>
-                  <a:lnTo>
-                    <a:pt x="333615" y="2226173"/>
-                  </a:lnTo>
-                  <a:lnTo>
-                    <a:pt x="333615" y="2164740"/>
-                  </a:lnTo>
-                  <a:lnTo>
-                    <a:pt x="417019" y="2164740"/>
-                  </a:lnTo>
-                  <a:lnTo>
-                    <a:pt x="417019" y="2103865"/>
-                  </a:lnTo>
-                  <a:lnTo>
-                    <a:pt x="583826" y="2103865"/>
-                  </a:lnTo>
-                  <a:lnTo>
-                    <a:pt x="583826" y="1807424"/>
-                  </a:lnTo>
-                  <a:lnTo>
-                    <a:pt x="667230" y="1807424"/>
-                  </a:lnTo>
-                  <a:lnTo>
-                    <a:pt x="667230" y="1747724"/>
-                  </a:lnTo>
-                  <a:lnTo>
-                    <a:pt x="750634" y="1747724"/>
-                  </a:lnTo>
-                  <a:lnTo>
-                    <a:pt x="750634" y="1628189"/>
-                  </a:lnTo>
-                  <a:lnTo>
-                    <a:pt x="1084250" y="1628189"/>
-                  </a:lnTo>
-                  <a:lnTo>
-                    <a:pt x="1084250" y="1567641"/>
-                  </a:lnTo>
-                  <a:lnTo>
-                    <a:pt x="1167653" y="1567641"/>
-                  </a:lnTo>
-                  <a:lnTo>
-                    <a:pt x="1167653" y="1507754"/>
-                  </a:lnTo>
-                  <a:lnTo>
-                    <a:pt x="1417865" y="1507754"/>
-                  </a:lnTo>
-                  <a:lnTo>
-                    <a:pt x="1417865" y="1448517"/>
-                  </a:lnTo>
-                  <a:lnTo>
-                    <a:pt x="1501269" y="1448517"/>
-                  </a:lnTo>
-                  <a:lnTo>
-                    <a:pt x="1501269" y="1389488"/>
-                  </a:lnTo>
-                  <a:lnTo>
-                    <a:pt x="2001692" y="1389488"/>
-                  </a:lnTo>
-                  <a:lnTo>
-                    <a:pt x="2001692" y="1330477"/>
-                  </a:lnTo>
-                  <a:lnTo>
-                    <a:pt x="2168500" y="1330477"/>
-                  </a:lnTo>
-                  <a:lnTo>
-                    <a:pt x="2168500" y="1214587"/>
-                  </a:lnTo>
-                  <a:lnTo>
-                    <a:pt x="2502115" y="1214587"/>
-                  </a:lnTo>
-                  <a:lnTo>
-                    <a:pt x="2502115" y="1156478"/>
-                  </a:lnTo>
-                  <a:lnTo>
-                    <a:pt x="2585519" y="1156478"/>
-                  </a:lnTo>
-                  <a:lnTo>
-                    <a:pt x="2585519" y="1098320"/>
-                  </a:lnTo>
-                  <a:lnTo>
-                    <a:pt x="3085942" y="1098320"/>
-                  </a:lnTo>
-                  <a:lnTo>
-                    <a:pt x="3085942" y="983099"/>
-                  </a:lnTo>
-                  <a:lnTo>
-                    <a:pt x="3169346" y="983099"/>
-                  </a:lnTo>
-                  <a:lnTo>
-                    <a:pt x="3169346" y="814789"/>
-                  </a:lnTo>
-                  <a:lnTo>
-                    <a:pt x="3336154" y="814789"/>
-                  </a:lnTo>
-                  <a:lnTo>
-                    <a:pt x="3336154" y="758649"/>
-                  </a:lnTo>
-                  <a:lnTo>
-                    <a:pt x="3419557" y="758649"/>
-                  </a:lnTo>
-                  <a:lnTo>
-                    <a:pt x="3419557" y="703102"/>
-                  </a:lnTo>
-                  <a:lnTo>
-                    <a:pt x="4253596" y="703102"/>
-                  </a:lnTo>
-                  <a:lnTo>
-                    <a:pt x="4253596" y="648274"/>
-                  </a:lnTo>
-                  <a:lnTo>
-                    <a:pt x="4587211" y="648274"/>
-                  </a:lnTo>
-                  <a:lnTo>
-                    <a:pt x="4587211" y="593177"/>
-                  </a:lnTo>
-                  <a:lnTo>
-                    <a:pt x="4670615" y="593177"/>
-                  </a:lnTo>
-                  <a:lnTo>
-                    <a:pt x="4670615" y="538609"/>
-                  </a:lnTo>
-                  <a:lnTo>
-                    <a:pt x="4920827" y="538609"/>
-                  </a:lnTo>
-                  <a:lnTo>
-                    <a:pt x="4920827" y="377248"/>
-                  </a:lnTo>
-                  <a:lnTo>
-                    <a:pt x="5004231" y="377248"/>
-                  </a:lnTo>
-                  <a:lnTo>
-                    <a:pt x="5004231" y="322378"/>
-                  </a:lnTo>
-                  <a:lnTo>
-                    <a:pt x="5671461" y="322378"/>
-                  </a:lnTo>
-                  <a:lnTo>
-                    <a:pt x="5671461" y="267711"/>
-                  </a:lnTo>
-                  <a:lnTo>
-                    <a:pt x="6338692" y="267711"/>
-                  </a:lnTo>
-                  <a:lnTo>
-                    <a:pt x="6338692" y="212902"/>
-                  </a:lnTo>
-                  <a:lnTo>
-                    <a:pt x="6672308" y="212902"/>
-                  </a:lnTo>
-                  <a:lnTo>
-                    <a:pt x="6672308" y="52612"/>
-                  </a:lnTo>
-                  <a:lnTo>
-                    <a:pt x="7005923" y="52612"/>
+                    <a:pt x="166807" y="2655148"/>
+                  </a:lnTo>
+                  <a:lnTo>
+                    <a:pt x="166807" y="2592222"/>
+                  </a:lnTo>
+                  <a:lnTo>
+                    <a:pt x="250211" y="2592222"/>
+                  </a:lnTo>
+                  <a:lnTo>
+                    <a:pt x="250211" y="2226331"/>
+                  </a:lnTo>
+                  <a:lnTo>
+                    <a:pt x="333615" y="2226331"/>
+                  </a:lnTo>
+                  <a:lnTo>
+                    <a:pt x="333615" y="2164816"/>
+                  </a:lnTo>
+                  <a:lnTo>
+                    <a:pt x="417019" y="2164816"/>
+                  </a:lnTo>
+                  <a:lnTo>
+                    <a:pt x="417019" y="2103778"/>
+                  </a:lnTo>
+                  <a:lnTo>
+                    <a:pt x="583826" y="2103778"/>
+                  </a:lnTo>
+                  <a:lnTo>
+                    <a:pt x="583826" y="1807917"/>
+                  </a:lnTo>
+                  <a:lnTo>
+                    <a:pt x="667230" y="1807917"/>
+                  </a:lnTo>
+                  <a:lnTo>
+                    <a:pt x="667230" y="1748172"/>
+                  </a:lnTo>
+                  <a:lnTo>
+                    <a:pt x="750634" y="1748172"/>
+                  </a:lnTo>
+                  <a:lnTo>
+                    <a:pt x="750634" y="1628430"/>
+                  </a:lnTo>
+                  <a:lnTo>
+                    <a:pt x="1084250" y="1628430"/>
+                  </a:lnTo>
+                  <a:lnTo>
+                    <a:pt x="1084250" y="1567722"/>
+                  </a:lnTo>
+                  <a:lnTo>
+                    <a:pt x="1167653" y="1567722"/>
+                  </a:lnTo>
+                  <a:lnTo>
+                    <a:pt x="1167653" y="1507782"/>
+                  </a:lnTo>
+                  <a:lnTo>
+                    <a:pt x="1417865" y="1507782"/>
+                  </a:lnTo>
+                  <a:lnTo>
+                    <a:pt x="1417865" y="1448581"/>
+                  </a:lnTo>
+                  <a:lnTo>
+                    <a:pt x="1501269" y="1448581"/>
+                  </a:lnTo>
+                  <a:lnTo>
+                    <a:pt x="1501269" y="1389538"/>
+                  </a:lnTo>
+                  <a:lnTo>
+                    <a:pt x="2001692" y="1389538"/>
+                  </a:lnTo>
+                  <a:lnTo>
+                    <a:pt x="2001692" y="1330455"/>
+                  </a:lnTo>
+                  <a:lnTo>
+                    <a:pt x="2168500" y="1330455"/>
+                  </a:lnTo>
+                  <a:lnTo>
+                    <a:pt x="2168500" y="1214297"/>
+                  </a:lnTo>
+                  <a:lnTo>
+                    <a:pt x="2502115" y="1214297"/>
+                  </a:lnTo>
+                  <a:lnTo>
+                    <a:pt x="2502115" y="1156158"/>
+                  </a:lnTo>
+                  <a:lnTo>
+                    <a:pt x="2585519" y="1156158"/>
+                  </a:lnTo>
+                  <a:lnTo>
+                    <a:pt x="2585519" y="1098042"/>
+                  </a:lnTo>
+                  <a:lnTo>
+                    <a:pt x="3085942" y="1098042"/>
+                  </a:lnTo>
+                  <a:lnTo>
+                    <a:pt x="3085942" y="982767"/>
+                  </a:lnTo>
+                  <a:lnTo>
+                    <a:pt x="3169346" y="982767"/>
+                  </a:lnTo>
+                  <a:lnTo>
+                    <a:pt x="3169346" y="814510"/>
+                  </a:lnTo>
+                  <a:lnTo>
+                    <a:pt x="3336154" y="814510"/>
+                  </a:lnTo>
+                  <a:lnTo>
+                    <a:pt x="3336154" y="758433"/>
+                  </a:lnTo>
+                  <a:lnTo>
+                    <a:pt x="3419557" y="758433"/>
+                  </a:lnTo>
+                  <a:lnTo>
+                    <a:pt x="3419557" y="702881"/>
+                  </a:lnTo>
+                  <a:lnTo>
+                    <a:pt x="4253596" y="702881"/>
+                  </a:lnTo>
+                  <a:lnTo>
+                    <a:pt x="4253596" y="648145"/>
+                  </a:lnTo>
+                  <a:lnTo>
+                    <a:pt x="4587211" y="648145"/>
+                  </a:lnTo>
+                  <a:lnTo>
+                    <a:pt x="4587211" y="593301"/>
+                  </a:lnTo>
+                  <a:lnTo>
+                    <a:pt x="4670615" y="593301"/>
+                  </a:lnTo>
+                  <a:lnTo>
+                    <a:pt x="4670615" y="538898"/>
+                  </a:lnTo>
+                  <a:lnTo>
+                    <a:pt x="4920827" y="538898"/>
+                  </a:lnTo>
+                  <a:lnTo>
+                    <a:pt x="4920827" y="378714"/>
+                  </a:lnTo>
+                  <a:lnTo>
+                    <a:pt x="5004231" y="378714"/>
+                  </a:lnTo>
+                  <a:lnTo>
+                    <a:pt x="5004231" y="323965"/>
+                  </a:lnTo>
+                  <a:lnTo>
+                    <a:pt x="5671461" y="323965"/>
+                  </a:lnTo>
+                  <a:lnTo>
+                    <a:pt x="5671461" y="269296"/>
+                  </a:lnTo>
+                  <a:lnTo>
+                    <a:pt x="6338692" y="269296"/>
+                  </a:lnTo>
+                  <a:lnTo>
+                    <a:pt x="6338692" y="214270"/>
+                  </a:lnTo>
+                  <a:lnTo>
+                    <a:pt x="6672308" y="214270"/>
+                  </a:lnTo>
+                  <a:lnTo>
+                    <a:pt x="6672308" y="53004"/>
+                  </a:lnTo>
+                  <a:lnTo>
+                    <a:pt x="7005923" y="53004"/>
                   </a:lnTo>
                   <a:lnTo>
                     <a:pt x="7005923" y="0"/>
@@ -3320,7 +3277,7 @@
         </p:sp>
         <p:sp>
           <p:nvSpPr>
-            <p:cNvPr id="21" name="tx21"/>
+            <p:cNvPr id="20" name="tx20"/>
             <p:cNvSpPr/>
             <p:nvPr/>
           </p:nvSpPr>
@@ -3366,13 +3323,13 @@
         </p:sp>
         <p:sp>
           <p:nvSpPr>
-            <p:cNvPr id="22" name="tx22"/>
+            <p:cNvPr id="21" name="tx21"/>
             <p:cNvSpPr/>
             <p:nvPr/>
           </p:nvSpPr>
           <p:spPr>
             <a:xfrm>
-              <a:off x="692708" y="4541406"/>
+              <a:off x="692708" y="4529235"/>
               <a:ext cx="155356" cy="80101"/>
             </a:xfrm>
             <a:prstGeom prst="rect">
@@ -3412,13 +3369,13 @@
         </p:sp>
         <p:sp>
           <p:nvSpPr>
-            <p:cNvPr id="23" name="tx23"/>
+            <p:cNvPr id="22" name="tx22"/>
             <p:cNvSpPr/>
             <p:nvPr/>
           </p:nvSpPr>
           <p:spPr>
             <a:xfrm>
-              <a:off x="692708" y="3542441"/>
+              <a:off x="692708" y="3518099"/>
               <a:ext cx="155356" cy="80101"/>
             </a:xfrm>
             <a:prstGeom prst="rect">
@@ -3458,53 +3415,7 @@
         </p:sp>
         <p:sp>
           <p:nvSpPr>
-            <p:cNvPr id="24" name="tx24"/>
-            <p:cNvSpPr/>
-            <p:nvPr/>
-          </p:nvSpPr>
-          <p:spPr>
-            <a:xfrm>
-              <a:off x="692708" y="2543476"/>
-              <a:ext cx="155356" cy="80101"/>
-            </a:xfrm>
-            <a:prstGeom prst="rect">
-              <a:avLst/>
-            </a:prstGeom>
-            <a:noFill/>
-          </p:spPr>
-          <p:txBody>
-            <a:bodyPr lIns="0" rIns="0" tIns="0" bIns="0" anchorCtr="1" anchor="ctr" wrap="none"/>
-            <a:lstStyle/>
-            <a:p>
-              <a:pPr algn="l" marL="0" marR="0" indent="0">
-                <a:lnSpc>
-                  <a:spcPts val="880"/>
-                </a:lnSpc>
-                <a:spcBef>
-                  <a:spcPts val="0"/>
-                </a:spcBef>
-                <a:spcAft>
-                  <a:spcPts val="0"/>
-                </a:spcAft>
-              </a:pPr>
-              <a:r>
-                <a:rPr sz="880">
-                  <a:solidFill>
-                    <a:srgbClr val="4D4D4D">
-                      <a:alpha val="100000"/>
-                    </a:srgbClr>
-                  </a:solidFill>
-                  <a:latin typeface="Helvetica"/>
-                  <a:cs typeface="Helvetica"/>
-                </a:rPr>
-                <a:t>0.6</a:t>
-              </a:r>
-            </a:p>
-          </p:txBody>
-        </p:sp>
-        <p:sp>
-          <p:nvSpPr>
-            <p:cNvPr id="25" name="tx25"/>
+            <p:cNvPr id="23" name="tx23"/>
             <p:cNvSpPr/>
             <p:nvPr/>
           </p:nvSpPr>
@@ -3550,7 +3461,7 @@
         </p:sp>
         <p:sp>
           <p:nvSpPr>
-            <p:cNvPr id="26" name="tx26"/>
+            <p:cNvPr id="24" name="tx24"/>
             <p:cNvSpPr/>
             <p:nvPr/>
           </p:nvSpPr>
@@ -3596,7 +3507,7 @@
         </p:sp>
         <p:sp>
           <p:nvSpPr>
-            <p:cNvPr id="27" name="tx27"/>
+            <p:cNvPr id="25" name="tx25"/>
             <p:cNvSpPr/>
             <p:nvPr/>
           </p:nvSpPr>
@@ -3642,7 +3553,7 @@
         </p:sp>
         <p:sp>
           <p:nvSpPr>
-            <p:cNvPr id="28" name="tx28"/>
+            <p:cNvPr id="26" name="tx26"/>
             <p:cNvSpPr/>
             <p:nvPr/>
           </p:nvSpPr>
@@ -3688,7 +3599,7 @@
         </p:sp>
         <p:sp>
           <p:nvSpPr>
-            <p:cNvPr id="29" name="tx29"/>
+            <p:cNvPr id="27" name="tx27"/>
             <p:cNvSpPr/>
             <p:nvPr/>
           </p:nvSpPr>
@@ -3734,7 +3645,7 @@
         </p:sp>
         <p:sp>
           <p:nvSpPr>
-            <p:cNvPr id="30" name="tx30"/>
+            <p:cNvPr id="28" name="tx28"/>
             <p:cNvSpPr/>
             <p:nvPr/>
           </p:nvSpPr>
@@ -3780,7 +3691,7 @@
         </p:sp>
         <p:sp>
           <p:nvSpPr>
-            <p:cNvPr id="31" name="pl31"/>
+            <p:cNvPr id="29" name="pl29"/>
             <p:cNvSpPr/>
             <p:nvPr/>
           </p:nvSpPr>
@@ -3820,7 +3731,7 @@
         </p:sp>
         <p:sp>
           <p:nvSpPr>
-            <p:cNvPr id="32" name="pl32"/>
+            <p:cNvPr id="30" name="pl30"/>
             <p:cNvSpPr/>
             <p:nvPr/>
           </p:nvSpPr>
@@ -3860,7 +3771,7 @@
         </p:sp>
         <p:sp>
           <p:nvSpPr>
-            <p:cNvPr id="33" name="tx33"/>
+            <p:cNvPr id="31" name="tx31"/>
             <p:cNvSpPr/>
             <p:nvPr/>
           </p:nvSpPr>
@@ -3906,7 +3817,7 @@
         </p:sp>
         <p:sp>
           <p:nvSpPr>
-            <p:cNvPr id="34" name="tx34"/>
+            <p:cNvPr id="32" name="tx32"/>
             <p:cNvSpPr/>
             <p:nvPr/>
           </p:nvSpPr>
@@ -3952,7 +3863,7 @@
         </p:sp>
         <p:sp>
           <p:nvSpPr>
-            <p:cNvPr id="35" name="tx35"/>
+            <p:cNvPr id="33" name="tx33"/>
             <p:cNvSpPr/>
             <p:nvPr/>
           </p:nvSpPr>
@@ -3991,14 +3902,14 @@
                   <a:latin typeface="Helvetica"/>
                   <a:cs typeface="Helvetica"/>
                 </a:rPr>
-                <a:t>Discrep &gt;= +25 vs &lt;+25: subHR = 2.30 (95% CI 1.19-4.45), p = 0.014</a:t>
+                <a:t>Discrep &gt;= +25 vs &lt;+25: subHR = 2.25 (95% CI 1.18-4.30), p = 0.014</a:t>
               </a:r>
             </a:p>
           </p:txBody>
         </p:sp>
         <p:sp>
           <p:nvSpPr>
-            <p:cNvPr id="36" name="tx36"/>
+            <p:cNvPr id="34" name="tx34"/>
             <p:cNvSpPr/>
             <p:nvPr/>
           </p:nvSpPr>

--- a/docs/plots/carbo/jx_carbo_adjcif_grade2.pptx
+++ b/docs/plots/carbo/jx_carbo_adjcif_grade2.pptx
@@ -2271,7 +2271,7 @@
           </p:nvSpPr>
           <p:spPr>
             <a:xfrm>
-              <a:off x="910695" y="5074854"/>
+              <a:off x="910695" y="5080939"/>
               <a:ext cx="7706515" cy="0"/>
             </a:xfrm>
             <a:custGeom>
@@ -2314,7 +2314,7 @@
           </p:nvSpPr>
           <p:spPr>
             <a:xfrm>
-              <a:off x="910695" y="4063718"/>
+              <a:off x="910695" y="4081974"/>
               <a:ext cx="7706515" cy="0"/>
             </a:xfrm>
             <a:custGeom>
@@ -2357,7 +2357,7 @@
           </p:nvSpPr>
           <p:spPr>
             <a:xfrm>
-              <a:off x="910695" y="3052582"/>
+              <a:off x="910695" y="3083009"/>
               <a:ext cx="7706515" cy="0"/>
             </a:xfrm>
             <a:custGeom>
@@ -2615,7 +2615,7 @@
           </p:nvSpPr>
           <p:spPr>
             <a:xfrm>
-              <a:off x="910695" y="4569286"/>
+              <a:off x="910695" y="4581457"/>
               <a:ext cx="7706515" cy="0"/>
             </a:xfrm>
             <a:custGeom>
@@ -2658,7 +2658,7 @@
           </p:nvSpPr>
           <p:spPr>
             <a:xfrm>
-              <a:off x="910695" y="3558150"/>
+              <a:off x="910695" y="3582492"/>
               <a:ext cx="7706515" cy="0"/>
             </a:xfrm>
             <a:custGeom>
@@ -2701,21 +2701,21 @@
           </p:nvSpPr>
           <p:spPr>
             <a:xfrm>
-              <a:off x="927375" y="2583293"/>
-              <a:ext cx="0" cy="3139848"/>
+              <a:off x="910695" y="2583527"/>
+              <a:ext cx="7706515" cy="0"/>
             </a:xfrm>
             <a:custGeom>
               <a:avLst/>
               <a:pathLst>
-                <a:path w="0" h="3139848">
+                <a:path w="7706515" h="0">
                   <a:moveTo>
-                    <a:pt x="0" y="3139848"/>
+                    <a:pt x="0" y="0"/>
                   </a:moveTo>
                   <a:lnTo>
-                    <a:pt x="0" y="0"/>
-                  </a:lnTo>
-                  <a:lnTo>
-                    <a:pt x="0" y="0"/>
+                    <a:pt x="7706515" y="0"/>
+                  </a:lnTo>
+                  <a:lnTo>
+                    <a:pt x="7706515" y="0"/>
                   </a:lnTo>
                 </a:path>
               </a:pathLst>
@@ -2744,7 +2744,7 @@
           </p:nvSpPr>
           <p:spPr>
             <a:xfrm>
-              <a:off x="3012472" y="2583293"/>
+              <a:off x="927375" y="2583293"/>
               <a:ext cx="0" cy="3139848"/>
             </a:xfrm>
             <a:custGeom>
@@ -2787,7 +2787,7 @@
           </p:nvSpPr>
           <p:spPr>
             <a:xfrm>
-              <a:off x="5097568" y="2583293"/>
+              <a:off x="3012472" y="2583293"/>
               <a:ext cx="0" cy="3139848"/>
             </a:xfrm>
             <a:custGeom>
@@ -2830,7 +2830,7 @@
           </p:nvSpPr>
           <p:spPr>
             <a:xfrm>
-              <a:off x="7182664" y="2583293"/>
+              <a:off x="5097568" y="2583293"/>
               <a:ext cx="0" cy="3139848"/>
             </a:xfrm>
             <a:custGeom>
@@ -2873,180 +2873,223 @@
           </p:nvSpPr>
           <p:spPr>
             <a:xfrm>
-              <a:off x="1260991" y="4095511"/>
-              <a:ext cx="7005923" cy="1456707"/>
+              <a:off x="7182664" y="2583293"/>
+              <a:ext cx="0" cy="3139848"/>
             </a:xfrm>
             <a:custGeom>
               <a:avLst/>
               <a:pathLst>
-                <a:path w="7005923" h="1456707">
+                <a:path w="0" h="3139848">
                   <a:moveTo>
-                    <a:pt x="0" y="1456707"/>
+                    <a:pt x="0" y="3139848"/>
                   </a:moveTo>
                   <a:lnTo>
-                    <a:pt x="166807" y="1456707"/>
-                  </a:lnTo>
-                  <a:lnTo>
-                    <a:pt x="166807" y="1428475"/>
-                  </a:lnTo>
-                  <a:lnTo>
-                    <a:pt x="250211" y="1428475"/>
-                  </a:lnTo>
-                  <a:lnTo>
-                    <a:pt x="250211" y="1259919"/>
-                  </a:lnTo>
-                  <a:lnTo>
-                    <a:pt x="333615" y="1259919"/>
-                  </a:lnTo>
-                  <a:lnTo>
-                    <a:pt x="333615" y="1230802"/>
-                  </a:lnTo>
-                  <a:lnTo>
-                    <a:pt x="417019" y="1230802"/>
-                  </a:lnTo>
-                  <a:lnTo>
-                    <a:pt x="417019" y="1201678"/>
-                  </a:lnTo>
-                  <a:lnTo>
-                    <a:pt x="583826" y="1201678"/>
-                  </a:lnTo>
-                  <a:lnTo>
-                    <a:pt x="583826" y="1057027"/>
-                  </a:lnTo>
-                  <a:lnTo>
-                    <a:pt x="667230" y="1057027"/>
-                  </a:lnTo>
-                  <a:lnTo>
-                    <a:pt x="667230" y="1027080"/>
-                  </a:lnTo>
-                  <a:lnTo>
-                    <a:pt x="750634" y="1027080"/>
-                  </a:lnTo>
-                  <a:lnTo>
-                    <a:pt x="750634" y="966269"/>
-                  </a:lnTo>
-                  <a:lnTo>
-                    <a:pt x="1084250" y="966269"/>
-                  </a:lnTo>
-                  <a:lnTo>
-                    <a:pt x="1084250" y="935022"/>
-                  </a:lnTo>
-                  <a:lnTo>
-                    <a:pt x="1167653" y="935022"/>
-                  </a:lnTo>
-                  <a:lnTo>
-                    <a:pt x="1167653" y="903887"/>
-                  </a:lnTo>
-                  <a:lnTo>
-                    <a:pt x="1417865" y="903887"/>
-                  </a:lnTo>
-                  <a:lnTo>
-                    <a:pt x="1417865" y="872852"/>
-                  </a:lnTo>
-                  <a:lnTo>
-                    <a:pt x="1501269" y="872852"/>
-                  </a:lnTo>
-                  <a:lnTo>
-                    <a:pt x="1501269" y="841612"/>
-                  </a:lnTo>
-                  <a:lnTo>
-                    <a:pt x="2001692" y="841612"/>
-                  </a:lnTo>
-                  <a:lnTo>
-                    <a:pt x="2001692" y="810057"/>
-                  </a:lnTo>
-                  <a:lnTo>
-                    <a:pt x="2168500" y="810057"/>
-                  </a:lnTo>
-                  <a:lnTo>
-                    <a:pt x="2168500" y="747127"/>
-                  </a:lnTo>
-                  <a:lnTo>
-                    <a:pt x="2502115" y="747127"/>
-                  </a:lnTo>
-                  <a:lnTo>
-                    <a:pt x="2502115" y="715172"/>
-                  </a:lnTo>
-                  <a:lnTo>
-                    <a:pt x="2585519" y="715172"/>
-                  </a:lnTo>
-                  <a:lnTo>
-                    <a:pt x="2585519" y="682913"/>
-                  </a:lnTo>
-                  <a:lnTo>
-                    <a:pt x="3085942" y="682913"/>
-                  </a:lnTo>
-                  <a:lnTo>
-                    <a:pt x="3085942" y="617957"/>
-                  </a:lnTo>
-                  <a:lnTo>
-                    <a:pt x="3169346" y="617957"/>
-                  </a:lnTo>
-                  <a:lnTo>
-                    <a:pt x="3169346" y="520702"/>
-                  </a:lnTo>
-                  <a:lnTo>
-                    <a:pt x="3336154" y="520702"/>
-                  </a:lnTo>
-                  <a:lnTo>
-                    <a:pt x="3336154" y="487609"/>
-                  </a:lnTo>
-                  <a:lnTo>
-                    <a:pt x="3419557" y="487609"/>
-                  </a:lnTo>
-                  <a:lnTo>
-                    <a:pt x="3419557" y="454473"/>
-                  </a:lnTo>
-                  <a:lnTo>
-                    <a:pt x="4253596" y="454473"/>
-                  </a:lnTo>
-                  <a:lnTo>
-                    <a:pt x="4253596" y="421472"/>
-                  </a:lnTo>
-                  <a:lnTo>
-                    <a:pt x="4587211" y="421472"/>
-                  </a:lnTo>
-                  <a:lnTo>
-                    <a:pt x="4587211" y="388046"/>
-                  </a:lnTo>
-                  <a:lnTo>
-                    <a:pt x="4670615" y="388046"/>
-                  </a:lnTo>
-                  <a:lnTo>
-                    <a:pt x="4670615" y="354520"/>
-                  </a:lnTo>
-                  <a:lnTo>
-                    <a:pt x="4920827" y="354520"/>
-                  </a:lnTo>
-                  <a:lnTo>
-                    <a:pt x="4920827" y="253573"/>
-                  </a:lnTo>
-                  <a:lnTo>
-                    <a:pt x="5004231" y="253573"/>
-                  </a:lnTo>
-                  <a:lnTo>
-                    <a:pt x="5004231" y="218267"/>
-                  </a:lnTo>
-                  <a:lnTo>
-                    <a:pt x="5671461" y="218267"/>
-                  </a:lnTo>
-                  <a:lnTo>
-                    <a:pt x="5671461" y="182581"/>
-                  </a:lnTo>
-                  <a:lnTo>
-                    <a:pt x="6338692" y="182581"/>
-                  </a:lnTo>
-                  <a:lnTo>
-                    <a:pt x="6338692" y="146213"/>
-                  </a:lnTo>
-                  <a:lnTo>
-                    <a:pt x="6672308" y="146213"/>
-                  </a:lnTo>
-                  <a:lnTo>
-                    <a:pt x="6672308" y="36881"/>
-                  </a:lnTo>
-                  <a:lnTo>
-                    <a:pt x="7005923" y="36881"/>
+                    <a:pt x="0" y="0"/>
+                  </a:lnTo>
+                  <a:lnTo>
+                    <a:pt x="0" y="0"/>
+                  </a:lnTo>
+                </a:path>
+              </a:pathLst>
+            </a:custGeom>
+            <a:ln w="13550" cap="flat">
+              <a:solidFill>
+                <a:srgbClr val="EBEBEB">
+                  <a:alpha val="100000"/>
+                </a:srgbClr>
+              </a:solidFill>
+              <a:prstDash val="solid"/>
+              <a:round/>
+            </a:ln>
+          </p:spPr>
+          <p:txBody>
+            <a:bodyPr/>
+            <a:lstStyle/>
+            <a:p/>
+          </p:txBody>
+        </p:sp>
+        <p:sp>
+          <p:nvSpPr>
+            <p:cNvPr id="19" name="pl19"/>
+            <p:cNvSpPr/>
+            <p:nvPr/>
+          </p:nvSpPr>
+          <p:spPr>
+            <a:xfrm>
+              <a:off x="1260991" y="4122576"/>
+              <a:ext cx="7005923" cy="1430222"/>
+            </a:xfrm>
+            <a:custGeom>
+              <a:avLst/>
+              <a:pathLst>
+                <a:path w="7005923" h="1430222">
+                  <a:moveTo>
+                    <a:pt x="0" y="1430222"/>
+                  </a:moveTo>
+                  <a:lnTo>
+                    <a:pt x="166807" y="1430222"/>
+                  </a:lnTo>
+                  <a:lnTo>
+                    <a:pt x="166807" y="1402578"/>
+                  </a:lnTo>
+                  <a:lnTo>
+                    <a:pt x="250211" y="1402578"/>
+                  </a:lnTo>
+                  <a:lnTo>
+                    <a:pt x="250211" y="1236992"/>
+                  </a:lnTo>
+                  <a:lnTo>
+                    <a:pt x="333615" y="1236992"/>
+                  </a:lnTo>
+                  <a:lnTo>
+                    <a:pt x="333615" y="1208453"/>
+                  </a:lnTo>
+                  <a:lnTo>
+                    <a:pt x="417019" y="1208453"/>
+                  </a:lnTo>
+                  <a:lnTo>
+                    <a:pt x="417019" y="1179943"/>
+                  </a:lnTo>
+                  <a:lnTo>
+                    <a:pt x="583826" y="1179943"/>
+                  </a:lnTo>
+                  <a:lnTo>
+                    <a:pt x="583826" y="1037673"/>
+                  </a:lnTo>
+                  <a:lnTo>
+                    <a:pt x="667230" y="1037673"/>
+                  </a:lnTo>
+                  <a:lnTo>
+                    <a:pt x="667230" y="1008296"/>
+                  </a:lnTo>
+                  <a:lnTo>
+                    <a:pt x="750634" y="1008296"/>
+                  </a:lnTo>
+                  <a:lnTo>
+                    <a:pt x="750634" y="948698"/>
+                  </a:lnTo>
+                  <a:lnTo>
+                    <a:pt x="1084250" y="948698"/>
+                  </a:lnTo>
+                  <a:lnTo>
+                    <a:pt x="1084250" y="918101"/>
+                  </a:lnTo>
+                  <a:lnTo>
+                    <a:pt x="1167653" y="918101"/>
+                  </a:lnTo>
+                  <a:lnTo>
+                    <a:pt x="1167653" y="887561"/>
+                  </a:lnTo>
+                  <a:lnTo>
+                    <a:pt x="1417865" y="887561"/>
+                  </a:lnTo>
+                  <a:lnTo>
+                    <a:pt x="1417865" y="857073"/>
+                  </a:lnTo>
+                  <a:lnTo>
+                    <a:pt x="1501269" y="857073"/>
+                  </a:lnTo>
+                  <a:lnTo>
+                    <a:pt x="1501269" y="826408"/>
+                  </a:lnTo>
+                  <a:lnTo>
+                    <a:pt x="2001692" y="826408"/>
+                  </a:lnTo>
+                  <a:lnTo>
+                    <a:pt x="2001692" y="795464"/>
+                  </a:lnTo>
+                  <a:lnTo>
+                    <a:pt x="2168500" y="795464"/>
+                  </a:lnTo>
+                  <a:lnTo>
+                    <a:pt x="2168500" y="733822"/>
+                  </a:lnTo>
+                  <a:lnTo>
+                    <a:pt x="2502115" y="733822"/>
+                  </a:lnTo>
+                  <a:lnTo>
+                    <a:pt x="2502115" y="702465"/>
+                  </a:lnTo>
+                  <a:lnTo>
+                    <a:pt x="2585519" y="702465"/>
+                  </a:lnTo>
+                  <a:lnTo>
+                    <a:pt x="2585519" y="670769"/>
+                  </a:lnTo>
+                  <a:lnTo>
+                    <a:pt x="3085942" y="670769"/>
+                  </a:lnTo>
+                  <a:lnTo>
+                    <a:pt x="3085942" y="607023"/>
+                  </a:lnTo>
+                  <a:lnTo>
+                    <a:pt x="3169346" y="607023"/>
+                  </a:lnTo>
+                  <a:lnTo>
+                    <a:pt x="3169346" y="511503"/>
+                  </a:lnTo>
+                  <a:lnTo>
+                    <a:pt x="3336154" y="511503"/>
+                  </a:lnTo>
+                  <a:lnTo>
+                    <a:pt x="3336154" y="478972"/>
+                  </a:lnTo>
+                  <a:lnTo>
+                    <a:pt x="3419557" y="478972"/>
+                  </a:lnTo>
+                  <a:lnTo>
+                    <a:pt x="3419557" y="446439"/>
+                  </a:lnTo>
+                  <a:lnTo>
+                    <a:pt x="4253596" y="446439"/>
+                  </a:lnTo>
+                  <a:lnTo>
+                    <a:pt x="4253596" y="413981"/>
+                  </a:lnTo>
+                  <a:lnTo>
+                    <a:pt x="4587211" y="413981"/>
+                  </a:lnTo>
+                  <a:lnTo>
+                    <a:pt x="4587211" y="381005"/>
+                  </a:lnTo>
+                  <a:lnTo>
+                    <a:pt x="4670615" y="381005"/>
+                  </a:lnTo>
+                  <a:lnTo>
+                    <a:pt x="4670615" y="347983"/>
+                  </a:lnTo>
+                  <a:lnTo>
+                    <a:pt x="4920827" y="347983"/>
+                  </a:lnTo>
+                  <a:lnTo>
+                    <a:pt x="4920827" y="248107"/>
+                  </a:lnTo>
+                  <a:lnTo>
+                    <a:pt x="5004231" y="248107"/>
+                  </a:lnTo>
+                  <a:lnTo>
+                    <a:pt x="5004231" y="213347"/>
+                  </a:lnTo>
+                  <a:lnTo>
+                    <a:pt x="5671461" y="213347"/>
+                  </a:lnTo>
+                  <a:lnTo>
+                    <a:pt x="5671461" y="178291"/>
+                  </a:lnTo>
+                  <a:lnTo>
+                    <a:pt x="6338692" y="178291"/>
+                  </a:lnTo>
+                  <a:lnTo>
+                    <a:pt x="6338692" y="142704"/>
+                  </a:lnTo>
+                  <a:lnTo>
+                    <a:pt x="6672308" y="142704"/>
+                  </a:lnTo>
+                  <a:lnTo>
+                    <a:pt x="6672308" y="35957"/>
+                  </a:lnTo>
+                  <a:lnTo>
+                    <a:pt x="7005923" y="35957"/>
                   </a:lnTo>
                   <a:lnTo>
                     <a:pt x="7005923" y="0"/>
@@ -3072,186 +3115,186 @@
         </p:sp>
         <p:sp>
           <p:nvSpPr>
-            <p:cNvPr id="19" name="pl19"/>
+            <p:cNvPr id="20" name="pl20"/>
             <p:cNvSpPr/>
             <p:nvPr/>
           </p:nvSpPr>
           <p:spPr>
             <a:xfrm>
               <a:off x="1260991" y="2861938"/>
-              <a:ext cx="7005923" cy="2655148"/>
+              <a:ext cx="7005923" cy="2655257"/>
             </a:xfrm>
             <a:custGeom>
               <a:avLst/>
               <a:pathLst>
-                <a:path w="7005923" h="2655148">
+                <a:path w="7005923" h="2655257">
                   <a:moveTo>
-                    <a:pt x="0" y="2655148"/>
+                    <a:pt x="0" y="2655257"/>
                   </a:moveTo>
                   <a:lnTo>
-                    <a:pt x="166807" y="2655148"/>
-                  </a:lnTo>
-                  <a:lnTo>
-                    <a:pt x="166807" y="2592222"/>
-                  </a:lnTo>
-                  <a:lnTo>
-                    <a:pt x="250211" y="2592222"/>
-                  </a:lnTo>
-                  <a:lnTo>
-                    <a:pt x="250211" y="2226331"/>
-                  </a:lnTo>
-                  <a:lnTo>
-                    <a:pt x="333615" y="2226331"/>
-                  </a:lnTo>
-                  <a:lnTo>
-                    <a:pt x="333615" y="2164816"/>
-                  </a:lnTo>
-                  <a:lnTo>
-                    <a:pt x="417019" y="2164816"/>
-                  </a:lnTo>
-                  <a:lnTo>
-                    <a:pt x="417019" y="2103778"/>
-                  </a:lnTo>
-                  <a:lnTo>
-                    <a:pt x="583826" y="2103778"/>
-                  </a:lnTo>
-                  <a:lnTo>
-                    <a:pt x="583826" y="1807917"/>
-                  </a:lnTo>
-                  <a:lnTo>
-                    <a:pt x="667230" y="1807917"/>
-                  </a:lnTo>
-                  <a:lnTo>
-                    <a:pt x="667230" y="1748172"/>
-                  </a:lnTo>
-                  <a:lnTo>
-                    <a:pt x="750634" y="1748172"/>
-                  </a:lnTo>
-                  <a:lnTo>
-                    <a:pt x="750634" y="1628430"/>
-                  </a:lnTo>
-                  <a:lnTo>
-                    <a:pt x="1084250" y="1628430"/>
-                  </a:lnTo>
-                  <a:lnTo>
-                    <a:pt x="1084250" y="1567722"/>
-                  </a:lnTo>
-                  <a:lnTo>
-                    <a:pt x="1167653" y="1567722"/>
-                  </a:lnTo>
-                  <a:lnTo>
-                    <a:pt x="1167653" y="1507782"/>
-                  </a:lnTo>
-                  <a:lnTo>
-                    <a:pt x="1417865" y="1507782"/>
-                  </a:lnTo>
-                  <a:lnTo>
-                    <a:pt x="1417865" y="1448581"/>
-                  </a:lnTo>
-                  <a:lnTo>
-                    <a:pt x="1501269" y="1448581"/>
-                  </a:lnTo>
-                  <a:lnTo>
-                    <a:pt x="1501269" y="1389538"/>
-                  </a:lnTo>
-                  <a:lnTo>
-                    <a:pt x="2001692" y="1389538"/>
-                  </a:lnTo>
-                  <a:lnTo>
-                    <a:pt x="2001692" y="1330455"/>
-                  </a:lnTo>
-                  <a:lnTo>
-                    <a:pt x="2168500" y="1330455"/>
-                  </a:lnTo>
-                  <a:lnTo>
-                    <a:pt x="2168500" y="1214297"/>
-                  </a:lnTo>
-                  <a:lnTo>
-                    <a:pt x="2502115" y="1214297"/>
-                  </a:lnTo>
-                  <a:lnTo>
-                    <a:pt x="2502115" y="1156158"/>
-                  </a:lnTo>
-                  <a:lnTo>
-                    <a:pt x="2585519" y="1156158"/>
-                  </a:lnTo>
-                  <a:lnTo>
-                    <a:pt x="2585519" y="1098042"/>
-                  </a:lnTo>
-                  <a:lnTo>
-                    <a:pt x="3085942" y="1098042"/>
-                  </a:lnTo>
-                  <a:lnTo>
-                    <a:pt x="3085942" y="982767"/>
-                  </a:lnTo>
-                  <a:lnTo>
-                    <a:pt x="3169346" y="982767"/>
-                  </a:lnTo>
-                  <a:lnTo>
-                    <a:pt x="3169346" y="814510"/>
-                  </a:lnTo>
-                  <a:lnTo>
-                    <a:pt x="3336154" y="814510"/>
-                  </a:lnTo>
-                  <a:lnTo>
-                    <a:pt x="3336154" y="758433"/>
-                  </a:lnTo>
-                  <a:lnTo>
-                    <a:pt x="3419557" y="758433"/>
-                  </a:lnTo>
-                  <a:lnTo>
-                    <a:pt x="3419557" y="702881"/>
-                  </a:lnTo>
-                  <a:lnTo>
-                    <a:pt x="4253596" y="702881"/>
-                  </a:lnTo>
-                  <a:lnTo>
-                    <a:pt x="4253596" y="648145"/>
-                  </a:lnTo>
-                  <a:lnTo>
-                    <a:pt x="4587211" y="648145"/>
-                  </a:lnTo>
-                  <a:lnTo>
-                    <a:pt x="4587211" y="593301"/>
-                  </a:lnTo>
-                  <a:lnTo>
-                    <a:pt x="4670615" y="593301"/>
-                  </a:lnTo>
-                  <a:lnTo>
-                    <a:pt x="4670615" y="538898"/>
-                  </a:lnTo>
-                  <a:lnTo>
-                    <a:pt x="4920827" y="538898"/>
-                  </a:lnTo>
-                  <a:lnTo>
-                    <a:pt x="4920827" y="378714"/>
-                  </a:lnTo>
-                  <a:lnTo>
-                    <a:pt x="5004231" y="378714"/>
-                  </a:lnTo>
-                  <a:lnTo>
-                    <a:pt x="5004231" y="323965"/>
-                  </a:lnTo>
-                  <a:lnTo>
-                    <a:pt x="5671461" y="323965"/>
-                  </a:lnTo>
-                  <a:lnTo>
-                    <a:pt x="5671461" y="269296"/>
-                  </a:lnTo>
-                  <a:lnTo>
-                    <a:pt x="6338692" y="269296"/>
-                  </a:lnTo>
-                  <a:lnTo>
-                    <a:pt x="6338692" y="214270"/>
-                  </a:lnTo>
-                  <a:lnTo>
-                    <a:pt x="6672308" y="214270"/>
-                  </a:lnTo>
-                  <a:lnTo>
-                    <a:pt x="6672308" y="53004"/>
-                  </a:lnTo>
-                  <a:lnTo>
-                    <a:pt x="7005923" y="53004"/>
+                    <a:pt x="166807" y="2655257"/>
+                  </a:lnTo>
+                  <a:lnTo>
+                    <a:pt x="166807" y="2592458"/>
+                  </a:lnTo>
+                  <a:lnTo>
+                    <a:pt x="250211" y="2592458"/>
+                  </a:lnTo>
+                  <a:lnTo>
+                    <a:pt x="250211" y="2226173"/>
+                  </a:lnTo>
+                  <a:lnTo>
+                    <a:pt x="333615" y="2226173"/>
+                  </a:lnTo>
+                  <a:lnTo>
+                    <a:pt x="333615" y="2164740"/>
+                  </a:lnTo>
+                  <a:lnTo>
+                    <a:pt x="417019" y="2164740"/>
+                  </a:lnTo>
+                  <a:lnTo>
+                    <a:pt x="417019" y="2103865"/>
+                  </a:lnTo>
+                  <a:lnTo>
+                    <a:pt x="583826" y="2103865"/>
+                  </a:lnTo>
+                  <a:lnTo>
+                    <a:pt x="583826" y="1807424"/>
+                  </a:lnTo>
+                  <a:lnTo>
+                    <a:pt x="667230" y="1807424"/>
+                  </a:lnTo>
+                  <a:lnTo>
+                    <a:pt x="667230" y="1747724"/>
+                  </a:lnTo>
+                  <a:lnTo>
+                    <a:pt x="750634" y="1747724"/>
+                  </a:lnTo>
+                  <a:lnTo>
+                    <a:pt x="750634" y="1628189"/>
+                  </a:lnTo>
+                  <a:lnTo>
+                    <a:pt x="1084250" y="1628189"/>
+                  </a:lnTo>
+                  <a:lnTo>
+                    <a:pt x="1084250" y="1567641"/>
+                  </a:lnTo>
+                  <a:lnTo>
+                    <a:pt x="1167653" y="1567641"/>
+                  </a:lnTo>
+                  <a:lnTo>
+                    <a:pt x="1167653" y="1507754"/>
+                  </a:lnTo>
+                  <a:lnTo>
+                    <a:pt x="1417865" y="1507754"/>
+                  </a:lnTo>
+                  <a:lnTo>
+                    <a:pt x="1417865" y="1448517"/>
+                  </a:lnTo>
+                  <a:lnTo>
+                    <a:pt x="1501269" y="1448517"/>
+                  </a:lnTo>
+                  <a:lnTo>
+                    <a:pt x="1501269" y="1389488"/>
+                  </a:lnTo>
+                  <a:lnTo>
+                    <a:pt x="2001692" y="1389488"/>
+                  </a:lnTo>
+                  <a:lnTo>
+                    <a:pt x="2001692" y="1330477"/>
+                  </a:lnTo>
+                  <a:lnTo>
+                    <a:pt x="2168500" y="1330477"/>
+                  </a:lnTo>
+                  <a:lnTo>
+                    <a:pt x="2168500" y="1214587"/>
+                  </a:lnTo>
+                  <a:lnTo>
+                    <a:pt x="2502115" y="1214587"/>
+                  </a:lnTo>
+                  <a:lnTo>
+                    <a:pt x="2502115" y="1156478"/>
+                  </a:lnTo>
+                  <a:lnTo>
+                    <a:pt x="2585519" y="1156478"/>
+                  </a:lnTo>
+                  <a:lnTo>
+                    <a:pt x="2585519" y="1098320"/>
+                  </a:lnTo>
+                  <a:lnTo>
+                    <a:pt x="3085942" y="1098320"/>
+                  </a:lnTo>
+                  <a:lnTo>
+                    <a:pt x="3085942" y="983099"/>
+                  </a:lnTo>
+                  <a:lnTo>
+                    <a:pt x="3169346" y="983099"/>
+                  </a:lnTo>
+                  <a:lnTo>
+                    <a:pt x="3169346" y="814789"/>
+                  </a:lnTo>
+                  <a:lnTo>
+                    <a:pt x="3336154" y="814789"/>
+                  </a:lnTo>
+                  <a:lnTo>
+                    <a:pt x="3336154" y="758649"/>
+                  </a:lnTo>
+                  <a:lnTo>
+                    <a:pt x="3419557" y="758649"/>
+                  </a:lnTo>
+                  <a:lnTo>
+                    <a:pt x="3419557" y="703102"/>
+                  </a:lnTo>
+                  <a:lnTo>
+                    <a:pt x="4253596" y="703102"/>
+                  </a:lnTo>
+                  <a:lnTo>
+                    <a:pt x="4253596" y="648274"/>
+                  </a:lnTo>
+                  <a:lnTo>
+                    <a:pt x="4587211" y="648274"/>
+                  </a:lnTo>
+                  <a:lnTo>
+                    <a:pt x="4587211" y="593177"/>
+                  </a:lnTo>
+                  <a:lnTo>
+                    <a:pt x="4670615" y="593177"/>
+                  </a:lnTo>
+                  <a:lnTo>
+                    <a:pt x="4670615" y="538609"/>
+                  </a:lnTo>
+                  <a:lnTo>
+                    <a:pt x="4920827" y="538609"/>
+                  </a:lnTo>
+                  <a:lnTo>
+                    <a:pt x="4920827" y="377248"/>
+                  </a:lnTo>
+                  <a:lnTo>
+                    <a:pt x="5004231" y="377248"/>
+                  </a:lnTo>
+                  <a:lnTo>
+                    <a:pt x="5004231" y="322378"/>
+                  </a:lnTo>
+                  <a:lnTo>
+                    <a:pt x="5671461" y="322378"/>
+                  </a:lnTo>
+                  <a:lnTo>
+                    <a:pt x="5671461" y="267711"/>
+                  </a:lnTo>
+                  <a:lnTo>
+                    <a:pt x="6338692" y="267711"/>
+                  </a:lnTo>
+                  <a:lnTo>
+                    <a:pt x="6338692" y="212902"/>
+                  </a:lnTo>
+                  <a:lnTo>
+                    <a:pt x="6672308" y="212902"/>
+                  </a:lnTo>
+                  <a:lnTo>
+                    <a:pt x="6672308" y="52612"/>
+                  </a:lnTo>
+                  <a:lnTo>
+                    <a:pt x="7005923" y="52612"/>
                   </a:lnTo>
                   <a:lnTo>
                     <a:pt x="7005923" y="0"/>
@@ -3277,7 +3320,7 @@
         </p:sp>
         <p:sp>
           <p:nvSpPr>
-            <p:cNvPr id="20" name="tx20"/>
+            <p:cNvPr id="21" name="tx21"/>
             <p:cNvSpPr/>
             <p:nvPr/>
           </p:nvSpPr>
@@ -3323,13 +3366,13 @@
         </p:sp>
         <p:sp>
           <p:nvSpPr>
-            <p:cNvPr id="21" name="tx21"/>
+            <p:cNvPr id="22" name="tx22"/>
             <p:cNvSpPr/>
             <p:nvPr/>
           </p:nvSpPr>
           <p:spPr>
             <a:xfrm>
-              <a:off x="692708" y="4529235"/>
+              <a:off x="692708" y="4541406"/>
               <a:ext cx="155356" cy="80101"/>
             </a:xfrm>
             <a:prstGeom prst="rect">
@@ -3369,13 +3412,13 @@
         </p:sp>
         <p:sp>
           <p:nvSpPr>
-            <p:cNvPr id="22" name="tx22"/>
+            <p:cNvPr id="23" name="tx23"/>
             <p:cNvSpPr/>
             <p:nvPr/>
           </p:nvSpPr>
           <p:spPr>
             <a:xfrm>
-              <a:off x="692708" y="3518099"/>
+              <a:off x="692708" y="3542441"/>
               <a:ext cx="155356" cy="80101"/>
             </a:xfrm>
             <a:prstGeom prst="rect">
@@ -3415,7 +3458,53 @@
         </p:sp>
         <p:sp>
           <p:nvSpPr>
-            <p:cNvPr id="23" name="tx23"/>
+            <p:cNvPr id="24" name="tx24"/>
+            <p:cNvSpPr/>
+            <p:nvPr/>
+          </p:nvSpPr>
+          <p:spPr>
+            <a:xfrm>
+              <a:off x="692708" y="2543476"/>
+              <a:ext cx="155356" cy="80101"/>
+            </a:xfrm>
+            <a:prstGeom prst="rect">
+              <a:avLst/>
+            </a:prstGeom>
+            <a:noFill/>
+          </p:spPr>
+          <p:txBody>
+            <a:bodyPr lIns="0" rIns="0" tIns="0" bIns="0" anchorCtr="1" anchor="ctr" wrap="none"/>
+            <a:lstStyle/>
+            <a:p>
+              <a:pPr algn="l" marL="0" marR="0" indent="0">
+                <a:lnSpc>
+                  <a:spcPts val="880"/>
+                </a:lnSpc>
+                <a:spcBef>
+                  <a:spcPts val="0"/>
+                </a:spcBef>
+                <a:spcAft>
+                  <a:spcPts val="0"/>
+                </a:spcAft>
+              </a:pPr>
+              <a:r>
+                <a:rPr sz="880">
+                  <a:solidFill>
+                    <a:srgbClr val="4D4D4D">
+                      <a:alpha val="100000"/>
+                    </a:srgbClr>
+                  </a:solidFill>
+                  <a:latin typeface="Helvetica"/>
+                  <a:cs typeface="Helvetica"/>
+                </a:rPr>
+                <a:t>0.6</a:t>
+              </a:r>
+            </a:p>
+          </p:txBody>
+        </p:sp>
+        <p:sp>
+          <p:nvSpPr>
+            <p:cNvPr id="25" name="tx25"/>
             <p:cNvSpPr/>
             <p:nvPr/>
           </p:nvSpPr>
@@ -3461,7 +3550,7 @@
         </p:sp>
         <p:sp>
           <p:nvSpPr>
-            <p:cNvPr id="24" name="tx24"/>
+            <p:cNvPr id="26" name="tx26"/>
             <p:cNvSpPr/>
             <p:nvPr/>
           </p:nvSpPr>
@@ -3507,7 +3596,7 @@
         </p:sp>
         <p:sp>
           <p:nvSpPr>
-            <p:cNvPr id="25" name="tx25"/>
+            <p:cNvPr id="27" name="tx27"/>
             <p:cNvSpPr/>
             <p:nvPr/>
           </p:nvSpPr>
@@ -3553,7 +3642,7 @@
         </p:sp>
         <p:sp>
           <p:nvSpPr>
-            <p:cNvPr id="26" name="tx26"/>
+            <p:cNvPr id="28" name="tx28"/>
             <p:cNvSpPr/>
             <p:nvPr/>
           </p:nvSpPr>
@@ -3599,7 +3688,7 @@
         </p:sp>
         <p:sp>
           <p:nvSpPr>
-            <p:cNvPr id="27" name="tx27"/>
+            <p:cNvPr id="29" name="tx29"/>
             <p:cNvSpPr/>
             <p:nvPr/>
           </p:nvSpPr>
@@ -3645,7 +3734,7 @@
         </p:sp>
         <p:sp>
           <p:nvSpPr>
-            <p:cNvPr id="28" name="tx28"/>
+            <p:cNvPr id="30" name="tx30"/>
             <p:cNvSpPr/>
             <p:nvPr/>
           </p:nvSpPr>
@@ -3691,7 +3780,7 @@
         </p:sp>
         <p:sp>
           <p:nvSpPr>
-            <p:cNvPr id="29" name="pl29"/>
+            <p:cNvPr id="31" name="pl31"/>
             <p:cNvSpPr/>
             <p:nvPr/>
           </p:nvSpPr>
@@ -3731,7 +3820,7 @@
         </p:sp>
         <p:sp>
           <p:nvSpPr>
-            <p:cNvPr id="30" name="pl30"/>
+            <p:cNvPr id="32" name="pl32"/>
             <p:cNvSpPr/>
             <p:nvPr/>
           </p:nvSpPr>
@@ -3771,7 +3860,7 @@
         </p:sp>
         <p:sp>
           <p:nvSpPr>
-            <p:cNvPr id="31" name="tx31"/>
+            <p:cNvPr id="33" name="tx33"/>
             <p:cNvSpPr/>
             <p:nvPr/>
           </p:nvSpPr>
@@ -3817,7 +3906,7 @@
         </p:sp>
         <p:sp>
           <p:nvSpPr>
-            <p:cNvPr id="32" name="tx32"/>
+            <p:cNvPr id="34" name="tx34"/>
             <p:cNvSpPr/>
             <p:nvPr/>
           </p:nvSpPr>
@@ -3863,7 +3952,7 @@
         </p:sp>
         <p:sp>
           <p:nvSpPr>
-            <p:cNvPr id="33" name="tx33"/>
+            <p:cNvPr id="35" name="tx35"/>
             <p:cNvSpPr/>
             <p:nvPr/>
           </p:nvSpPr>
@@ -3902,14 +3991,14 @@
                   <a:latin typeface="Helvetica"/>
                   <a:cs typeface="Helvetica"/>
                 </a:rPr>
-                <a:t>Discrep &gt;= +25 vs &lt;+25: subHR = 2.25 (95% CI 1.18-4.30), p = 0.014</a:t>
+                <a:t>Discrep &gt;= +25 vs &lt;+25: subHR = 2.30 (95% CI 1.19-4.45), p = 0.014</a:t>
               </a:r>
             </a:p>
           </p:txBody>
         </p:sp>
         <p:sp>
           <p:nvSpPr>
-            <p:cNvPr id="34" name="tx34"/>
+            <p:cNvPr id="36" name="tx36"/>
             <p:cNvSpPr/>
             <p:nvPr/>
           </p:nvSpPr>

--- a/docs/plots/carbo/jx_carbo_adjcif_grade2.pptx
+++ b/docs/plots/carbo/jx_carbo_adjcif_grade2.pptx
@@ -2916,7 +2916,7 @@
           </p:nvSpPr>
           <p:spPr>
             <a:xfrm>
-              <a:off x="1260991" y="4122576"/>
+              <a:off x="1260991" y="4122577"/>
               <a:ext cx="7005923" cy="1430222"/>
             </a:xfrm>
             <a:custGeom>
@@ -2966,10 +2966,10 @@
                     <a:pt x="750634" y="1008296"/>
                   </a:lnTo>
                   <a:lnTo>
-                    <a:pt x="750634" y="948698"/>
-                  </a:lnTo>
-                  <a:lnTo>
-                    <a:pt x="1084250" y="948698"/>
+                    <a:pt x="750634" y="948697"/>
+                  </a:lnTo>
+                  <a:lnTo>
+                    <a:pt x="1084250" y="948697"/>
                   </a:lnTo>
                   <a:lnTo>
                     <a:pt x="1084250" y="918101"/>
@@ -3008,10 +3008,10 @@
                     <a:pt x="2502115" y="733822"/>
                   </a:lnTo>
                   <a:lnTo>
-                    <a:pt x="2502115" y="702465"/>
-                  </a:lnTo>
-                  <a:lnTo>
-                    <a:pt x="2585519" y="702465"/>
+                    <a:pt x="2502115" y="702464"/>
+                  </a:lnTo>
+                  <a:lnTo>
+                    <a:pt x="2585519" y="702464"/>
                   </a:lnTo>
                   <a:lnTo>
                     <a:pt x="2585519" y="670769"/>

--- a/docs/plots/carbo/jx_carbo_adjcif_grade2.pptx
+++ b/docs/plots/carbo/jx_carbo_adjcif_grade2.pptx
@@ -2271,7 +2271,7 @@
           </p:nvSpPr>
           <p:spPr>
             <a:xfrm>
-              <a:off x="910695" y="5080939"/>
+              <a:off x="910695" y="5284138"/>
               <a:ext cx="7706515" cy="0"/>
             </a:xfrm>
             <a:custGeom>
@@ -2314,7 +2314,7 @@
           </p:nvSpPr>
           <p:spPr>
             <a:xfrm>
-              <a:off x="910695" y="4081974"/>
+              <a:off x="910695" y="4691572"/>
               <a:ext cx="7706515" cy="0"/>
             </a:xfrm>
             <a:custGeom>
@@ -2357,7 +2357,7 @@
           </p:nvSpPr>
           <p:spPr>
             <a:xfrm>
-              <a:off x="910695" y="3083009"/>
+              <a:off x="910695" y="4099005"/>
               <a:ext cx="7706515" cy="0"/>
             </a:xfrm>
             <a:custGeom>
@@ -2400,21 +2400,21 @@
           </p:nvSpPr>
           <p:spPr>
             <a:xfrm>
-              <a:off x="1969924" y="2583293"/>
-              <a:ext cx="0" cy="3139848"/>
+              <a:off x="910695" y="3506438"/>
+              <a:ext cx="7706515" cy="0"/>
             </a:xfrm>
             <a:custGeom>
               <a:avLst/>
               <a:pathLst>
-                <a:path w="0" h="3139848">
+                <a:path w="7706515" h="0">
                   <a:moveTo>
-                    <a:pt x="0" y="3139848"/>
+                    <a:pt x="0" y="0"/>
                   </a:moveTo>
                   <a:lnTo>
-                    <a:pt x="0" y="0"/>
-                  </a:lnTo>
-                  <a:lnTo>
-                    <a:pt x="0" y="0"/>
+                    <a:pt x="7706515" y="0"/>
+                  </a:lnTo>
+                  <a:lnTo>
+                    <a:pt x="7706515" y="0"/>
                   </a:lnTo>
                 </a:path>
               </a:pathLst>
@@ -2443,21 +2443,21 @@
           </p:nvSpPr>
           <p:spPr>
             <a:xfrm>
-              <a:off x="4055020" y="2583293"/>
-              <a:ext cx="0" cy="3139848"/>
+              <a:off x="910695" y="2913872"/>
+              <a:ext cx="7706515" cy="0"/>
             </a:xfrm>
             <a:custGeom>
               <a:avLst/>
               <a:pathLst>
-                <a:path w="0" h="3139848">
+                <a:path w="7706515" h="0">
                   <a:moveTo>
-                    <a:pt x="0" y="3139848"/>
+                    <a:pt x="0" y="0"/>
                   </a:moveTo>
                   <a:lnTo>
-                    <a:pt x="0" y="0"/>
-                  </a:lnTo>
-                  <a:lnTo>
-                    <a:pt x="0" y="0"/>
+                    <a:pt x="7706515" y="0"/>
+                  </a:lnTo>
+                  <a:lnTo>
+                    <a:pt x="7706515" y="0"/>
                   </a:lnTo>
                 </a:path>
               </a:pathLst>
@@ -2486,7 +2486,7 @@
           </p:nvSpPr>
           <p:spPr>
             <a:xfrm>
-              <a:off x="6140116" y="2583293"/>
+              <a:off x="1969924" y="2583293"/>
               <a:ext cx="0" cy="3139848"/>
             </a:xfrm>
             <a:custGeom>
@@ -2529,7 +2529,7 @@
           </p:nvSpPr>
           <p:spPr>
             <a:xfrm>
-              <a:off x="8225212" y="2583293"/>
+              <a:off x="4055020" y="2583293"/>
               <a:ext cx="0" cy="3139848"/>
             </a:xfrm>
             <a:custGeom>
@@ -2572,26 +2572,26 @@
           </p:nvSpPr>
           <p:spPr>
             <a:xfrm>
-              <a:off x="910695" y="5580422"/>
-              <a:ext cx="7706515" cy="0"/>
+              <a:off x="6140116" y="2583293"/>
+              <a:ext cx="0" cy="3139848"/>
             </a:xfrm>
             <a:custGeom>
               <a:avLst/>
               <a:pathLst>
-                <a:path w="7706515" h="0">
+                <a:path w="0" h="3139848">
                   <a:moveTo>
+                    <a:pt x="0" y="3139848"/>
+                  </a:moveTo>
+                  <a:lnTo>
                     <a:pt x="0" y="0"/>
-                  </a:moveTo>
-                  <a:lnTo>
-                    <a:pt x="7706515" y="0"/>
-                  </a:lnTo>
-                  <a:lnTo>
-                    <a:pt x="7706515" y="0"/>
+                  </a:lnTo>
+                  <a:lnTo>
+                    <a:pt x="0" y="0"/>
                   </a:lnTo>
                 </a:path>
               </a:pathLst>
             </a:custGeom>
-            <a:ln w="13550" cap="flat">
+            <a:ln w="6775" cap="flat">
               <a:solidFill>
                 <a:srgbClr val="EBEBEB">
                   <a:alpha val="100000"/>
@@ -2615,26 +2615,26 @@
           </p:nvSpPr>
           <p:spPr>
             <a:xfrm>
-              <a:off x="910695" y="4581457"/>
-              <a:ext cx="7706515" cy="0"/>
+              <a:off x="8225212" y="2583293"/>
+              <a:ext cx="0" cy="3139848"/>
             </a:xfrm>
             <a:custGeom>
               <a:avLst/>
               <a:pathLst>
-                <a:path w="7706515" h="0">
+                <a:path w="0" h="3139848">
                   <a:moveTo>
+                    <a:pt x="0" y="3139848"/>
+                  </a:moveTo>
+                  <a:lnTo>
                     <a:pt x="0" y="0"/>
-                  </a:moveTo>
-                  <a:lnTo>
-                    <a:pt x="7706515" y="0"/>
-                  </a:lnTo>
-                  <a:lnTo>
-                    <a:pt x="7706515" y="0"/>
+                  </a:lnTo>
+                  <a:lnTo>
+                    <a:pt x="0" y="0"/>
                   </a:lnTo>
                 </a:path>
               </a:pathLst>
             </a:custGeom>
-            <a:ln w="13550" cap="flat">
+            <a:ln w="6775" cap="flat">
               <a:solidFill>
                 <a:srgbClr val="EBEBEB">
                   <a:alpha val="100000"/>
@@ -2658,7 +2658,7 @@
           </p:nvSpPr>
           <p:spPr>
             <a:xfrm>
-              <a:off x="910695" y="3582492"/>
+              <a:off x="910695" y="5580422"/>
               <a:ext cx="7706515" cy="0"/>
             </a:xfrm>
             <a:custGeom>
@@ -2701,7 +2701,7 @@
           </p:nvSpPr>
           <p:spPr>
             <a:xfrm>
-              <a:off x="910695" y="2583527"/>
+              <a:off x="910695" y="4987855"/>
               <a:ext cx="7706515" cy="0"/>
             </a:xfrm>
             <a:custGeom>
@@ -2744,21 +2744,21 @@
           </p:nvSpPr>
           <p:spPr>
             <a:xfrm>
-              <a:off x="927375" y="2583293"/>
-              <a:ext cx="0" cy="3139848"/>
+              <a:off x="910695" y="4395288"/>
+              <a:ext cx="7706515" cy="0"/>
             </a:xfrm>
             <a:custGeom>
               <a:avLst/>
               <a:pathLst>
-                <a:path w="0" h="3139848">
+                <a:path w="7706515" h="0">
                   <a:moveTo>
-                    <a:pt x="0" y="3139848"/>
+                    <a:pt x="0" y="0"/>
                   </a:moveTo>
                   <a:lnTo>
-                    <a:pt x="0" y="0"/>
-                  </a:lnTo>
-                  <a:lnTo>
-                    <a:pt x="0" y="0"/>
+                    <a:pt x="7706515" y="0"/>
+                  </a:lnTo>
+                  <a:lnTo>
+                    <a:pt x="7706515" y="0"/>
                   </a:lnTo>
                 </a:path>
               </a:pathLst>
@@ -2787,21 +2787,21 @@
           </p:nvSpPr>
           <p:spPr>
             <a:xfrm>
-              <a:off x="3012472" y="2583293"/>
-              <a:ext cx="0" cy="3139848"/>
+              <a:off x="910695" y="3802722"/>
+              <a:ext cx="7706515" cy="0"/>
             </a:xfrm>
             <a:custGeom>
               <a:avLst/>
               <a:pathLst>
-                <a:path w="0" h="3139848">
+                <a:path w="7706515" h="0">
                   <a:moveTo>
-                    <a:pt x="0" y="3139848"/>
+                    <a:pt x="0" y="0"/>
                   </a:moveTo>
                   <a:lnTo>
-                    <a:pt x="0" y="0"/>
-                  </a:lnTo>
-                  <a:lnTo>
-                    <a:pt x="0" y="0"/>
+                    <a:pt x="7706515" y="0"/>
+                  </a:lnTo>
+                  <a:lnTo>
+                    <a:pt x="7706515" y="0"/>
                   </a:lnTo>
                 </a:path>
               </a:pathLst>
@@ -2830,21 +2830,21 @@
           </p:nvSpPr>
           <p:spPr>
             <a:xfrm>
-              <a:off x="5097568" y="2583293"/>
-              <a:ext cx="0" cy="3139848"/>
+              <a:off x="910695" y="3210155"/>
+              <a:ext cx="7706515" cy="0"/>
             </a:xfrm>
             <a:custGeom>
               <a:avLst/>
               <a:pathLst>
-                <a:path w="0" h="3139848">
+                <a:path w="7706515" h="0">
                   <a:moveTo>
-                    <a:pt x="0" y="3139848"/>
+                    <a:pt x="0" y="0"/>
                   </a:moveTo>
                   <a:lnTo>
-                    <a:pt x="0" y="0"/>
-                  </a:lnTo>
-                  <a:lnTo>
-                    <a:pt x="0" y="0"/>
+                    <a:pt x="7706515" y="0"/>
+                  </a:lnTo>
+                  <a:lnTo>
+                    <a:pt x="7706515" y="0"/>
                   </a:lnTo>
                 </a:path>
               </a:pathLst>
@@ -2873,21 +2873,21 @@
           </p:nvSpPr>
           <p:spPr>
             <a:xfrm>
-              <a:off x="7182664" y="2583293"/>
-              <a:ext cx="0" cy="3139848"/>
+              <a:off x="910695" y="2617588"/>
+              <a:ext cx="7706515" cy="0"/>
             </a:xfrm>
             <a:custGeom>
               <a:avLst/>
               <a:pathLst>
-                <a:path w="0" h="3139848">
+                <a:path w="7706515" h="0">
                   <a:moveTo>
-                    <a:pt x="0" y="3139848"/>
+                    <a:pt x="0" y="0"/>
                   </a:moveTo>
                   <a:lnTo>
-                    <a:pt x="0" y="0"/>
-                  </a:lnTo>
-                  <a:lnTo>
-                    <a:pt x="0" y="0"/>
+                    <a:pt x="7706515" y="0"/>
+                  </a:lnTo>
+                  <a:lnTo>
+                    <a:pt x="7706515" y="0"/>
                   </a:lnTo>
                 </a:path>
               </a:pathLst>
@@ -2916,180 +2916,352 @@
           </p:nvSpPr>
           <p:spPr>
             <a:xfrm>
-              <a:off x="1260991" y="4122577"/>
-              <a:ext cx="7005923" cy="1430222"/>
+              <a:off x="927375" y="2583293"/>
+              <a:ext cx="0" cy="3139848"/>
             </a:xfrm>
             <a:custGeom>
               <a:avLst/>
               <a:pathLst>
-                <a:path w="7005923" h="1430222">
+                <a:path w="0" h="3139848">
                   <a:moveTo>
-                    <a:pt x="0" y="1430222"/>
+                    <a:pt x="0" y="3139848"/>
                   </a:moveTo>
                   <a:lnTo>
-                    <a:pt x="166807" y="1430222"/>
-                  </a:lnTo>
-                  <a:lnTo>
-                    <a:pt x="166807" y="1402578"/>
-                  </a:lnTo>
-                  <a:lnTo>
-                    <a:pt x="250211" y="1402578"/>
-                  </a:lnTo>
-                  <a:lnTo>
-                    <a:pt x="250211" y="1236992"/>
-                  </a:lnTo>
-                  <a:lnTo>
-                    <a:pt x="333615" y="1236992"/>
-                  </a:lnTo>
-                  <a:lnTo>
-                    <a:pt x="333615" y="1208453"/>
-                  </a:lnTo>
-                  <a:lnTo>
-                    <a:pt x="417019" y="1208453"/>
-                  </a:lnTo>
-                  <a:lnTo>
-                    <a:pt x="417019" y="1179943"/>
-                  </a:lnTo>
-                  <a:lnTo>
-                    <a:pt x="583826" y="1179943"/>
-                  </a:lnTo>
-                  <a:lnTo>
-                    <a:pt x="583826" y="1037673"/>
-                  </a:lnTo>
-                  <a:lnTo>
-                    <a:pt x="667230" y="1037673"/>
-                  </a:lnTo>
-                  <a:lnTo>
-                    <a:pt x="667230" y="1008296"/>
-                  </a:lnTo>
-                  <a:lnTo>
-                    <a:pt x="750634" y="1008296"/>
-                  </a:lnTo>
-                  <a:lnTo>
-                    <a:pt x="750634" y="948697"/>
-                  </a:lnTo>
-                  <a:lnTo>
-                    <a:pt x="1084250" y="948697"/>
-                  </a:lnTo>
-                  <a:lnTo>
-                    <a:pt x="1084250" y="918101"/>
-                  </a:lnTo>
-                  <a:lnTo>
-                    <a:pt x="1167653" y="918101"/>
-                  </a:lnTo>
-                  <a:lnTo>
-                    <a:pt x="1167653" y="887561"/>
-                  </a:lnTo>
-                  <a:lnTo>
-                    <a:pt x="1417865" y="887561"/>
-                  </a:lnTo>
-                  <a:lnTo>
-                    <a:pt x="1417865" y="857073"/>
-                  </a:lnTo>
-                  <a:lnTo>
-                    <a:pt x="1501269" y="857073"/>
-                  </a:lnTo>
-                  <a:lnTo>
-                    <a:pt x="1501269" y="826408"/>
-                  </a:lnTo>
-                  <a:lnTo>
-                    <a:pt x="2001692" y="826408"/>
-                  </a:lnTo>
-                  <a:lnTo>
-                    <a:pt x="2001692" y="795464"/>
-                  </a:lnTo>
-                  <a:lnTo>
-                    <a:pt x="2168500" y="795464"/>
-                  </a:lnTo>
-                  <a:lnTo>
-                    <a:pt x="2168500" y="733822"/>
-                  </a:lnTo>
-                  <a:lnTo>
-                    <a:pt x="2502115" y="733822"/>
-                  </a:lnTo>
-                  <a:lnTo>
-                    <a:pt x="2502115" y="702464"/>
-                  </a:lnTo>
-                  <a:lnTo>
-                    <a:pt x="2585519" y="702464"/>
-                  </a:lnTo>
-                  <a:lnTo>
-                    <a:pt x="2585519" y="670769"/>
-                  </a:lnTo>
-                  <a:lnTo>
-                    <a:pt x="3085942" y="670769"/>
-                  </a:lnTo>
-                  <a:lnTo>
-                    <a:pt x="3085942" y="607023"/>
-                  </a:lnTo>
-                  <a:lnTo>
-                    <a:pt x="3169346" y="607023"/>
-                  </a:lnTo>
-                  <a:lnTo>
-                    <a:pt x="3169346" y="511503"/>
-                  </a:lnTo>
-                  <a:lnTo>
-                    <a:pt x="3336154" y="511503"/>
-                  </a:lnTo>
-                  <a:lnTo>
-                    <a:pt x="3336154" y="478972"/>
-                  </a:lnTo>
-                  <a:lnTo>
-                    <a:pt x="3419557" y="478972"/>
-                  </a:lnTo>
-                  <a:lnTo>
-                    <a:pt x="3419557" y="446439"/>
-                  </a:lnTo>
-                  <a:lnTo>
-                    <a:pt x="4253596" y="446439"/>
-                  </a:lnTo>
-                  <a:lnTo>
-                    <a:pt x="4253596" y="413981"/>
-                  </a:lnTo>
-                  <a:lnTo>
-                    <a:pt x="4587211" y="413981"/>
-                  </a:lnTo>
-                  <a:lnTo>
-                    <a:pt x="4587211" y="381005"/>
-                  </a:lnTo>
-                  <a:lnTo>
-                    <a:pt x="4670615" y="381005"/>
-                  </a:lnTo>
-                  <a:lnTo>
-                    <a:pt x="4670615" y="347983"/>
-                  </a:lnTo>
-                  <a:lnTo>
-                    <a:pt x="4920827" y="347983"/>
-                  </a:lnTo>
-                  <a:lnTo>
-                    <a:pt x="4920827" y="248107"/>
-                  </a:lnTo>
-                  <a:lnTo>
-                    <a:pt x="5004231" y="248107"/>
-                  </a:lnTo>
-                  <a:lnTo>
-                    <a:pt x="5004231" y="213347"/>
-                  </a:lnTo>
-                  <a:lnTo>
-                    <a:pt x="5671461" y="213347"/>
-                  </a:lnTo>
-                  <a:lnTo>
-                    <a:pt x="5671461" y="178291"/>
-                  </a:lnTo>
-                  <a:lnTo>
-                    <a:pt x="6338692" y="178291"/>
-                  </a:lnTo>
-                  <a:lnTo>
-                    <a:pt x="6338692" y="142704"/>
-                  </a:lnTo>
-                  <a:lnTo>
-                    <a:pt x="6672308" y="142704"/>
-                  </a:lnTo>
-                  <a:lnTo>
-                    <a:pt x="6672308" y="35957"/>
-                  </a:lnTo>
-                  <a:lnTo>
-                    <a:pt x="7005923" y="35957"/>
+                    <a:pt x="0" y="0"/>
+                  </a:lnTo>
+                  <a:lnTo>
+                    <a:pt x="0" y="0"/>
+                  </a:lnTo>
+                </a:path>
+              </a:pathLst>
+            </a:custGeom>
+            <a:ln w="13550" cap="flat">
+              <a:solidFill>
+                <a:srgbClr val="EBEBEB">
+                  <a:alpha val="100000"/>
+                </a:srgbClr>
+              </a:solidFill>
+              <a:prstDash val="solid"/>
+              <a:round/>
+            </a:ln>
+          </p:spPr>
+          <p:txBody>
+            <a:bodyPr/>
+            <a:lstStyle/>
+            <a:p/>
+          </p:txBody>
+        </p:sp>
+        <p:sp>
+          <p:nvSpPr>
+            <p:cNvPr id="20" name="pl20"/>
+            <p:cNvSpPr/>
+            <p:nvPr/>
+          </p:nvSpPr>
+          <p:spPr>
+            <a:xfrm>
+              <a:off x="3012472" y="2583293"/>
+              <a:ext cx="0" cy="3139848"/>
+            </a:xfrm>
+            <a:custGeom>
+              <a:avLst/>
+              <a:pathLst>
+                <a:path w="0" h="3139848">
+                  <a:moveTo>
+                    <a:pt x="0" y="3139848"/>
+                  </a:moveTo>
+                  <a:lnTo>
+                    <a:pt x="0" y="0"/>
+                  </a:lnTo>
+                  <a:lnTo>
+                    <a:pt x="0" y="0"/>
+                  </a:lnTo>
+                </a:path>
+              </a:pathLst>
+            </a:custGeom>
+            <a:ln w="13550" cap="flat">
+              <a:solidFill>
+                <a:srgbClr val="EBEBEB">
+                  <a:alpha val="100000"/>
+                </a:srgbClr>
+              </a:solidFill>
+              <a:prstDash val="solid"/>
+              <a:round/>
+            </a:ln>
+          </p:spPr>
+          <p:txBody>
+            <a:bodyPr/>
+            <a:lstStyle/>
+            <a:p/>
+          </p:txBody>
+        </p:sp>
+        <p:sp>
+          <p:nvSpPr>
+            <p:cNvPr id="21" name="pl21"/>
+            <p:cNvSpPr/>
+            <p:nvPr/>
+          </p:nvSpPr>
+          <p:spPr>
+            <a:xfrm>
+              <a:off x="5097568" y="2583293"/>
+              <a:ext cx="0" cy="3139848"/>
+            </a:xfrm>
+            <a:custGeom>
+              <a:avLst/>
+              <a:pathLst>
+                <a:path w="0" h="3139848">
+                  <a:moveTo>
+                    <a:pt x="0" y="3139848"/>
+                  </a:moveTo>
+                  <a:lnTo>
+                    <a:pt x="0" y="0"/>
+                  </a:lnTo>
+                  <a:lnTo>
+                    <a:pt x="0" y="0"/>
+                  </a:lnTo>
+                </a:path>
+              </a:pathLst>
+            </a:custGeom>
+            <a:ln w="13550" cap="flat">
+              <a:solidFill>
+                <a:srgbClr val="EBEBEB">
+                  <a:alpha val="100000"/>
+                </a:srgbClr>
+              </a:solidFill>
+              <a:prstDash val="solid"/>
+              <a:round/>
+            </a:ln>
+          </p:spPr>
+          <p:txBody>
+            <a:bodyPr/>
+            <a:lstStyle/>
+            <a:p/>
+          </p:txBody>
+        </p:sp>
+        <p:sp>
+          <p:nvSpPr>
+            <p:cNvPr id="22" name="pl22"/>
+            <p:cNvSpPr/>
+            <p:nvPr/>
+          </p:nvSpPr>
+          <p:spPr>
+            <a:xfrm>
+              <a:off x="7182664" y="2583293"/>
+              <a:ext cx="0" cy="3139848"/>
+            </a:xfrm>
+            <a:custGeom>
+              <a:avLst/>
+              <a:pathLst>
+                <a:path w="0" h="3139848">
+                  <a:moveTo>
+                    <a:pt x="0" y="3139848"/>
+                  </a:moveTo>
+                  <a:lnTo>
+                    <a:pt x="0" y="0"/>
+                  </a:lnTo>
+                  <a:lnTo>
+                    <a:pt x="0" y="0"/>
+                  </a:lnTo>
+                </a:path>
+              </a:pathLst>
+            </a:custGeom>
+            <a:ln w="13550" cap="flat">
+              <a:solidFill>
+                <a:srgbClr val="EBEBEB">
+                  <a:alpha val="100000"/>
+                </a:srgbClr>
+              </a:solidFill>
+              <a:prstDash val="solid"/>
+              <a:round/>
+            </a:ln>
+          </p:spPr>
+          <p:txBody>
+            <a:bodyPr/>
+            <a:lstStyle/>
+            <a:p/>
+          </p:txBody>
+        </p:sp>
+        <p:sp>
+          <p:nvSpPr>
+            <p:cNvPr id="23" name="pl23"/>
+            <p:cNvSpPr/>
+            <p:nvPr/>
+          </p:nvSpPr>
+          <p:spPr>
+            <a:xfrm>
+              <a:off x="1260991" y="3546274"/>
+              <a:ext cx="7005923" cy="1995917"/>
+            </a:xfrm>
+            <a:custGeom>
+              <a:avLst/>
+              <a:pathLst>
+                <a:path w="7005923" h="1995917">
+                  <a:moveTo>
+                    <a:pt x="0" y="1995917"/>
+                  </a:moveTo>
+                  <a:lnTo>
+                    <a:pt x="166807" y="1995917"/>
+                  </a:lnTo>
+                  <a:lnTo>
+                    <a:pt x="166807" y="1957335"/>
+                  </a:lnTo>
+                  <a:lnTo>
+                    <a:pt x="250211" y="1957335"/>
+                  </a:lnTo>
+                  <a:lnTo>
+                    <a:pt x="250211" y="1734059"/>
+                  </a:lnTo>
+                  <a:lnTo>
+                    <a:pt x="333615" y="1734059"/>
+                  </a:lnTo>
+                  <a:lnTo>
+                    <a:pt x="333615" y="1694089"/>
+                  </a:lnTo>
+                  <a:lnTo>
+                    <a:pt x="417019" y="1694089"/>
+                  </a:lnTo>
+                  <a:lnTo>
+                    <a:pt x="417019" y="1654590"/>
+                  </a:lnTo>
+                  <a:lnTo>
+                    <a:pt x="583826" y="1654590"/>
+                  </a:lnTo>
+                  <a:lnTo>
+                    <a:pt x="583826" y="1460554"/>
+                  </a:lnTo>
+                  <a:lnTo>
+                    <a:pt x="667230" y="1460554"/>
+                  </a:lnTo>
+                  <a:lnTo>
+                    <a:pt x="667230" y="1416535"/>
+                  </a:lnTo>
+                  <a:lnTo>
+                    <a:pt x="750634" y="1416535"/>
+                  </a:lnTo>
+                  <a:lnTo>
+                    <a:pt x="750634" y="1326937"/>
+                  </a:lnTo>
+                  <a:lnTo>
+                    <a:pt x="1084250" y="1326937"/>
+                  </a:lnTo>
+                  <a:lnTo>
+                    <a:pt x="1084250" y="1280356"/>
+                  </a:lnTo>
+                  <a:lnTo>
+                    <a:pt x="1167653" y="1280356"/>
+                  </a:lnTo>
+                  <a:lnTo>
+                    <a:pt x="1167653" y="1234513"/>
+                  </a:lnTo>
+                  <a:lnTo>
+                    <a:pt x="1417865" y="1234513"/>
+                  </a:lnTo>
+                  <a:lnTo>
+                    <a:pt x="1417865" y="1189129"/>
+                  </a:lnTo>
+                  <a:lnTo>
+                    <a:pt x="1501269" y="1189129"/>
+                  </a:lnTo>
+                  <a:lnTo>
+                    <a:pt x="1501269" y="1143356"/>
+                  </a:lnTo>
+                  <a:lnTo>
+                    <a:pt x="2001692" y="1143356"/>
+                  </a:lnTo>
+                  <a:lnTo>
+                    <a:pt x="2001692" y="1095159"/>
+                  </a:lnTo>
+                  <a:lnTo>
+                    <a:pt x="2168500" y="1095159"/>
+                  </a:lnTo>
+                  <a:lnTo>
+                    <a:pt x="2168500" y="999981"/>
+                  </a:lnTo>
+                  <a:lnTo>
+                    <a:pt x="2502115" y="999981"/>
+                  </a:lnTo>
+                  <a:lnTo>
+                    <a:pt x="2502115" y="953102"/>
+                  </a:lnTo>
+                  <a:lnTo>
+                    <a:pt x="2585519" y="953102"/>
+                  </a:lnTo>
+                  <a:lnTo>
+                    <a:pt x="2585519" y="905948"/>
+                  </a:lnTo>
+                  <a:lnTo>
+                    <a:pt x="3085942" y="905948"/>
+                  </a:lnTo>
+                  <a:lnTo>
+                    <a:pt x="3085942" y="812837"/>
+                  </a:lnTo>
+                  <a:lnTo>
+                    <a:pt x="3169346" y="812837"/>
+                  </a:lnTo>
+                  <a:lnTo>
+                    <a:pt x="3169346" y="675142"/>
+                  </a:lnTo>
+                  <a:lnTo>
+                    <a:pt x="3336154" y="675142"/>
+                  </a:lnTo>
+                  <a:lnTo>
+                    <a:pt x="3336154" y="628097"/>
+                  </a:lnTo>
+                  <a:lnTo>
+                    <a:pt x="3419557" y="628097"/>
+                  </a:lnTo>
+                  <a:lnTo>
+                    <a:pt x="3419557" y="581547"/>
+                  </a:lnTo>
+                  <a:lnTo>
+                    <a:pt x="4253596" y="581547"/>
+                  </a:lnTo>
+                  <a:lnTo>
+                    <a:pt x="4253596" y="535463"/>
+                  </a:lnTo>
+                  <a:lnTo>
+                    <a:pt x="4587211" y="535463"/>
+                  </a:lnTo>
+                  <a:lnTo>
+                    <a:pt x="4587211" y="489991"/>
+                  </a:lnTo>
+                  <a:lnTo>
+                    <a:pt x="4670615" y="489991"/>
+                  </a:lnTo>
+                  <a:lnTo>
+                    <a:pt x="4670615" y="445087"/>
+                  </a:lnTo>
+                  <a:lnTo>
+                    <a:pt x="4920827" y="445087"/>
+                  </a:lnTo>
+                  <a:lnTo>
+                    <a:pt x="4920827" y="314365"/>
+                  </a:lnTo>
+                  <a:lnTo>
+                    <a:pt x="5004231" y="314365"/>
+                  </a:lnTo>
+                  <a:lnTo>
+                    <a:pt x="5004231" y="268937"/>
+                  </a:lnTo>
+                  <a:lnTo>
+                    <a:pt x="5671461" y="268937"/>
+                  </a:lnTo>
+                  <a:lnTo>
+                    <a:pt x="5671461" y="223962"/>
+                  </a:lnTo>
+                  <a:lnTo>
+                    <a:pt x="6338692" y="223962"/>
+                  </a:lnTo>
+                  <a:lnTo>
+                    <a:pt x="6338692" y="179163"/>
+                  </a:lnTo>
+                  <a:lnTo>
+                    <a:pt x="6672308" y="179163"/>
+                  </a:lnTo>
+                  <a:lnTo>
+                    <a:pt x="6672308" y="44493"/>
+                  </a:lnTo>
+                  <a:lnTo>
+                    <a:pt x="7005923" y="44493"/>
                   </a:lnTo>
                   <a:lnTo>
                     <a:pt x="7005923" y="0"/>
@@ -3115,186 +3287,186 @@
         </p:sp>
         <p:sp>
           <p:nvSpPr>
-            <p:cNvPr id="20" name="pl20"/>
+            <p:cNvPr id="24" name="pl24"/>
             <p:cNvSpPr/>
             <p:nvPr/>
           </p:nvSpPr>
           <p:spPr>
             <a:xfrm>
               <a:off x="1260991" y="2861938"/>
-              <a:ext cx="7005923" cy="2655257"/>
+              <a:ext cx="7005923" cy="2657363"/>
             </a:xfrm>
             <a:custGeom>
               <a:avLst/>
               <a:pathLst>
-                <a:path w="7005923" h="2655257">
+                <a:path w="7005923" h="2657363">
                   <a:moveTo>
-                    <a:pt x="0" y="2655257"/>
+                    <a:pt x="0" y="2657363"/>
                   </a:moveTo>
                   <a:lnTo>
-                    <a:pt x="166807" y="2655257"/>
-                  </a:lnTo>
-                  <a:lnTo>
-                    <a:pt x="166807" y="2592458"/>
-                  </a:lnTo>
-                  <a:lnTo>
-                    <a:pt x="250211" y="2592458"/>
-                  </a:lnTo>
-                  <a:lnTo>
-                    <a:pt x="250211" y="2226173"/>
-                  </a:lnTo>
-                  <a:lnTo>
-                    <a:pt x="333615" y="2226173"/>
-                  </a:lnTo>
-                  <a:lnTo>
-                    <a:pt x="333615" y="2164740"/>
-                  </a:lnTo>
-                  <a:lnTo>
-                    <a:pt x="417019" y="2164740"/>
-                  </a:lnTo>
-                  <a:lnTo>
-                    <a:pt x="417019" y="2103865"/>
-                  </a:lnTo>
-                  <a:lnTo>
-                    <a:pt x="583826" y="2103865"/>
-                  </a:lnTo>
-                  <a:lnTo>
-                    <a:pt x="583826" y="1807424"/>
-                  </a:lnTo>
-                  <a:lnTo>
-                    <a:pt x="667230" y="1807424"/>
-                  </a:lnTo>
-                  <a:lnTo>
-                    <a:pt x="667230" y="1747724"/>
-                  </a:lnTo>
-                  <a:lnTo>
-                    <a:pt x="750634" y="1747724"/>
-                  </a:lnTo>
-                  <a:lnTo>
-                    <a:pt x="750634" y="1628189"/>
-                  </a:lnTo>
-                  <a:lnTo>
-                    <a:pt x="1084250" y="1628189"/>
-                  </a:lnTo>
-                  <a:lnTo>
-                    <a:pt x="1084250" y="1567641"/>
-                  </a:lnTo>
-                  <a:lnTo>
-                    <a:pt x="1167653" y="1567641"/>
-                  </a:lnTo>
-                  <a:lnTo>
-                    <a:pt x="1167653" y="1507754"/>
-                  </a:lnTo>
-                  <a:lnTo>
-                    <a:pt x="1417865" y="1507754"/>
-                  </a:lnTo>
-                  <a:lnTo>
-                    <a:pt x="1417865" y="1448517"/>
-                  </a:lnTo>
-                  <a:lnTo>
-                    <a:pt x="1501269" y="1448517"/>
-                  </a:lnTo>
-                  <a:lnTo>
-                    <a:pt x="1501269" y="1389488"/>
-                  </a:lnTo>
-                  <a:lnTo>
-                    <a:pt x="2001692" y="1389488"/>
-                  </a:lnTo>
-                  <a:lnTo>
-                    <a:pt x="2001692" y="1330477"/>
-                  </a:lnTo>
-                  <a:lnTo>
-                    <a:pt x="2168500" y="1330477"/>
-                  </a:lnTo>
-                  <a:lnTo>
-                    <a:pt x="2168500" y="1214587"/>
-                  </a:lnTo>
-                  <a:lnTo>
-                    <a:pt x="2502115" y="1214587"/>
-                  </a:lnTo>
-                  <a:lnTo>
-                    <a:pt x="2502115" y="1156478"/>
-                  </a:lnTo>
-                  <a:lnTo>
-                    <a:pt x="2585519" y="1156478"/>
-                  </a:lnTo>
-                  <a:lnTo>
-                    <a:pt x="2585519" y="1098320"/>
-                  </a:lnTo>
-                  <a:lnTo>
-                    <a:pt x="3085942" y="1098320"/>
-                  </a:lnTo>
-                  <a:lnTo>
-                    <a:pt x="3085942" y="983099"/>
-                  </a:lnTo>
-                  <a:lnTo>
-                    <a:pt x="3169346" y="983099"/>
-                  </a:lnTo>
-                  <a:lnTo>
-                    <a:pt x="3169346" y="814789"/>
-                  </a:lnTo>
-                  <a:lnTo>
-                    <a:pt x="3336154" y="814789"/>
-                  </a:lnTo>
-                  <a:lnTo>
-                    <a:pt x="3336154" y="758649"/>
-                  </a:lnTo>
-                  <a:lnTo>
-                    <a:pt x="3419557" y="758649"/>
-                  </a:lnTo>
-                  <a:lnTo>
-                    <a:pt x="3419557" y="703102"/>
-                  </a:lnTo>
-                  <a:lnTo>
-                    <a:pt x="4253596" y="703102"/>
-                  </a:lnTo>
-                  <a:lnTo>
-                    <a:pt x="4253596" y="648274"/>
-                  </a:lnTo>
-                  <a:lnTo>
-                    <a:pt x="4587211" y="648274"/>
-                  </a:lnTo>
-                  <a:lnTo>
-                    <a:pt x="4587211" y="593177"/>
-                  </a:lnTo>
-                  <a:lnTo>
-                    <a:pt x="4670615" y="593177"/>
-                  </a:lnTo>
-                  <a:lnTo>
-                    <a:pt x="4670615" y="538609"/>
-                  </a:lnTo>
-                  <a:lnTo>
-                    <a:pt x="4920827" y="538609"/>
-                  </a:lnTo>
-                  <a:lnTo>
-                    <a:pt x="4920827" y="377248"/>
-                  </a:lnTo>
-                  <a:lnTo>
-                    <a:pt x="5004231" y="377248"/>
-                  </a:lnTo>
-                  <a:lnTo>
-                    <a:pt x="5004231" y="322378"/>
-                  </a:lnTo>
-                  <a:lnTo>
-                    <a:pt x="5671461" y="322378"/>
-                  </a:lnTo>
-                  <a:lnTo>
-                    <a:pt x="5671461" y="267711"/>
-                  </a:lnTo>
-                  <a:lnTo>
-                    <a:pt x="6338692" y="267711"/>
-                  </a:lnTo>
-                  <a:lnTo>
-                    <a:pt x="6338692" y="212902"/>
-                  </a:lnTo>
-                  <a:lnTo>
-                    <a:pt x="6672308" y="212902"/>
-                  </a:lnTo>
-                  <a:lnTo>
-                    <a:pt x="6672308" y="52612"/>
-                  </a:lnTo>
-                  <a:lnTo>
-                    <a:pt x="7005923" y="52612"/>
+                    <a:pt x="166807" y="2657363"/>
+                  </a:lnTo>
+                  <a:lnTo>
+                    <a:pt x="166807" y="2596185"/>
+                  </a:lnTo>
+                  <a:lnTo>
+                    <a:pt x="250211" y="2596185"/>
+                  </a:lnTo>
+                  <a:lnTo>
+                    <a:pt x="250211" y="2251746"/>
+                  </a:lnTo>
+                  <a:lnTo>
+                    <a:pt x="333615" y="2251746"/>
+                  </a:lnTo>
+                  <a:lnTo>
+                    <a:pt x="333615" y="2191744"/>
+                  </a:lnTo>
+                  <a:lnTo>
+                    <a:pt x="417019" y="2191744"/>
+                  </a:lnTo>
+                  <a:lnTo>
+                    <a:pt x="417019" y="2132925"/>
+                  </a:lnTo>
+                  <a:lnTo>
+                    <a:pt x="583826" y="2132925"/>
+                  </a:lnTo>
+                  <a:lnTo>
+                    <a:pt x="583826" y="1850566"/>
+                  </a:lnTo>
+                  <a:lnTo>
+                    <a:pt x="667230" y="1850566"/>
+                  </a:lnTo>
+                  <a:lnTo>
+                    <a:pt x="667230" y="1787975"/>
+                  </a:lnTo>
+                  <a:lnTo>
+                    <a:pt x="750634" y="1787975"/>
+                  </a:lnTo>
+                  <a:lnTo>
+                    <a:pt x="750634" y="1662161"/>
+                  </a:lnTo>
+                  <a:lnTo>
+                    <a:pt x="1084250" y="1662161"/>
+                  </a:lnTo>
+                  <a:lnTo>
+                    <a:pt x="1084250" y="1597571"/>
+                  </a:lnTo>
+                  <a:lnTo>
+                    <a:pt x="1167653" y="1597571"/>
+                  </a:lnTo>
+                  <a:lnTo>
+                    <a:pt x="1167653" y="1534539"/>
+                  </a:lnTo>
+                  <a:lnTo>
+                    <a:pt x="1417865" y="1534539"/>
+                  </a:lnTo>
+                  <a:lnTo>
+                    <a:pt x="1417865" y="1472645"/>
+                  </a:lnTo>
+                  <a:lnTo>
+                    <a:pt x="1501269" y="1472645"/>
+                  </a:lnTo>
+                  <a:lnTo>
+                    <a:pt x="1501269" y="1410724"/>
+                  </a:lnTo>
+                  <a:lnTo>
+                    <a:pt x="2001692" y="1410724"/>
+                  </a:lnTo>
+                  <a:lnTo>
+                    <a:pt x="2001692" y="1346056"/>
+                  </a:lnTo>
+                  <a:lnTo>
+                    <a:pt x="2168500" y="1346056"/>
+                  </a:lnTo>
+                  <a:lnTo>
+                    <a:pt x="2168500" y="1219910"/>
+                  </a:lnTo>
+                  <a:lnTo>
+                    <a:pt x="2502115" y="1219910"/>
+                  </a:lnTo>
+                  <a:lnTo>
+                    <a:pt x="2502115" y="1158516"/>
+                  </a:lnTo>
+                  <a:lnTo>
+                    <a:pt x="2585519" y="1158516"/>
+                  </a:lnTo>
+                  <a:lnTo>
+                    <a:pt x="2585519" y="1097238"/>
+                  </a:lnTo>
+                  <a:lnTo>
+                    <a:pt x="3085942" y="1097238"/>
+                  </a:lnTo>
+                  <a:lnTo>
+                    <a:pt x="3085942" y="977600"/>
+                  </a:lnTo>
+                  <a:lnTo>
+                    <a:pt x="3169346" y="977600"/>
+                  </a:lnTo>
+                  <a:lnTo>
+                    <a:pt x="3169346" y="803848"/>
+                  </a:lnTo>
+                  <a:lnTo>
+                    <a:pt x="3336154" y="803848"/>
+                  </a:lnTo>
+                  <a:lnTo>
+                    <a:pt x="3336154" y="745316"/>
+                  </a:lnTo>
+                  <a:lnTo>
+                    <a:pt x="3419557" y="745316"/>
+                  </a:lnTo>
+                  <a:lnTo>
+                    <a:pt x="3419557" y="687801"/>
+                  </a:lnTo>
+                  <a:lnTo>
+                    <a:pt x="4253596" y="687801"/>
+                  </a:lnTo>
+                  <a:lnTo>
+                    <a:pt x="4253596" y="631246"/>
+                  </a:lnTo>
+                  <a:lnTo>
+                    <a:pt x="4587211" y="631246"/>
+                  </a:lnTo>
+                  <a:lnTo>
+                    <a:pt x="4587211" y="575812"/>
+                  </a:lnTo>
+                  <a:lnTo>
+                    <a:pt x="4670615" y="575812"/>
+                  </a:lnTo>
+                  <a:lnTo>
+                    <a:pt x="4670615" y="521423"/>
+                  </a:lnTo>
+                  <a:lnTo>
+                    <a:pt x="4920827" y="521423"/>
+                  </a:lnTo>
+                  <a:lnTo>
+                    <a:pt x="4920827" y="365021"/>
+                  </a:lnTo>
+                  <a:lnTo>
+                    <a:pt x="5004231" y="365021"/>
+                  </a:lnTo>
+                  <a:lnTo>
+                    <a:pt x="5004231" y="311324"/>
+                  </a:lnTo>
+                  <a:lnTo>
+                    <a:pt x="5671461" y="311324"/>
+                  </a:lnTo>
+                  <a:lnTo>
+                    <a:pt x="5671461" y="258486"/>
+                  </a:lnTo>
+                  <a:lnTo>
+                    <a:pt x="6338692" y="258486"/>
+                  </a:lnTo>
+                  <a:lnTo>
+                    <a:pt x="6338692" y="206171"/>
+                  </a:lnTo>
+                  <a:lnTo>
+                    <a:pt x="6672308" y="206171"/>
+                  </a:lnTo>
+                  <a:lnTo>
+                    <a:pt x="6672308" y="50753"/>
+                  </a:lnTo>
+                  <a:lnTo>
+                    <a:pt x="7005923" y="50753"/>
                   </a:lnTo>
                   <a:lnTo>
                     <a:pt x="7005923" y="0"/>
@@ -3320,7 +3492,7 @@
         </p:sp>
         <p:sp>
           <p:nvSpPr>
-            <p:cNvPr id="21" name="tx21"/>
+            <p:cNvPr id="25" name="tx25"/>
             <p:cNvSpPr/>
             <p:nvPr/>
           </p:nvSpPr>
@@ -3366,13 +3538,59 @@
         </p:sp>
         <p:sp>
           <p:nvSpPr>
-            <p:cNvPr id="22" name="tx22"/>
+            <p:cNvPr id="26" name="tx26"/>
             <p:cNvSpPr/>
             <p:nvPr/>
           </p:nvSpPr>
           <p:spPr>
             <a:xfrm>
-              <a:off x="692708" y="4541406"/>
+              <a:off x="692708" y="4947804"/>
+              <a:ext cx="155356" cy="80101"/>
+            </a:xfrm>
+            <a:prstGeom prst="rect">
+              <a:avLst/>
+            </a:prstGeom>
+            <a:noFill/>
+          </p:spPr>
+          <p:txBody>
+            <a:bodyPr lIns="0" rIns="0" tIns="0" bIns="0" anchorCtr="1" anchor="ctr" wrap="none"/>
+            <a:lstStyle/>
+            <a:p>
+              <a:pPr algn="l" marL="0" marR="0" indent="0">
+                <a:lnSpc>
+                  <a:spcPts val="880"/>
+                </a:lnSpc>
+                <a:spcBef>
+                  <a:spcPts val="0"/>
+                </a:spcBef>
+                <a:spcAft>
+                  <a:spcPts val="0"/>
+                </a:spcAft>
+              </a:pPr>
+              <a:r>
+                <a:rPr sz="880">
+                  <a:solidFill>
+                    <a:srgbClr val="4D4D4D">
+                      <a:alpha val="100000"/>
+                    </a:srgbClr>
+                  </a:solidFill>
+                  <a:latin typeface="Helvetica"/>
+                  <a:cs typeface="Helvetica"/>
+                </a:rPr>
+                <a:t>0.1</a:t>
+              </a:r>
+            </a:p>
+          </p:txBody>
+        </p:sp>
+        <p:sp>
+          <p:nvSpPr>
+            <p:cNvPr id="27" name="tx27"/>
+            <p:cNvSpPr/>
+            <p:nvPr/>
+          </p:nvSpPr>
+          <p:spPr>
+            <a:xfrm>
+              <a:off x="692708" y="4355238"/>
               <a:ext cx="155356" cy="80101"/>
             </a:xfrm>
             <a:prstGeom prst="rect">
@@ -3412,13 +3630,59 @@
         </p:sp>
         <p:sp>
           <p:nvSpPr>
-            <p:cNvPr id="23" name="tx23"/>
+            <p:cNvPr id="28" name="tx28"/>
             <p:cNvSpPr/>
             <p:nvPr/>
           </p:nvSpPr>
           <p:spPr>
             <a:xfrm>
-              <a:off x="692708" y="3542441"/>
+              <a:off x="692708" y="3762671"/>
+              <a:ext cx="155356" cy="80101"/>
+            </a:xfrm>
+            <a:prstGeom prst="rect">
+              <a:avLst/>
+            </a:prstGeom>
+            <a:noFill/>
+          </p:spPr>
+          <p:txBody>
+            <a:bodyPr lIns="0" rIns="0" tIns="0" bIns="0" anchorCtr="1" anchor="ctr" wrap="none"/>
+            <a:lstStyle/>
+            <a:p>
+              <a:pPr algn="l" marL="0" marR="0" indent="0">
+                <a:lnSpc>
+                  <a:spcPts val="880"/>
+                </a:lnSpc>
+                <a:spcBef>
+                  <a:spcPts val="0"/>
+                </a:spcBef>
+                <a:spcAft>
+                  <a:spcPts val="0"/>
+                </a:spcAft>
+              </a:pPr>
+              <a:r>
+                <a:rPr sz="880">
+                  <a:solidFill>
+                    <a:srgbClr val="4D4D4D">
+                      <a:alpha val="100000"/>
+                    </a:srgbClr>
+                  </a:solidFill>
+                  <a:latin typeface="Helvetica"/>
+                  <a:cs typeface="Helvetica"/>
+                </a:rPr>
+                <a:t>0.3</a:t>
+              </a:r>
+            </a:p>
+          </p:txBody>
+        </p:sp>
+        <p:sp>
+          <p:nvSpPr>
+            <p:cNvPr id="29" name="tx29"/>
+            <p:cNvSpPr/>
+            <p:nvPr/>
+          </p:nvSpPr>
+          <p:spPr>
+            <a:xfrm>
+              <a:off x="692708" y="3170104"/>
               <a:ext cx="155356" cy="80101"/>
             </a:xfrm>
             <a:prstGeom prst="rect">
@@ -3458,13 +3722,13 @@
         </p:sp>
         <p:sp>
           <p:nvSpPr>
-            <p:cNvPr id="24" name="tx24"/>
+            <p:cNvPr id="30" name="tx30"/>
             <p:cNvSpPr/>
             <p:nvPr/>
           </p:nvSpPr>
           <p:spPr>
             <a:xfrm>
-              <a:off x="692708" y="2543476"/>
+              <a:off x="692708" y="2577537"/>
               <a:ext cx="155356" cy="80101"/>
             </a:xfrm>
             <a:prstGeom prst="rect">
@@ -3497,14 +3761,14 @@
                   <a:latin typeface="Helvetica"/>
                   <a:cs typeface="Helvetica"/>
                 </a:rPr>
-                <a:t>0.6</a:t>
+                <a:t>0.5</a:t>
               </a:r>
             </a:p>
           </p:txBody>
         </p:sp>
         <p:sp>
           <p:nvSpPr>
-            <p:cNvPr id="25" name="tx25"/>
+            <p:cNvPr id="31" name="tx31"/>
             <p:cNvSpPr/>
             <p:nvPr/>
           </p:nvSpPr>
@@ -3550,7 +3814,7 @@
         </p:sp>
         <p:sp>
           <p:nvSpPr>
-            <p:cNvPr id="26" name="tx26"/>
+            <p:cNvPr id="32" name="tx32"/>
             <p:cNvSpPr/>
             <p:nvPr/>
           </p:nvSpPr>
@@ -3596,7 +3860,7 @@
         </p:sp>
         <p:sp>
           <p:nvSpPr>
-            <p:cNvPr id="27" name="tx27"/>
+            <p:cNvPr id="33" name="tx33"/>
             <p:cNvSpPr/>
             <p:nvPr/>
           </p:nvSpPr>
@@ -3642,7 +3906,7 @@
         </p:sp>
         <p:sp>
           <p:nvSpPr>
-            <p:cNvPr id="28" name="tx28"/>
+            <p:cNvPr id="34" name="tx34"/>
             <p:cNvSpPr/>
             <p:nvPr/>
           </p:nvSpPr>
@@ -3688,7 +3952,7 @@
         </p:sp>
         <p:sp>
           <p:nvSpPr>
-            <p:cNvPr id="29" name="tx29"/>
+            <p:cNvPr id="35" name="tx35"/>
             <p:cNvSpPr/>
             <p:nvPr/>
           </p:nvSpPr>
@@ -3734,7 +3998,7 @@
         </p:sp>
         <p:sp>
           <p:nvSpPr>
-            <p:cNvPr id="30" name="tx30"/>
+            <p:cNvPr id="36" name="tx36"/>
             <p:cNvSpPr/>
             <p:nvPr/>
           </p:nvSpPr>
@@ -3780,7 +4044,7 @@
         </p:sp>
         <p:sp>
           <p:nvSpPr>
-            <p:cNvPr id="31" name="pl31"/>
+            <p:cNvPr id="37" name="pl37"/>
             <p:cNvSpPr/>
             <p:nvPr/>
           </p:nvSpPr>
@@ -3820,7 +4084,7 @@
         </p:sp>
         <p:sp>
           <p:nvSpPr>
-            <p:cNvPr id="32" name="pl32"/>
+            <p:cNvPr id="38" name="pl38"/>
             <p:cNvSpPr/>
             <p:nvPr/>
           </p:nvSpPr>
@@ -3860,7 +4124,7 @@
         </p:sp>
         <p:sp>
           <p:nvSpPr>
-            <p:cNvPr id="33" name="tx33"/>
+            <p:cNvPr id="39" name="tx39"/>
             <p:cNvSpPr/>
             <p:nvPr/>
           </p:nvSpPr>
@@ -3906,7 +4170,7 @@
         </p:sp>
         <p:sp>
           <p:nvSpPr>
-            <p:cNvPr id="34" name="tx34"/>
+            <p:cNvPr id="40" name="tx40"/>
             <p:cNvSpPr/>
             <p:nvPr/>
           </p:nvSpPr>
@@ -3952,7 +4216,7 @@
         </p:sp>
         <p:sp>
           <p:nvSpPr>
-            <p:cNvPr id="35" name="tx35"/>
+            <p:cNvPr id="41" name="tx41"/>
             <p:cNvSpPr/>
             <p:nvPr/>
           </p:nvSpPr>
@@ -3991,14 +4255,14 @@
                   <a:latin typeface="Helvetica"/>
                   <a:cs typeface="Helvetica"/>
                 </a:rPr>
-                <a:t>Discrep &gt;= +25 vs &lt;+25: subHR = 2.30 (95% CI 1.19-4.45), p = 0.014</a:t>
+                <a:t>Discrep &gt;= +25 vs &lt;+25: subHR = 1.61 (95% CI 0.78-3.29), p = 0.197</a:t>
               </a:r>
             </a:p>
           </p:txBody>
         </p:sp>
         <p:sp>
           <p:nvSpPr>
-            <p:cNvPr id="36" name="tx36"/>
+            <p:cNvPr id="42" name="tx42"/>
             <p:cNvSpPr/>
             <p:nvPr/>
           </p:nvSpPr>

--- a/docs/plots/carbo/jx_carbo_adjcif_grade2.pptx
+++ b/docs/plots/carbo/jx_carbo_adjcif_grade2.pptx
@@ -2271,26 +2271,26 @@
           </p:nvSpPr>
           <p:spPr>
             <a:xfrm>
-              <a:off x="910695" y="5284138"/>
-              <a:ext cx="7706515" cy="0"/>
+              <a:off x="1034151" y="5217571"/>
+              <a:ext cx="7564080" cy="0"/>
             </a:xfrm>
             <a:custGeom>
               <a:avLst/>
               <a:pathLst>
-                <a:path w="7706515" h="0">
+                <a:path w="7564080" h="0">
                   <a:moveTo>
                     <a:pt x="0" y="0"/>
                   </a:moveTo>
                   <a:lnTo>
-                    <a:pt x="7706515" y="0"/>
-                  </a:lnTo>
-                  <a:lnTo>
-                    <a:pt x="7706515" y="0"/>
+                    <a:pt x="7564080" y="0"/>
+                  </a:lnTo>
+                  <a:lnTo>
+                    <a:pt x="7564080" y="0"/>
                   </a:lnTo>
                 </a:path>
               </a:pathLst>
             </a:custGeom>
-            <a:ln w="6775" cap="flat">
+            <a:ln w="8623" cap="flat">
               <a:solidFill>
                 <a:srgbClr val="EBEBEB">
                   <a:alpha val="100000"/>
@@ -2314,26 +2314,26 @@
           </p:nvSpPr>
           <p:spPr>
             <a:xfrm>
-              <a:off x="910695" y="4691572"/>
-              <a:ext cx="7706515" cy="0"/>
+              <a:off x="1034151" y="4683402"/>
+              <a:ext cx="7564080" cy="0"/>
             </a:xfrm>
             <a:custGeom>
               <a:avLst/>
               <a:pathLst>
-                <a:path w="7706515" h="0">
+                <a:path w="7564080" h="0">
                   <a:moveTo>
                     <a:pt x="0" y="0"/>
                   </a:moveTo>
                   <a:lnTo>
-                    <a:pt x="7706515" y="0"/>
-                  </a:lnTo>
-                  <a:lnTo>
-                    <a:pt x="7706515" y="0"/>
+                    <a:pt x="7564080" y="0"/>
+                  </a:lnTo>
+                  <a:lnTo>
+                    <a:pt x="7564080" y="0"/>
                   </a:lnTo>
                 </a:path>
               </a:pathLst>
             </a:custGeom>
-            <a:ln w="6775" cap="flat">
+            <a:ln w="8623" cap="flat">
               <a:solidFill>
                 <a:srgbClr val="EBEBEB">
                   <a:alpha val="100000"/>
@@ -2357,26 +2357,26 @@
           </p:nvSpPr>
           <p:spPr>
             <a:xfrm>
-              <a:off x="910695" y="4099005"/>
-              <a:ext cx="7706515" cy="0"/>
+              <a:off x="1034151" y="4149233"/>
+              <a:ext cx="7564080" cy="0"/>
             </a:xfrm>
             <a:custGeom>
               <a:avLst/>
               <a:pathLst>
-                <a:path w="7706515" h="0">
+                <a:path w="7564080" h="0">
                   <a:moveTo>
                     <a:pt x="0" y="0"/>
                   </a:moveTo>
                   <a:lnTo>
-                    <a:pt x="7706515" y="0"/>
-                  </a:lnTo>
-                  <a:lnTo>
-                    <a:pt x="7706515" y="0"/>
+                    <a:pt x="7564080" y="0"/>
+                  </a:lnTo>
+                  <a:lnTo>
+                    <a:pt x="7564080" y="0"/>
                   </a:lnTo>
                 </a:path>
               </a:pathLst>
             </a:custGeom>
-            <a:ln w="6775" cap="flat">
+            <a:ln w="8623" cap="flat">
               <a:solidFill>
                 <a:srgbClr val="EBEBEB">
                   <a:alpha val="100000"/>
@@ -2400,26 +2400,26 @@
           </p:nvSpPr>
           <p:spPr>
             <a:xfrm>
-              <a:off x="910695" y="3506438"/>
-              <a:ext cx="7706515" cy="0"/>
+              <a:off x="1034151" y="3615065"/>
+              <a:ext cx="7564080" cy="0"/>
             </a:xfrm>
             <a:custGeom>
               <a:avLst/>
               <a:pathLst>
-                <a:path w="7706515" h="0">
+                <a:path w="7564080" h="0">
                   <a:moveTo>
                     <a:pt x="0" y="0"/>
                   </a:moveTo>
                   <a:lnTo>
-                    <a:pt x="7706515" y="0"/>
-                  </a:lnTo>
-                  <a:lnTo>
-                    <a:pt x="7706515" y="0"/>
+                    <a:pt x="7564080" y="0"/>
+                  </a:lnTo>
+                  <a:lnTo>
+                    <a:pt x="7564080" y="0"/>
                   </a:lnTo>
                 </a:path>
               </a:pathLst>
             </a:custGeom>
-            <a:ln w="6775" cap="flat">
+            <a:ln w="8623" cap="flat">
               <a:solidFill>
                 <a:srgbClr val="EBEBEB">
                   <a:alpha val="100000"/>
@@ -2443,26 +2443,26 @@
           </p:nvSpPr>
           <p:spPr>
             <a:xfrm>
-              <a:off x="910695" y="2913872"/>
-              <a:ext cx="7706515" cy="0"/>
+              <a:off x="1034151" y="3080896"/>
+              <a:ext cx="7564080" cy="0"/>
             </a:xfrm>
             <a:custGeom>
               <a:avLst/>
               <a:pathLst>
-                <a:path w="7706515" h="0">
+                <a:path w="7564080" h="0">
                   <a:moveTo>
                     <a:pt x="0" y="0"/>
                   </a:moveTo>
                   <a:lnTo>
-                    <a:pt x="7706515" y="0"/>
-                  </a:lnTo>
-                  <a:lnTo>
-                    <a:pt x="7706515" y="0"/>
+                    <a:pt x="7564080" y="0"/>
+                  </a:lnTo>
+                  <a:lnTo>
+                    <a:pt x="7564080" y="0"/>
                   </a:lnTo>
                 </a:path>
               </a:pathLst>
             </a:custGeom>
-            <a:ln w="6775" cap="flat">
+            <a:ln w="8623" cap="flat">
               <a:solidFill>
                 <a:srgbClr val="EBEBEB">
                   <a:alpha val="100000"/>
@@ -2486,15 +2486,15 @@
           </p:nvSpPr>
           <p:spPr>
             <a:xfrm>
-              <a:off x="1969924" y="2583293"/>
-              <a:ext cx="0" cy="3139848"/>
+              <a:off x="2073803" y="2782896"/>
+              <a:ext cx="0" cy="2830414"/>
             </a:xfrm>
             <a:custGeom>
               <a:avLst/>
               <a:pathLst>
-                <a:path w="0" h="3139848">
+                <a:path w="0" h="2830414">
                   <a:moveTo>
-                    <a:pt x="0" y="3139848"/>
+                    <a:pt x="0" y="2830414"/>
                   </a:moveTo>
                   <a:lnTo>
                     <a:pt x="0" y="0"/>
@@ -2505,7 +2505,7 @@
                 </a:path>
               </a:pathLst>
             </a:custGeom>
-            <a:ln w="6775" cap="flat">
+            <a:ln w="8623" cap="flat">
               <a:solidFill>
                 <a:srgbClr val="EBEBEB">
                   <a:alpha val="100000"/>
@@ -2529,15 +2529,15 @@
           </p:nvSpPr>
           <p:spPr>
             <a:xfrm>
-              <a:off x="4055020" y="2583293"/>
-              <a:ext cx="0" cy="3139848"/>
+              <a:off x="4120361" y="2782896"/>
+              <a:ext cx="0" cy="2830414"/>
             </a:xfrm>
             <a:custGeom>
               <a:avLst/>
               <a:pathLst>
-                <a:path w="0" h="3139848">
+                <a:path w="0" h="2830414">
                   <a:moveTo>
-                    <a:pt x="0" y="3139848"/>
+                    <a:pt x="0" y="2830414"/>
                   </a:moveTo>
                   <a:lnTo>
                     <a:pt x="0" y="0"/>
@@ -2548,7 +2548,7 @@
                 </a:path>
               </a:pathLst>
             </a:custGeom>
-            <a:ln w="6775" cap="flat">
+            <a:ln w="8623" cap="flat">
               <a:solidFill>
                 <a:srgbClr val="EBEBEB">
                   <a:alpha val="100000"/>
@@ -2572,15 +2572,15 @@
           </p:nvSpPr>
           <p:spPr>
             <a:xfrm>
-              <a:off x="6140116" y="2583293"/>
-              <a:ext cx="0" cy="3139848"/>
+              <a:off x="6166920" y="2782896"/>
+              <a:ext cx="0" cy="2830414"/>
             </a:xfrm>
             <a:custGeom>
               <a:avLst/>
               <a:pathLst>
-                <a:path w="0" h="3139848">
+                <a:path w="0" h="2830414">
                   <a:moveTo>
-                    <a:pt x="0" y="3139848"/>
+                    <a:pt x="0" y="2830414"/>
                   </a:moveTo>
                   <a:lnTo>
                     <a:pt x="0" y="0"/>
@@ -2591,7 +2591,7 @@
                 </a:path>
               </a:pathLst>
             </a:custGeom>
-            <a:ln w="6775" cap="flat">
+            <a:ln w="8623" cap="flat">
               <a:solidFill>
                 <a:srgbClr val="EBEBEB">
                   <a:alpha val="100000"/>
@@ -2615,15 +2615,15 @@
           </p:nvSpPr>
           <p:spPr>
             <a:xfrm>
-              <a:off x="8225212" y="2583293"/>
-              <a:ext cx="0" cy="3139848"/>
+              <a:off x="8213479" y="2782896"/>
+              <a:ext cx="0" cy="2830414"/>
             </a:xfrm>
             <a:custGeom>
               <a:avLst/>
               <a:pathLst>
-                <a:path w="0" h="3139848">
+                <a:path w="0" h="2830414">
                   <a:moveTo>
-                    <a:pt x="0" y="3139848"/>
+                    <a:pt x="0" y="2830414"/>
                   </a:moveTo>
                   <a:lnTo>
                     <a:pt x="0" y="0"/>
@@ -2634,7 +2634,7 @@
                 </a:path>
               </a:pathLst>
             </a:custGeom>
-            <a:ln w="6775" cap="flat">
+            <a:ln w="8623" cap="flat">
               <a:solidFill>
                 <a:srgbClr val="EBEBEB">
                   <a:alpha val="100000"/>
@@ -2658,26 +2658,26 @@
           </p:nvSpPr>
           <p:spPr>
             <a:xfrm>
-              <a:off x="910695" y="5580422"/>
-              <a:ext cx="7706515" cy="0"/>
+              <a:off x="1034151" y="5484655"/>
+              <a:ext cx="7564080" cy="0"/>
             </a:xfrm>
             <a:custGeom>
               <a:avLst/>
               <a:pathLst>
-                <a:path w="7706515" h="0">
+                <a:path w="7564080" h="0">
                   <a:moveTo>
                     <a:pt x="0" y="0"/>
                   </a:moveTo>
                   <a:lnTo>
-                    <a:pt x="7706515" y="0"/>
-                  </a:lnTo>
-                  <a:lnTo>
-                    <a:pt x="7706515" y="0"/>
+                    <a:pt x="7564080" y="0"/>
+                  </a:lnTo>
+                  <a:lnTo>
+                    <a:pt x="7564080" y="0"/>
                   </a:lnTo>
                 </a:path>
               </a:pathLst>
             </a:custGeom>
-            <a:ln w="13550" cap="flat">
+            <a:ln w="17246" cap="flat">
               <a:solidFill>
                 <a:srgbClr val="EBEBEB">
                   <a:alpha val="100000"/>
@@ -2701,26 +2701,26 @@
           </p:nvSpPr>
           <p:spPr>
             <a:xfrm>
-              <a:off x="910695" y="4987855"/>
-              <a:ext cx="7706515" cy="0"/>
+              <a:off x="1034151" y="4950487"/>
+              <a:ext cx="7564080" cy="0"/>
             </a:xfrm>
             <a:custGeom>
               <a:avLst/>
               <a:pathLst>
-                <a:path w="7706515" h="0">
+                <a:path w="7564080" h="0">
                   <a:moveTo>
                     <a:pt x="0" y="0"/>
                   </a:moveTo>
                   <a:lnTo>
-                    <a:pt x="7706515" y="0"/>
-                  </a:lnTo>
-                  <a:lnTo>
-                    <a:pt x="7706515" y="0"/>
+                    <a:pt x="7564080" y="0"/>
+                  </a:lnTo>
+                  <a:lnTo>
+                    <a:pt x="7564080" y="0"/>
                   </a:lnTo>
                 </a:path>
               </a:pathLst>
             </a:custGeom>
-            <a:ln w="13550" cap="flat">
+            <a:ln w="17246" cap="flat">
               <a:solidFill>
                 <a:srgbClr val="EBEBEB">
                   <a:alpha val="100000"/>
@@ -2744,26 +2744,26 @@
           </p:nvSpPr>
           <p:spPr>
             <a:xfrm>
-              <a:off x="910695" y="4395288"/>
-              <a:ext cx="7706515" cy="0"/>
+              <a:off x="1034151" y="4416318"/>
+              <a:ext cx="7564080" cy="0"/>
             </a:xfrm>
             <a:custGeom>
               <a:avLst/>
               <a:pathLst>
-                <a:path w="7706515" h="0">
+                <a:path w="7564080" h="0">
                   <a:moveTo>
                     <a:pt x="0" y="0"/>
                   </a:moveTo>
                   <a:lnTo>
-                    <a:pt x="7706515" y="0"/>
-                  </a:lnTo>
-                  <a:lnTo>
-                    <a:pt x="7706515" y="0"/>
+                    <a:pt x="7564080" y="0"/>
+                  </a:lnTo>
+                  <a:lnTo>
+                    <a:pt x="7564080" y="0"/>
                   </a:lnTo>
                 </a:path>
               </a:pathLst>
             </a:custGeom>
-            <a:ln w="13550" cap="flat">
+            <a:ln w="17246" cap="flat">
               <a:solidFill>
                 <a:srgbClr val="EBEBEB">
                   <a:alpha val="100000"/>
@@ -2787,26 +2787,26 @@
           </p:nvSpPr>
           <p:spPr>
             <a:xfrm>
-              <a:off x="910695" y="3802722"/>
-              <a:ext cx="7706515" cy="0"/>
+              <a:off x="1034151" y="3882149"/>
+              <a:ext cx="7564080" cy="0"/>
             </a:xfrm>
             <a:custGeom>
               <a:avLst/>
               <a:pathLst>
-                <a:path w="7706515" h="0">
+                <a:path w="7564080" h="0">
                   <a:moveTo>
                     <a:pt x="0" y="0"/>
                   </a:moveTo>
                   <a:lnTo>
-                    <a:pt x="7706515" y="0"/>
-                  </a:lnTo>
-                  <a:lnTo>
-                    <a:pt x="7706515" y="0"/>
+                    <a:pt x="7564080" y="0"/>
+                  </a:lnTo>
+                  <a:lnTo>
+                    <a:pt x="7564080" y="0"/>
                   </a:lnTo>
                 </a:path>
               </a:pathLst>
             </a:custGeom>
-            <a:ln w="13550" cap="flat">
+            <a:ln w="17246" cap="flat">
               <a:solidFill>
                 <a:srgbClr val="EBEBEB">
                   <a:alpha val="100000"/>
@@ -2830,26 +2830,26 @@
           </p:nvSpPr>
           <p:spPr>
             <a:xfrm>
-              <a:off x="910695" y="3210155"/>
-              <a:ext cx="7706515" cy="0"/>
+              <a:off x="1034151" y="3347980"/>
+              <a:ext cx="7564080" cy="0"/>
             </a:xfrm>
             <a:custGeom>
               <a:avLst/>
               <a:pathLst>
-                <a:path w="7706515" h="0">
+                <a:path w="7564080" h="0">
                   <a:moveTo>
                     <a:pt x="0" y="0"/>
                   </a:moveTo>
                   <a:lnTo>
-                    <a:pt x="7706515" y="0"/>
-                  </a:lnTo>
-                  <a:lnTo>
-                    <a:pt x="7706515" y="0"/>
+                    <a:pt x="7564080" y="0"/>
+                  </a:lnTo>
+                  <a:lnTo>
+                    <a:pt x="7564080" y="0"/>
                   </a:lnTo>
                 </a:path>
               </a:pathLst>
             </a:custGeom>
-            <a:ln w="13550" cap="flat">
+            <a:ln w="17246" cap="flat">
               <a:solidFill>
                 <a:srgbClr val="EBEBEB">
                   <a:alpha val="100000"/>
@@ -2873,26 +2873,26 @@
           </p:nvSpPr>
           <p:spPr>
             <a:xfrm>
-              <a:off x="910695" y="2617588"/>
-              <a:ext cx="7706515" cy="0"/>
+              <a:off x="1034151" y="2813811"/>
+              <a:ext cx="7564080" cy="0"/>
             </a:xfrm>
             <a:custGeom>
               <a:avLst/>
               <a:pathLst>
-                <a:path w="7706515" h="0">
+                <a:path w="7564080" h="0">
                   <a:moveTo>
                     <a:pt x="0" y="0"/>
                   </a:moveTo>
                   <a:lnTo>
-                    <a:pt x="7706515" y="0"/>
-                  </a:lnTo>
-                  <a:lnTo>
-                    <a:pt x="7706515" y="0"/>
+                    <a:pt x="7564080" y="0"/>
+                  </a:lnTo>
+                  <a:lnTo>
+                    <a:pt x="7564080" y="0"/>
                   </a:lnTo>
                 </a:path>
               </a:pathLst>
             </a:custGeom>
-            <a:ln w="13550" cap="flat">
+            <a:ln w="17246" cap="flat">
               <a:solidFill>
                 <a:srgbClr val="EBEBEB">
                   <a:alpha val="100000"/>
@@ -2916,15 +2916,15 @@
           </p:nvSpPr>
           <p:spPr>
             <a:xfrm>
-              <a:off x="927375" y="2583293"/>
-              <a:ext cx="0" cy="3139848"/>
+              <a:off x="1050523" y="2782896"/>
+              <a:ext cx="0" cy="2830414"/>
             </a:xfrm>
             <a:custGeom>
               <a:avLst/>
               <a:pathLst>
-                <a:path w="0" h="3139848">
+                <a:path w="0" h="2830414">
                   <a:moveTo>
-                    <a:pt x="0" y="3139848"/>
+                    <a:pt x="0" y="2830414"/>
                   </a:moveTo>
                   <a:lnTo>
                     <a:pt x="0" y="0"/>
@@ -2935,7 +2935,7 @@
                 </a:path>
               </a:pathLst>
             </a:custGeom>
-            <a:ln w="13550" cap="flat">
+            <a:ln w="17246" cap="flat">
               <a:solidFill>
                 <a:srgbClr val="EBEBEB">
                   <a:alpha val="100000"/>
@@ -2959,15 +2959,15 @@
           </p:nvSpPr>
           <p:spPr>
             <a:xfrm>
-              <a:off x="3012472" y="2583293"/>
-              <a:ext cx="0" cy="3139848"/>
+              <a:off x="3097082" y="2782896"/>
+              <a:ext cx="0" cy="2830414"/>
             </a:xfrm>
             <a:custGeom>
               <a:avLst/>
               <a:pathLst>
-                <a:path w="0" h="3139848">
+                <a:path w="0" h="2830414">
                   <a:moveTo>
-                    <a:pt x="0" y="3139848"/>
+                    <a:pt x="0" y="2830414"/>
                   </a:moveTo>
                   <a:lnTo>
                     <a:pt x="0" y="0"/>
@@ -2978,7 +2978,7 @@
                 </a:path>
               </a:pathLst>
             </a:custGeom>
-            <a:ln w="13550" cap="flat">
+            <a:ln w="17246" cap="flat">
               <a:solidFill>
                 <a:srgbClr val="EBEBEB">
                   <a:alpha val="100000"/>
@@ -3002,15 +3002,15 @@
           </p:nvSpPr>
           <p:spPr>
             <a:xfrm>
-              <a:off x="5097568" y="2583293"/>
-              <a:ext cx="0" cy="3139848"/>
+              <a:off x="5143641" y="2782896"/>
+              <a:ext cx="0" cy="2830414"/>
             </a:xfrm>
             <a:custGeom>
               <a:avLst/>
               <a:pathLst>
-                <a:path w="0" h="3139848">
+                <a:path w="0" h="2830414">
                   <a:moveTo>
-                    <a:pt x="0" y="3139848"/>
+                    <a:pt x="0" y="2830414"/>
                   </a:moveTo>
                   <a:lnTo>
                     <a:pt x="0" y="0"/>
@@ -3021,7 +3021,7 @@
                 </a:path>
               </a:pathLst>
             </a:custGeom>
-            <a:ln w="13550" cap="flat">
+            <a:ln w="17246" cap="flat">
               <a:solidFill>
                 <a:srgbClr val="EBEBEB">
                   <a:alpha val="100000"/>
@@ -3045,15 +3045,15 @@
           </p:nvSpPr>
           <p:spPr>
             <a:xfrm>
-              <a:off x="7182664" y="2583293"/>
-              <a:ext cx="0" cy="3139848"/>
+              <a:off x="7190199" y="2782896"/>
+              <a:ext cx="0" cy="2830414"/>
             </a:xfrm>
             <a:custGeom>
               <a:avLst/>
               <a:pathLst>
-                <a:path w="0" h="3139848">
+                <a:path w="0" h="2830414">
                   <a:moveTo>
-                    <a:pt x="0" y="3139848"/>
+                    <a:pt x="0" y="2830414"/>
                   </a:moveTo>
                   <a:lnTo>
                     <a:pt x="0" y="0"/>
@@ -3064,7 +3064,7 @@
                 </a:path>
               </a:pathLst>
             </a:custGeom>
-            <a:ln w="13550" cap="flat">
+            <a:ln w="17246" cap="flat">
               <a:solidFill>
                 <a:srgbClr val="EBEBEB">
                   <a:alpha val="100000"/>
@@ -3088,183 +3088,183 @@
           </p:nvSpPr>
           <p:spPr>
             <a:xfrm>
-              <a:off x="1260991" y="3546274"/>
-              <a:ext cx="7005923" cy="1995917"/>
+              <a:off x="1377973" y="3650974"/>
+              <a:ext cx="6876437" cy="1799218"/>
             </a:xfrm>
             <a:custGeom>
               <a:avLst/>
               <a:pathLst>
-                <a:path w="7005923" h="1995917">
+                <a:path w="6876437" h="1799218">
                   <a:moveTo>
-                    <a:pt x="0" y="1995917"/>
+                    <a:pt x="0" y="1799218"/>
                   </a:moveTo>
                   <a:lnTo>
-                    <a:pt x="166807" y="1995917"/>
-                  </a:lnTo>
-                  <a:lnTo>
-                    <a:pt x="166807" y="1957335"/>
-                  </a:lnTo>
-                  <a:lnTo>
-                    <a:pt x="250211" y="1957335"/>
-                  </a:lnTo>
-                  <a:lnTo>
-                    <a:pt x="250211" y="1734059"/>
-                  </a:lnTo>
-                  <a:lnTo>
-                    <a:pt x="333615" y="1734059"/>
-                  </a:lnTo>
-                  <a:lnTo>
-                    <a:pt x="333615" y="1694089"/>
-                  </a:lnTo>
-                  <a:lnTo>
-                    <a:pt x="417019" y="1694089"/>
-                  </a:lnTo>
-                  <a:lnTo>
-                    <a:pt x="417019" y="1654590"/>
-                  </a:lnTo>
-                  <a:lnTo>
-                    <a:pt x="583826" y="1654590"/>
-                  </a:lnTo>
-                  <a:lnTo>
-                    <a:pt x="583826" y="1460554"/>
-                  </a:lnTo>
-                  <a:lnTo>
-                    <a:pt x="667230" y="1460554"/>
-                  </a:lnTo>
-                  <a:lnTo>
-                    <a:pt x="667230" y="1416535"/>
-                  </a:lnTo>
-                  <a:lnTo>
-                    <a:pt x="750634" y="1416535"/>
-                  </a:lnTo>
-                  <a:lnTo>
-                    <a:pt x="750634" y="1326937"/>
-                  </a:lnTo>
-                  <a:lnTo>
-                    <a:pt x="1084250" y="1326937"/>
-                  </a:lnTo>
-                  <a:lnTo>
-                    <a:pt x="1084250" y="1280356"/>
-                  </a:lnTo>
-                  <a:lnTo>
-                    <a:pt x="1167653" y="1280356"/>
-                  </a:lnTo>
-                  <a:lnTo>
-                    <a:pt x="1167653" y="1234513"/>
-                  </a:lnTo>
-                  <a:lnTo>
-                    <a:pt x="1417865" y="1234513"/>
-                  </a:lnTo>
-                  <a:lnTo>
-                    <a:pt x="1417865" y="1189129"/>
-                  </a:lnTo>
-                  <a:lnTo>
-                    <a:pt x="1501269" y="1189129"/>
-                  </a:lnTo>
-                  <a:lnTo>
-                    <a:pt x="1501269" y="1143356"/>
-                  </a:lnTo>
-                  <a:lnTo>
-                    <a:pt x="2001692" y="1143356"/>
-                  </a:lnTo>
-                  <a:lnTo>
-                    <a:pt x="2001692" y="1095159"/>
-                  </a:lnTo>
-                  <a:lnTo>
-                    <a:pt x="2168500" y="1095159"/>
-                  </a:lnTo>
-                  <a:lnTo>
-                    <a:pt x="2168500" y="999981"/>
-                  </a:lnTo>
-                  <a:lnTo>
-                    <a:pt x="2502115" y="999981"/>
-                  </a:lnTo>
-                  <a:lnTo>
-                    <a:pt x="2502115" y="953102"/>
-                  </a:lnTo>
-                  <a:lnTo>
-                    <a:pt x="2585519" y="953102"/>
-                  </a:lnTo>
-                  <a:lnTo>
-                    <a:pt x="2585519" y="905948"/>
-                  </a:lnTo>
-                  <a:lnTo>
-                    <a:pt x="3085942" y="905948"/>
-                  </a:lnTo>
-                  <a:lnTo>
-                    <a:pt x="3085942" y="812837"/>
-                  </a:lnTo>
-                  <a:lnTo>
-                    <a:pt x="3169346" y="812837"/>
-                  </a:lnTo>
-                  <a:lnTo>
-                    <a:pt x="3169346" y="675142"/>
-                  </a:lnTo>
-                  <a:lnTo>
-                    <a:pt x="3336154" y="675142"/>
-                  </a:lnTo>
-                  <a:lnTo>
-                    <a:pt x="3336154" y="628097"/>
-                  </a:lnTo>
-                  <a:lnTo>
-                    <a:pt x="3419557" y="628097"/>
-                  </a:lnTo>
-                  <a:lnTo>
-                    <a:pt x="3419557" y="581547"/>
-                  </a:lnTo>
-                  <a:lnTo>
-                    <a:pt x="4253596" y="581547"/>
-                  </a:lnTo>
-                  <a:lnTo>
-                    <a:pt x="4253596" y="535463"/>
-                  </a:lnTo>
-                  <a:lnTo>
-                    <a:pt x="4587211" y="535463"/>
-                  </a:lnTo>
-                  <a:lnTo>
-                    <a:pt x="4587211" y="489991"/>
-                  </a:lnTo>
-                  <a:lnTo>
-                    <a:pt x="4670615" y="489991"/>
-                  </a:lnTo>
-                  <a:lnTo>
-                    <a:pt x="4670615" y="445087"/>
-                  </a:lnTo>
-                  <a:lnTo>
-                    <a:pt x="4920827" y="445087"/>
-                  </a:lnTo>
-                  <a:lnTo>
-                    <a:pt x="4920827" y="314365"/>
-                  </a:lnTo>
-                  <a:lnTo>
-                    <a:pt x="5004231" y="314365"/>
-                  </a:lnTo>
-                  <a:lnTo>
-                    <a:pt x="5004231" y="268937"/>
-                  </a:lnTo>
-                  <a:lnTo>
-                    <a:pt x="5671461" y="268937"/>
-                  </a:lnTo>
-                  <a:lnTo>
-                    <a:pt x="5671461" y="223962"/>
-                  </a:lnTo>
-                  <a:lnTo>
-                    <a:pt x="6338692" y="223962"/>
-                  </a:lnTo>
-                  <a:lnTo>
-                    <a:pt x="6338692" y="179163"/>
-                  </a:lnTo>
-                  <a:lnTo>
-                    <a:pt x="6672308" y="179163"/>
-                  </a:lnTo>
-                  <a:lnTo>
-                    <a:pt x="6672308" y="44493"/>
-                  </a:lnTo>
-                  <a:lnTo>
-                    <a:pt x="7005923" y="44493"/>
-                  </a:lnTo>
-                  <a:lnTo>
-                    <a:pt x="7005923" y="0"/>
+                    <a:pt x="163724" y="1799218"/>
+                  </a:lnTo>
+                  <a:lnTo>
+                    <a:pt x="163724" y="1764438"/>
+                  </a:lnTo>
+                  <a:lnTo>
+                    <a:pt x="245587" y="1764438"/>
+                  </a:lnTo>
+                  <a:lnTo>
+                    <a:pt x="245587" y="1563166"/>
+                  </a:lnTo>
+                  <a:lnTo>
+                    <a:pt x="327449" y="1563166"/>
+                  </a:lnTo>
+                  <a:lnTo>
+                    <a:pt x="327449" y="1527135"/>
+                  </a:lnTo>
+                  <a:lnTo>
+                    <a:pt x="409311" y="1527135"/>
+                  </a:lnTo>
+                  <a:lnTo>
+                    <a:pt x="409311" y="1491528"/>
+                  </a:lnTo>
+                  <a:lnTo>
+                    <a:pt x="573036" y="1491528"/>
+                  </a:lnTo>
+                  <a:lnTo>
+                    <a:pt x="573036" y="1316615"/>
+                  </a:lnTo>
+                  <a:lnTo>
+                    <a:pt x="654898" y="1316615"/>
+                  </a:lnTo>
+                  <a:lnTo>
+                    <a:pt x="654898" y="1276935"/>
+                  </a:lnTo>
+                  <a:lnTo>
+                    <a:pt x="736761" y="1276935"/>
+                  </a:lnTo>
+                  <a:lnTo>
+                    <a:pt x="736761" y="1196166"/>
+                  </a:lnTo>
+                  <a:lnTo>
+                    <a:pt x="1064210" y="1196166"/>
+                  </a:lnTo>
+                  <a:lnTo>
+                    <a:pt x="1064210" y="1154175"/>
+                  </a:lnTo>
+                  <a:lnTo>
+                    <a:pt x="1146072" y="1154175"/>
+                  </a:lnTo>
+                  <a:lnTo>
+                    <a:pt x="1146072" y="1112851"/>
+                  </a:lnTo>
+                  <a:lnTo>
+                    <a:pt x="1391659" y="1112851"/>
+                  </a:lnTo>
+                  <a:lnTo>
+                    <a:pt x="1391659" y="1071939"/>
+                  </a:lnTo>
+                  <a:lnTo>
+                    <a:pt x="1473522" y="1071939"/>
+                  </a:lnTo>
+                  <a:lnTo>
+                    <a:pt x="1473522" y="1030677"/>
+                  </a:lnTo>
+                  <a:lnTo>
+                    <a:pt x="1964696" y="1030677"/>
+                  </a:lnTo>
+                  <a:lnTo>
+                    <a:pt x="1964696" y="987230"/>
+                  </a:lnTo>
+                  <a:lnTo>
+                    <a:pt x="2128421" y="987230"/>
+                  </a:lnTo>
+                  <a:lnTo>
+                    <a:pt x="2128421" y="901432"/>
+                  </a:lnTo>
+                  <a:lnTo>
+                    <a:pt x="2455870" y="901432"/>
+                  </a:lnTo>
+                  <a:lnTo>
+                    <a:pt x="2455870" y="859173"/>
+                  </a:lnTo>
+                  <a:lnTo>
+                    <a:pt x="2537732" y="859173"/>
+                  </a:lnTo>
+                  <a:lnTo>
+                    <a:pt x="2537732" y="816666"/>
+                  </a:lnTo>
+                  <a:lnTo>
+                    <a:pt x="3028906" y="816666"/>
+                  </a:lnTo>
+                  <a:lnTo>
+                    <a:pt x="3028906" y="732731"/>
+                  </a:lnTo>
+                  <a:lnTo>
+                    <a:pt x="3110769" y="732731"/>
+                  </a:lnTo>
+                  <a:lnTo>
+                    <a:pt x="3110769" y="608606"/>
+                  </a:lnTo>
+                  <a:lnTo>
+                    <a:pt x="3274493" y="608606"/>
+                  </a:lnTo>
+                  <a:lnTo>
+                    <a:pt x="3274493" y="566198"/>
+                  </a:lnTo>
+                  <a:lnTo>
+                    <a:pt x="3356356" y="566198"/>
+                  </a:lnTo>
+                  <a:lnTo>
+                    <a:pt x="3356356" y="524235"/>
+                  </a:lnTo>
+                  <a:lnTo>
+                    <a:pt x="4174979" y="524235"/>
+                  </a:lnTo>
+                  <a:lnTo>
+                    <a:pt x="4174979" y="482692"/>
+                  </a:lnTo>
+                  <a:lnTo>
+                    <a:pt x="4502429" y="482692"/>
+                  </a:lnTo>
+                  <a:lnTo>
+                    <a:pt x="4502429" y="441702"/>
+                  </a:lnTo>
+                  <a:lnTo>
+                    <a:pt x="4584291" y="441702"/>
+                  </a:lnTo>
+                  <a:lnTo>
+                    <a:pt x="4584291" y="401223"/>
+                  </a:lnTo>
+                  <a:lnTo>
+                    <a:pt x="4829878" y="401223"/>
+                  </a:lnTo>
+                  <a:lnTo>
+                    <a:pt x="4829878" y="283384"/>
+                  </a:lnTo>
+                  <a:lnTo>
+                    <a:pt x="4911740" y="283384"/>
+                  </a:lnTo>
+                  <a:lnTo>
+                    <a:pt x="4911740" y="242433"/>
+                  </a:lnTo>
+                  <a:lnTo>
+                    <a:pt x="5566639" y="242433"/>
+                  </a:lnTo>
+                  <a:lnTo>
+                    <a:pt x="5566639" y="201890"/>
+                  </a:lnTo>
+                  <a:lnTo>
+                    <a:pt x="6221538" y="201890"/>
+                  </a:lnTo>
+                  <a:lnTo>
+                    <a:pt x="6221538" y="161506"/>
+                  </a:lnTo>
+                  <a:lnTo>
+                    <a:pt x="6548987" y="161506"/>
+                  </a:lnTo>
+                  <a:lnTo>
+                    <a:pt x="6548987" y="40109"/>
+                  </a:lnTo>
+                  <a:lnTo>
+                    <a:pt x="6876437" y="40109"/>
+                  </a:lnTo>
+                  <a:lnTo>
+                    <a:pt x="6876437" y="0"/>
                   </a:lnTo>
                 </a:path>
               </a:pathLst>
@@ -3293,183 +3293,183 @@
           </p:nvSpPr>
           <p:spPr>
             <a:xfrm>
-              <a:off x="1260991" y="2861938"/>
-              <a:ext cx="7005923" cy="2657363"/>
+              <a:off x="1377973" y="3034080"/>
+              <a:ext cx="6876437" cy="2395477"/>
             </a:xfrm>
             <a:custGeom>
               <a:avLst/>
               <a:pathLst>
-                <a:path w="7005923" h="2657363">
+                <a:path w="6876437" h="2395477">
                   <a:moveTo>
-                    <a:pt x="0" y="2657363"/>
+                    <a:pt x="0" y="2395477"/>
                   </a:moveTo>
                   <a:lnTo>
-                    <a:pt x="166807" y="2657363"/>
-                  </a:lnTo>
-                  <a:lnTo>
-                    <a:pt x="166807" y="2596185"/>
-                  </a:lnTo>
-                  <a:lnTo>
-                    <a:pt x="250211" y="2596185"/>
-                  </a:lnTo>
-                  <a:lnTo>
-                    <a:pt x="250211" y="2251746"/>
-                  </a:lnTo>
-                  <a:lnTo>
-                    <a:pt x="333615" y="2251746"/>
-                  </a:lnTo>
-                  <a:lnTo>
-                    <a:pt x="333615" y="2191744"/>
-                  </a:lnTo>
-                  <a:lnTo>
-                    <a:pt x="417019" y="2191744"/>
-                  </a:lnTo>
-                  <a:lnTo>
-                    <a:pt x="417019" y="2132925"/>
-                  </a:lnTo>
-                  <a:lnTo>
-                    <a:pt x="583826" y="2132925"/>
-                  </a:lnTo>
-                  <a:lnTo>
-                    <a:pt x="583826" y="1850566"/>
-                  </a:lnTo>
-                  <a:lnTo>
-                    <a:pt x="667230" y="1850566"/>
-                  </a:lnTo>
-                  <a:lnTo>
-                    <a:pt x="667230" y="1787975"/>
-                  </a:lnTo>
-                  <a:lnTo>
-                    <a:pt x="750634" y="1787975"/>
-                  </a:lnTo>
-                  <a:lnTo>
-                    <a:pt x="750634" y="1662161"/>
-                  </a:lnTo>
-                  <a:lnTo>
-                    <a:pt x="1084250" y="1662161"/>
-                  </a:lnTo>
-                  <a:lnTo>
-                    <a:pt x="1084250" y="1597571"/>
-                  </a:lnTo>
-                  <a:lnTo>
-                    <a:pt x="1167653" y="1597571"/>
-                  </a:lnTo>
-                  <a:lnTo>
-                    <a:pt x="1167653" y="1534539"/>
-                  </a:lnTo>
-                  <a:lnTo>
-                    <a:pt x="1417865" y="1534539"/>
-                  </a:lnTo>
-                  <a:lnTo>
-                    <a:pt x="1417865" y="1472645"/>
-                  </a:lnTo>
-                  <a:lnTo>
-                    <a:pt x="1501269" y="1472645"/>
-                  </a:lnTo>
-                  <a:lnTo>
-                    <a:pt x="1501269" y="1410724"/>
-                  </a:lnTo>
-                  <a:lnTo>
-                    <a:pt x="2001692" y="1410724"/>
-                  </a:lnTo>
-                  <a:lnTo>
-                    <a:pt x="2001692" y="1346056"/>
-                  </a:lnTo>
-                  <a:lnTo>
-                    <a:pt x="2168500" y="1346056"/>
-                  </a:lnTo>
-                  <a:lnTo>
-                    <a:pt x="2168500" y="1219910"/>
-                  </a:lnTo>
-                  <a:lnTo>
-                    <a:pt x="2502115" y="1219910"/>
-                  </a:lnTo>
-                  <a:lnTo>
-                    <a:pt x="2502115" y="1158516"/>
-                  </a:lnTo>
-                  <a:lnTo>
-                    <a:pt x="2585519" y="1158516"/>
-                  </a:lnTo>
-                  <a:lnTo>
-                    <a:pt x="2585519" y="1097238"/>
-                  </a:lnTo>
-                  <a:lnTo>
-                    <a:pt x="3085942" y="1097238"/>
-                  </a:lnTo>
-                  <a:lnTo>
-                    <a:pt x="3085942" y="977600"/>
-                  </a:lnTo>
-                  <a:lnTo>
-                    <a:pt x="3169346" y="977600"/>
-                  </a:lnTo>
-                  <a:lnTo>
-                    <a:pt x="3169346" y="803848"/>
-                  </a:lnTo>
-                  <a:lnTo>
-                    <a:pt x="3336154" y="803848"/>
-                  </a:lnTo>
-                  <a:lnTo>
-                    <a:pt x="3336154" y="745316"/>
-                  </a:lnTo>
-                  <a:lnTo>
-                    <a:pt x="3419557" y="745316"/>
-                  </a:lnTo>
-                  <a:lnTo>
-                    <a:pt x="3419557" y="687801"/>
-                  </a:lnTo>
-                  <a:lnTo>
-                    <a:pt x="4253596" y="687801"/>
-                  </a:lnTo>
-                  <a:lnTo>
-                    <a:pt x="4253596" y="631246"/>
-                  </a:lnTo>
-                  <a:lnTo>
-                    <a:pt x="4587211" y="631246"/>
-                  </a:lnTo>
-                  <a:lnTo>
-                    <a:pt x="4587211" y="575812"/>
-                  </a:lnTo>
-                  <a:lnTo>
-                    <a:pt x="4670615" y="575812"/>
-                  </a:lnTo>
-                  <a:lnTo>
-                    <a:pt x="4670615" y="521423"/>
-                  </a:lnTo>
-                  <a:lnTo>
-                    <a:pt x="4920827" y="521423"/>
-                  </a:lnTo>
-                  <a:lnTo>
-                    <a:pt x="4920827" y="365021"/>
-                  </a:lnTo>
-                  <a:lnTo>
-                    <a:pt x="5004231" y="365021"/>
-                  </a:lnTo>
-                  <a:lnTo>
-                    <a:pt x="5004231" y="311324"/>
-                  </a:lnTo>
-                  <a:lnTo>
-                    <a:pt x="5671461" y="311324"/>
-                  </a:lnTo>
-                  <a:lnTo>
-                    <a:pt x="5671461" y="258486"/>
-                  </a:lnTo>
-                  <a:lnTo>
-                    <a:pt x="6338692" y="258486"/>
-                  </a:lnTo>
-                  <a:lnTo>
-                    <a:pt x="6338692" y="206171"/>
-                  </a:lnTo>
-                  <a:lnTo>
-                    <a:pt x="6672308" y="206171"/>
-                  </a:lnTo>
-                  <a:lnTo>
-                    <a:pt x="6672308" y="50753"/>
-                  </a:lnTo>
-                  <a:lnTo>
-                    <a:pt x="7005923" y="50753"/>
-                  </a:lnTo>
-                  <a:lnTo>
-                    <a:pt x="7005923" y="0"/>
+                    <a:pt x="163724" y="2395477"/>
+                  </a:lnTo>
+                  <a:lnTo>
+                    <a:pt x="163724" y="2340329"/>
+                  </a:lnTo>
+                  <a:lnTo>
+                    <a:pt x="245587" y="2340329"/>
+                  </a:lnTo>
+                  <a:lnTo>
+                    <a:pt x="245587" y="2029835"/>
+                  </a:lnTo>
+                  <a:lnTo>
+                    <a:pt x="327449" y="2029835"/>
+                  </a:lnTo>
+                  <a:lnTo>
+                    <a:pt x="327449" y="1975746"/>
+                  </a:lnTo>
+                  <a:lnTo>
+                    <a:pt x="409311" y="1975746"/>
+                  </a:lnTo>
+                  <a:lnTo>
+                    <a:pt x="409311" y="1922723"/>
+                  </a:lnTo>
+                  <a:lnTo>
+                    <a:pt x="573036" y="1922723"/>
+                  </a:lnTo>
+                  <a:lnTo>
+                    <a:pt x="573036" y="1668192"/>
+                  </a:lnTo>
+                  <a:lnTo>
+                    <a:pt x="654898" y="1668192"/>
+                  </a:lnTo>
+                  <a:lnTo>
+                    <a:pt x="654898" y="1611768"/>
+                  </a:lnTo>
+                  <a:lnTo>
+                    <a:pt x="736761" y="1611768"/>
+                  </a:lnTo>
+                  <a:lnTo>
+                    <a:pt x="736761" y="1498354"/>
+                  </a:lnTo>
+                  <a:lnTo>
+                    <a:pt x="1064210" y="1498354"/>
+                  </a:lnTo>
+                  <a:lnTo>
+                    <a:pt x="1064210" y="1440129"/>
+                  </a:lnTo>
+                  <a:lnTo>
+                    <a:pt x="1146072" y="1440129"/>
+                  </a:lnTo>
+                  <a:lnTo>
+                    <a:pt x="1146072" y="1383309"/>
+                  </a:lnTo>
+                  <a:lnTo>
+                    <a:pt x="1391659" y="1383309"/>
+                  </a:lnTo>
+                  <a:lnTo>
+                    <a:pt x="1391659" y="1327515"/>
+                  </a:lnTo>
+                  <a:lnTo>
+                    <a:pt x="1473522" y="1327515"/>
+                  </a:lnTo>
+                  <a:lnTo>
+                    <a:pt x="1473522" y="1271696"/>
+                  </a:lnTo>
+                  <a:lnTo>
+                    <a:pt x="1964696" y="1271696"/>
+                  </a:lnTo>
+                  <a:lnTo>
+                    <a:pt x="1964696" y="1213401"/>
+                  </a:lnTo>
+                  <a:lnTo>
+                    <a:pt x="2128421" y="1213401"/>
+                  </a:lnTo>
+                  <a:lnTo>
+                    <a:pt x="2128421" y="1099687"/>
+                  </a:lnTo>
+                  <a:lnTo>
+                    <a:pt x="2455870" y="1099687"/>
+                  </a:lnTo>
+                  <a:lnTo>
+                    <a:pt x="2455870" y="1044343"/>
+                  </a:lnTo>
+                  <a:lnTo>
+                    <a:pt x="2537732" y="1044343"/>
+                  </a:lnTo>
+                  <a:lnTo>
+                    <a:pt x="2537732" y="989104"/>
+                  </a:lnTo>
+                  <a:lnTo>
+                    <a:pt x="3028906" y="989104"/>
+                  </a:lnTo>
+                  <a:lnTo>
+                    <a:pt x="3028906" y="881257"/>
+                  </a:lnTo>
+                  <a:lnTo>
+                    <a:pt x="3110769" y="881257"/>
+                  </a:lnTo>
+                  <a:lnTo>
+                    <a:pt x="3110769" y="724628"/>
+                  </a:lnTo>
+                  <a:lnTo>
+                    <a:pt x="3274493" y="724628"/>
+                  </a:lnTo>
+                  <a:lnTo>
+                    <a:pt x="3274493" y="671864"/>
+                  </a:lnTo>
+                  <a:lnTo>
+                    <a:pt x="3356356" y="671864"/>
+                  </a:lnTo>
+                  <a:lnTo>
+                    <a:pt x="3356356" y="620017"/>
+                  </a:lnTo>
+                  <a:lnTo>
+                    <a:pt x="4174979" y="620017"/>
+                  </a:lnTo>
+                  <a:lnTo>
+                    <a:pt x="4174979" y="569036"/>
+                  </a:lnTo>
+                  <a:lnTo>
+                    <a:pt x="4502429" y="569036"/>
+                  </a:lnTo>
+                  <a:lnTo>
+                    <a:pt x="4502429" y="519065"/>
+                  </a:lnTo>
+                  <a:lnTo>
+                    <a:pt x="4584291" y="519065"/>
+                  </a:lnTo>
+                  <a:lnTo>
+                    <a:pt x="4584291" y="470036"/>
+                  </a:lnTo>
+                  <a:lnTo>
+                    <a:pt x="4829878" y="470036"/>
+                  </a:lnTo>
+                  <a:lnTo>
+                    <a:pt x="4829878" y="329048"/>
+                  </a:lnTo>
+                  <a:lnTo>
+                    <a:pt x="4911740" y="329048"/>
+                  </a:lnTo>
+                  <a:lnTo>
+                    <a:pt x="4911740" y="280643"/>
+                  </a:lnTo>
+                  <a:lnTo>
+                    <a:pt x="5566639" y="280643"/>
+                  </a:lnTo>
+                  <a:lnTo>
+                    <a:pt x="5566639" y="233012"/>
+                  </a:lnTo>
+                  <a:lnTo>
+                    <a:pt x="6221538" y="233012"/>
+                  </a:lnTo>
+                  <a:lnTo>
+                    <a:pt x="6221538" y="185852"/>
+                  </a:lnTo>
+                  <a:lnTo>
+                    <a:pt x="6548987" y="185852"/>
+                  </a:lnTo>
+                  <a:lnTo>
+                    <a:pt x="6548987" y="45751"/>
+                  </a:lnTo>
+                  <a:lnTo>
+                    <a:pt x="6876437" y="45751"/>
+                  </a:lnTo>
+                  <a:lnTo>
+                    <a:pt x="6876437" y="0"/>
                   </a:lnTo>
                 </a:path>
               </a:pathLst>
@@ -3498,8 +3498,8 @@
           </p:nvSpPr>
           <p:spPr>
             <a:xfrm>
-              <a:off x="692708" y="5540371"/>
-              <a:ext cx="155356" cy="80101"/>
+              <a:off x="756929" y="5433678"/>
+              <a:ext cx="197510" cy="101955"/>
             </a:xfrm>
             <a:prstGeom prst="rect">
               <a:avLst/>
@@ -3512,7 +3512,7 @@
             <a:p>
               <a:pPr algn="l" marL="0" marR="0" indent="0">
                 <a:lnSpc>
-                  <a:spcPts val="880"/>
+                  <a:spcPts val="1120"/>
                 </a:lnSpc>
                 <a:spcBef>
                   <a:spcPts val="0"/>
@@ -3522,7 +3522,7 @@
                 </a:spcAft>
               </a:pPr>
               <a:r>
-                <a:rPr sz="880">
+                <a:rPr sz="1120">
                   <a:solidFill>
                     <a:srgbClr val="4D4D4D">
                       <a:alpha val="100000"/>
@@ -3544,8 +3544,8 @@
           </p:nvSpPr>
           <p:spPr>
             <a:xfrm>
-              <a:off x="692708" y="4947804"/>
-              <a:ext cx="155356" cy="80101"/>
+              <a:off x="756929" y="4899509"/>
+              <a:ext cx="197510" cy="101955"/>
             </a:xfrm>
             <a:prstGeom prst="rect">
               <a:avLst/>
@@ -3558,7 +3558,7 @@
             <a:p>
               <a:pPr algn="l" marL="0" marR="0" indent="0">
                 <a:lnSpc>
-                  <a:spcPts val="880"/>
+                  <a:spcPts val="1120"/>
                 </a:lnSpc>
                 <a:spcBef>
                   <a:spcPts val="0"/>
@@ -3568,7 +3568,7 @@
                 </a:spcAft>
               </a:pPr>
               <a:r>
-                <a:rPr sz="880">
+                <a:rPr sz="1120">
                   <a:solidFill>
                     <a:srgbClr val="4D4D4D">
                       <a:alpha val="100000"/>
@@ -3590,8 +3590,8 @@
           </p:nvSpPr>
           <p:spPr>
             <a:xfrm>
-              <a:off x="692708" y="4355238"/>
-              <a:ext cx="155356" cy="80101"/>
+              <a:off x="756929" y="4365340"/>
+              <a:ext cx="197510" cy="101955"/>
             </a:xfrm>
             <a:prstGeom prst="rect">
               <a:avLst/>
@@ -3604,7 +3604,7 @@
             <a:p>
               <a:pPr algn="l" marL="0" marR="0" indent="0">
                 <a:lnSpc>
-                  <a:spcPts val="880"/>
+                  <a:spcPts val="1120"/>
                 </a:lnSpc>
                 <a:spcBef>
                   <a:spcPts val="0"/>
@@ -3614,7 +3614,7 @@
                 </a:spcAft>
               </a:pPr>
               <a:r>
-                <a:rPr sz="880">
+                <a:rPr sz="1120">
                   <a:solidFill>
                     <a:srgbClr val="4D4D4D">
                       <a:alpha val="100000"/>
@@ -3636,8 +3636,8 @@
           </p:nvSpPr>
           <p:spPr>
             <a:xfrm>
-              <a:off x="692708" y="3762671"/>
-              <a:ext cx="155356" cy="80101"/>
+              <a:off x="756929" y="3831171"/>
+              <a:ext cx="197510" cy="101955"/>
             </a:xfrm>
             <a:prstGeom prst="rect">
               <a:avLst/>
@@ -3650,7 +3650,7 @@
             <a:p>
               <a:pPr algn="l" marL="0" marR="0" indent="0">
                 <a:lnSpc>
-                  <a:spcPts val="880"/>
+                  <a:spcPts val="1120"/>
                 </a:lnSpc>
                 <a:spcBef>
                   <a:spcPts val="0"/>
@@ -3660,7 +3660,7 @@
                 </a:spcAft>
               </a:pPr>
               <a:r>
-                <a:rPr sz="880">
+                <a:rPr sz="1120">
                   <a:solidFill>
                     <a:srgbClr val="4D4D4D">
                       <a:alpha val="100000"/>
@@ -3682,8 +3682,8 @@
           </p:nvSpPr>
           <p:spPr>
             <a:xfrm>
-              <a:off x="692708" y="3170104"/>
-              <a:ext cx="155356" cy="80101"/>
+              <a:off x="756929" y="3297002"/>
+              <a:ext cx="197510" cy="101955"/>
             </a:xfrm>
             <a:prstGeom prst="rect">
               <a:avLst/>
@@ -3696,7 +3696,7 @@
             <a:p>
               <a:pPr algn="l" marL="0" marR="0" indent="0">
                 <a:lnSpc>
-                  <a:spcPts val="880"/>
+                  <a:spcPts val="1120"/>
                 </a:lnSpc>
                 <a:spcBef>
                   <a:spcPts val="0"/>
@@ -3706,7 +3706,7 @@
                 </a:spcAft>
               </a:pPr>
               <a:r>
-                <a:rPr sz="880">
+                <a:rPr sz="1120">
                   <a:solidFill>
                     <a:srgbClr val="4D4D4D">
                       <a:alpha val="100000"/>
@@ -3728,8 +3728,8 @@
           </p:nvSpPr>
           <p:spPr>
             <a:xfrm>
-              <a:off x="692708" y="2577537"/>
-              <a:ext cx="155356" cy="80101"/>
+              <a:off x="756929" y="2762834"/>
+              <a:ext cx="197510" cy="101955"/>
             </a:xfrm>
             <a:prstGeom prst="rect">
               <a:avLst/>
@@ -3742,7 +3742,7 @@
             <a:p>
               <a:pPr algn="l" marL="0" marR="0" indent="0">
                 <a:lnSpc>
-                  <a:spcPts val="880"/>
+                  <a:spcPts val="1120"/>
                 </a:lnSpc>
                 <a:spcBef>
                   <a:spcPts val="0"/>
@@ -3752,7 +3752,7 @@
                 </a:spcAft>
               </a:pPr>
               <a:r>
-                <a:rPr sz="880">
+                <a:rPr sz="1120">
                   <a:solidFill>
                     <a:srgbClr val="4D4D4D">
                       <a:alpha val="100000"/>
@@ -3774,8 +3774,8 @@
           </p:nvSpPr>
           <p:spPr>
             <a:xfrm>
-              <a:off x="896286" y="5785772"/>
-              <a:ext cx="62179" cy="80101"/>
+              <a:off x="1011021" y="5693022"/>
+              <a:ext cx="79004" cy="101955"/>
             </a:xfrm>
             <a:prstGeom prst="rect">
               <a:avLst/>
@@ -3788,7 +3788,7 @@
             <a:p>
               <a:pPr algn="l" marL="0" marR="0" indent="0">
                 <a:lnSpc>
-                  <a:spcPts val="880"/>
+                  <a:spcPts val="1120"/>
                 </a:lnSpc>
                 <a:spcBef>
                   <a:spcPts val="0"/>
@@ -3798,7 +3798,7 @@
                 </a:spcAft>
               </a:pPr>
               <a:r>
-                <a:rPr sz="880">
+                <a:rPr sz="1120">
                   <a:solidFill>
                     <a:srgbClr val="4D4D4D">
                       <a:alpha val="100000"/>
@@ -3820,8 +3820,8 @@
           </p:nvSpPr>
           <p:spPr>
             <a:xfrm>
-              <a:off x="2950293" y="5785772"/>
-              <a:ext cx="124358" cy="80101"/>
+              <a:off x="3018078" y="5693022"/>
+              <a:ext cx="158008" cy="101955"/>
             </a:xfrm>
             <a:prstGeom prst="rect">
               <a:avLst/>
@@ -3834,7 +3834,7 @@
             <a:p>
               <a:pPr algn="l" marL="0" marR="0" indent="0">
                 <a:lnSpc>
-                  <a:spcPts val="880"/>
+                  <a:spcPts val="1120"/>
                 </a:lnSpc>
                 <a:spcBef>
                   <a:spcPts val="0"/>
@@ -3844,7 +3844,7 @@
                 </a:spcAft>
               </a:pPr>
               <a:r>
-                <a:rPr sz="880">
+                <a:rPr sz="1120">
                   <a:solidFill>
                     <a:srgbClr val="4D4D4D">
                       <a:alpha val="100000"/>
@@ -3866,8 +3866,8 @@
           </p:nvSpPr>
           <p:spPr>
             <a:xfrm>
-              <a:off x="5035389" y="5785772"/>
-              <a:ext cx="124358" cy="80101"/>
+              <a:off x="5064636" y="5693022"/>
+              <a:ext cx="158008" cy="101955"/>
             </a:xfrm>
             <a:prstGeom prst="rect">
               <a:avLst/>
@@ -3880,7 +3880,7 @@
             <a:p>
               <a:pPr algn="l" marL="0" marR="0" indent="0">
                 <a:lnSpc>
-                  <a:spcPts val="880"/>
+                  <a:spcPts val="1120"/>
                 </a:lnSpc>
                 <a:spcBef>
                   <a:spcPts val="0"/>
@@ -3890,7 +3890,7 @@
                 </a:spcAft>
               </a:pPr>
               <a:r>
-                <a:rPr sz="880">
+                <a:rPr sz="1120">
                   <a:solidFill>
                     <a:srgbClr val="4D4D4D">
                       <a:alpha val="100000"/>
@@ -3912,8 +3912,8 @@
           </p:nvSpPr>
           <p:spPr>
             <a:xfrm>
-              <a:off x="7120485" y="5785772"/>
-              <a:ext cx="124358" cy="80101"/>
+              <a:off x="7111195" y="5693022"/>
+              <a:ext cx="158008" cy="101955"/>
             </a:xfrm>
             <a:prstGeom prst="rect">
               <a:avLst/>
@@ -3926,7 +3926,7 @@
             <a:p>
               <a:pPr algn="l" marL="0" marR="0" indent="0">
                 <a:lnSpc>
-                  <a:spcPts val="880"/>
+                  <a:spcPts val="1120"/>
                 </a:lnSpc>
                 <a:spcBef>
                   <a:spcPts val="0"/>
@@ -3936,7 +3936,7 @@
                 </a:spcAft>
               </a:pPr>
               <a:r>
-                <a:rPr sz="880">
+                <a:rPr sz="1120">
                   <a:solidFill>
                     <a:srgbClr val="4D4D4D">
                       <a:alpha val="100000"/>
@@ -3958,8 +3958,8 @@
           </p:nvSpPr>
           <p:spPr>
             <a:xfrm>
-              <a:off x="4166072" y="5925448"/>
-              <a:ext cx="1195760" cy="100218"/>
+              <a:off x="4055456" y="5870717"/>
+              <a:ext cx="1521470" cy="127558"/>
             </a:xfrm>
             <a:prstGeom prst="rect">
               <a:avLst/>
@@ -3972,7 +3972,7 @@
             <a:p>
               <a:pPr algn="l" marL="0" marR="0" indent="0">
                 <a:lnSpc>
-                  <a:spcPts val="1100"/>
+                  <a:spcPts val="1400"/>
                 </a:lnSpc>
                 <a:spcBef>
                   <a:spcPts val="0"/>
@@ -3982,7 +3982,7 @@
                 </a:spcAft>
               </a:pPr>
               <a:r>
-                <a:rPr sz="1100">
+                <a:rPr sz="1400">
                   <a:solidFill>
                     <a:srgbClr val="000000">
                       <a:alpha val="100000"/>
@@ -4004,8 +4004,8 @@
           </p:nvSpPr>
           <p:spPr>
             <a:xfrm rot="-5400000">
-              <a:off x="-87047" y="4103109"/>
-              <a:ext cx="1327891" cy="100218"/>
+              <a:off x="-235221" y="4134324"/>
+              <a:ext cx="1689536" cy="127558"/>
             </a:xfrm>
             <a:prstGeom prst="rect">
               <a:avLst/>
@@ -4018,7 +4018,7 @@
             <a:p>
               <a:pPr algn="l" marL="0" marR="0" indent="0">
                 <a:lnSpc>
-                  <a:spcPts val="1100"/>
+                  <a:spcPts val="1400"/>
                 </a:lnSpc>
                 <a:spcBef>
                   <a:spcPts val="0"/>
@@ -4028,7 +4028,7 @@
                 </a:spcAft>
               </a:pPr>
               <a:r>
-                <a:rPr sz="1100">
+                <a:rPr sz="1400">
                   <a:solidFill>
                     <a:srgbClr val="000000">
                       <a:alpha val="100000"/>
@@ -4050,7 +4050,7 @@
           </p:nvSpPr>
           <p:spPr>
             <a:xfrm>
-              <a:off x="3547476" y="2264798"/>
+              <a:off x="3323124" y="2407465"/>
               <a:ext cx="175564" cy="0"/>
             </a:xfrm>
             <a:custGeom>
@@ -4090,7 +4090,7 @@
           </p:nvSpPr>
           <p:spPr>
             <a:xfrm>
-              <a:off x="4788049" y="2264798"/>
+              <a:off x="4840953" y="2407465"/>
               <a:ext cx="175564" cy="0"/>
             </a:xfrm>
             <a:custGeom>
@@ -4130,8 +4130,8 @@
           </p:nvSpPr>
           <p:spPr>
             <a:xfrm>
-              <a:off x="3814575" y="2224748"/>
-              <a:ext cx="881938" cy="80101"/>
+              <a:off x="3609202" y="2356487"/>
+              <a:ext cx="1121237" cy="101955"/>
             </a:xfrm>
             <a:prstGeom prst="rect">
               <a:avLst/>
@@ -4144,7 +4144,7 @@
             <a:p>
               <a:pPr algn="l" marL="0" marR="0" indent="0">
                 <a:lnSpc>
-                  <a:spcPts val="880"/>
+                  <a:spcPts val="1120"/>
                 </a:lnSpc>
                 <a:spcBef>
                   <a:spcPts val="0"/>
@@ -4154,7 +4154,7 @@
                 </a:spcAft>
               </a:pPr>
               <a:r>
-                <a:rPr sz="880">
+                <a:rPr sz="1120">
                   <a:solidFill>
                     <a:srgbClr val="000000">
                       <a:alpha val="100000"/>
@@ -4176,8 +4176,8 @@
           </p:nvSpPr>
           <p:spPr>
             <a:xfrm>
-              <a:off x="5055148" y="2224748"/>
-              <a:ext cx="947226" cy="80101"/>
+              <a:off x="5127031" y="2356487"/>
+              <a:ext cx="1204173" cy="101955"/>
             </a:xfrm>
             <a:prstGeom prst="rect">
               <a:avLst/>
@@ -4190,7 +4190,7 @@
             <a:p>
               <a:pPr algn="l" marL="0" marR="0" indent="0">
                 <a:lnSpc>
-                  <a:spcPts val="880"/>
+                  <a:spcPts val="1120"/>
                 </a:lnSpc>
                 <a:spcBef>
                   <a:spcPts val="0"/>
@@ -4200,7 +4200,7 @@
                 </a:spcAft>
               </a:pPr>
               <a:r>
-                <a:rPr sz="880">
+                <a:rPr sz="1120">
                   <a:solidFill>
                     <a:srgbClr val="000000">
                       <a:alpha val="100000"/>
@@ -4222,8 +4222,8 @@
           </p:nvSpPr>
           <p:spPr>
             <a:xfrm>
-              <a:off x="910695" y="1896563"/>
-              <a:ext cx="3913906" cy="91165"/>
+              <a:off x="1034151" y="1977589"/>
+              <a:ext cx="4697455" cy="109362"/>
             </a:xfrm>
             <a:prstGeom prst="rect">
               <a:avLst/>
@@ -4236,7 +4236,7 @@
             <a:p>
               <a:pPr algn="l" marL="0" marR="0" indent="0">
                 <a:lnSpc>
-                  <a:spcPts val="1000"/>
+                  <a:spcPts val="1200"/>
                 </a:lnSpc>
                 <a:spcBef>
                   <a:spcPts val="0"/>
@@ -4246,7 +4246,7 @@
                 </a:spcAft>
               </a:pPr>
               <a:r>
-                <a:rPr sz="1000">
+                <a:rPr sz="1200">
                   <a:solidFill>
                     <a:srgbClr val="404040">
                       <a:alpha val="100000"/>
@@ -4268,8 +4268,8 @@
           </p:nvSpPr>
           <p:spPr>
             <a:xfrm>
-              <a:off x="910695" y="1669789"/>
-              <a:ext cx="1806397" cy="120152"/>
+              <a:off x="1034151" y="1688767"/>
+              <a:ext cx="2299716" cy="153070"/>
             </a:xfrm>
             <a:prstGeom prst="rect">
               <a:avLst/>
@@ -4282,7 +4282,7 @@
             <a:p>
               <a:pPr algn="l" marL="0" marR="0" indent="0">
                 <a:lnSpc>
-                  <a:spcPts val="1320"/>
+                  <a:spcPts val="1680"/>
                 </a:lnSpc>
                 <a:spcBef>
                   <a:spcPts val="0"/>
@@ -4292,7 +4292,7 @@
                 </a:spcAft>
               </a:pPr>
               <a:r>
-                <a:rPr sz="1320">
+                <a:rPr sz="1680">
                   <a:solidFill>
                     <a:srgbClr val="000000">
                       <a:alpha val="100000"/>
